--- a/Phase_1/UCS2717-Poster.pptx
+++ b/Phase_1/UCS2717-Poster.pptx
@@ -2780,7 +2780,7 @@
                 <a:ea typeface="Arial"/>
                 <a:cs typeface="Arial"/>
               </a:rPr>
-              <a:t>[PROJECT TITLE: A CONCISE DESCRIPTION OF YOUR WORK]</a:t>
+              <a:t>PAYLOAD-AWARE TWO-TIER UAV ROUTE PLANNING FOR LAST-MILE DELIVERY</a:t>
             </a:r>
           </a:p>
         </p:txBody>
@@ -2846,7 +2846,7 @@
                 <a:ea typeface="Arial"/>
                 <a:cs typeface="Arial"/>
               </a:rPr>
-              <a:t>[Student 1, Register No.]   [Student 2, Register No.]   [Student 3, Register No.]   [Student 4, Register No.]</a:t>
+              <a:t>Thirumurugan RA, 3122235001149          Meghna Manimaran, 3122235001079          Shrika SP Thota, 3122235001125</a:t>
             </a:r>
           </a:p>
         </p:txBody>
@@ -2912,7 +2912,7 @@
                 <a:ea typeface="Arial"/>
                 <a:cs typeface="Arial"/>
               </a:rPr>
-              <a:t>Guide: [Dr./Mr./Ms. Name, Designation]</a:t>
+              <a:t>Guide: Dr. N. Sujaudeen, Assistant Professor, Department of CSE</a:t>
             </a:r>
           </a:p>
         </p:txBody>
@@ -2933,8 +2933,8 @@
         </p:nvSpPr>
         <p:spPr>
           <a:xfrm>
-            <a:off x="562977" y="4330991"/>
-            <a:ext cx="8393530" cy="666750"/>
+            <a:off x="454056" y="4275701"/>
+            <a:ext cx="8513564" cy="666750"/>
           </a:xfrm>
           <a:prstGeom prst="rect">
             <a:avLst/>
@@ -2978,18 +2978,7 @@
                 <a:ea typeface="Arial"/>
                 <a:cs typeface="Arial"/>
               </a:rPr>
-              <a:t>Problem </a:t>
-            </a:r>
-            <a:r>
-              <a:rPr lang="en-US" sz="3300" b="1" dirty="0">
-                <a:solidFill>
-                  <a:srgbClr val="087F8C"/>
-                </a:solidFill>
-                <a:latin typeface="Arial"/>
-                <a:ea typeface="Arial"/>
-                <a:cs typeface="Arial"/>
-              </a:rPr>
-              <a:t>Statement &amp; Objectives </a:t>
+              <a:t>Problem Statement &amp; Objectives</a:t>
             </a:r>
             <a:endParaRPr sz="3300" b="1" dirty="0">
               <a:solidFill>
@@ -2999,315 +2988,6 @@
               <a:ea typeface="Arial"/>
               <a:cs typeface="Arial"/>
             </a:endParaRPr>
-          </a:p>
-        </p:txBody>
-      </p:sp>
-      <p:sp>
-        <p:nvSpPr>
-          <p:cNvPr id="11" name="Rectangle 10">
-            <a:extLst>
-              <a:ext uri="{FF2B5EF4-FFF2-40B4-BE49-F238E27FC236}">
-                <a16:creationId xmlns:a16="http://schemas.microsoft.com/office/drawing/2014/main" id="{BECF8B3E-6614-4FCE-8177-49E1ABD94E2E}"/>
-              </a:ext>
-            </a:extLst>
-          </p:cNvPr>
-          <p:cNvSpPr>
-            <a:spLocks noGrp="1"/>
-          </p:cNvSpPr>
-          <p:nvPr/>
-        </p:nvSpPr>
-        <p:spPr>
-          <a:xfrm>
-            <a:off x="619125" y="5261811"/>
-            <a:ext cx="8393530" cy="3139240"/>
-          </a:xfrm>
-          <a:prstGeom prst="rect">
-            <a:avLst/>
-          </a:prstGeom>
-          <a:noFill/>
-          <a:ln w="0">
-            <a:noFill/>
-          </a:ln>
-        </p:spPr>
-        <p:txBody>
-          <a:bodyPr/>
-          <a:lstStyle>
-            <a:defPPr>
-              <a:defRPr sz="2550" b="0">
-                <a:solidFill>
-                  <a:srgbClr val="15354B"/>
-                </a:solidFill>
-                <a:latin typeface="Arial"/>
-                <a:ea typeface="Arial"/>
-                <a:cs typeface="Arial"/>
-              </a:defRPr>
-            </a:defPPr>
-          </a:lstStyle>
-          <a:p>
-            <a:pPr>
-              <a:defRPr sz="2550" b="0">
-                <a:solidFill>
-                  <a:srgbClr val="15354B"/>
-                </a:solidFill>
-                <a:latin typeface="Arial"/>
-                <a:ea typeface="Arial"/>
-                <a:cs typeface="Arial"/>
-              </a:defRPr>
-            </a:pPr>
-            <a:r>
-              <a:rPr sz="2550" b="0" dirty="0">
-                <a:solidFill>
-                  <a:srgbClr val="15354B"/>
-                </a:solidFill>
-                <a:latin typeface="Arial"/>
-                <a:ea typeface="Arial"/>
-                <a:cs typeface="Arial"/>
-              </a:rPr>
-              <a:t>Problem</a:t>
-            </a:r>
-            <a:r>
-              <a:rPr lang="en-US" sz="2550" b="0" dirty="0">
-                <a:solidFill>
-                  <a:srgbClr val="15354B"/>
-                </a:solidFill>
-                <a:latin typeface="Arial"/>
-                <a:ea typeface="Arial"/>
-                <a:cs typeface="Arial"/>
-              </a:rPr>
-              <a:t> Statement</a:t>
-            </a:r>
-            <a:r>
-              <a:rPr sz="2550" b="0" dirty="0">
-                <a:solidFill>
-                  <a:srgbClr val="15354B"/>
-                </a:solidFill>
-                <a:latin typeface="Arial"/>
-                <a:ea typeface="Arial"/>
-                <a:cs typeface="Arial"/>
-              </a:rPr>
-              <a:t>:</a:t>
-            </a:r>
-            <a:endParaRPr lang="en-US" sz="2550" b="0" dirty="0">
-              <a:solidFill>
-                <a:srgbClr val="15354B"/>
-              </a:solidFill>
-              <a:latin typeface="Arial"/>
-              <a:ea typeface="Arial"/>
-              <a:cs typeface="Arial"/>
-            </a:endParaRPr>
-          </a:p>
-          <a:p>
-            <a:pPr>
-              <a:defRPr sz="2550" b="0">
-                <a:solidFill>
-                  <a:srgbClr val="15354B"/>
-                </a:solidFill>
-                <a:latin typeface="Arial"/>
-                <a:ea typeface="Arial"/>
-                <a:cs typeface="Arial"/>
-              </a:defRPr>
-            </a:pPr>
-            <a:r>
-              <a:rPr sz="2550" b="0" dirty="0">
-                <a:solidFill>
-                  <a:srgbClr val="15354B"/>
-                </a:solidFill>
-                <a:latin typeface="Arial"/>
-                <a:ea typeface="Arial"/>
-                <a:cs typeface="Arial"/>
-              </a:rPr>
-              <a:t>[</a:t>
-            </a:r>
-            <a:r>
-              <a:rPr lang="en-US" sz="2550" b="0" dirty="0">
-                <a:solidFill>
-                  <a:srgbClr val="15354B"/>
-                </a:solidFill>
-                <a:latin typeface="Arial"/>
-                <a:ea typeface="Arial"/>
-                <a:cs typeface="Arial"/>
-              </a:rPr>
-              <a:t>---</a:t>
-            </a:r>
-            <a:r>
-              <a:rPr sz="2550" b="0" dirty="0">
-                <a:solidFill>
-                  <a:srgbClr val="15354B"/>
-                </a:solidFill>
-                <a:latin typeface="Arial"/>
-                <a:ea typeface="Arial"/>
-                <a:cs typeface="Arial"/>
-              </a:rPr>
-              <a:t>]</a:t>
-            </a:r>
-          </a:p>
-          <a:p>
-            <a:endParaRPr sz="2550" b="0" dirty="0">
-              <a:solidFill>
-                <a:srgbClr val="15354B"/>
-              </a:solidFill>
-              <a:latin typeface="Arial"/>
-              <a:ea typeface="Arial"/>
-              <a:cs typeface="Arial"/>
-            </a:endParaRPr>
-          </a:p>
-          <a:p>
-            <a:pPr>
-              <a:defRPr sz="2550" b="0">
-                <a:solidFill>
-                  <a:srgbClr val="15354B"/>
-                </a:solidFill>
-                <a:latin typeface="Arial"/>
-                <a:ea typeface="Arial"/>
-                <a:cs typeface="Arial"/>
-              </a:defRPr>
-            </a:pPr>
-            <a:r>
-              <a:rPr sz="2550" b="0" dirty="0">
-                <a:solidFill>
-                  <a:srgbClr val="15354B"/>
-                </a:solidFill>
-                <a:latin typeface="Arial"/>
-                <a:ea typeface="Arial"/>
-                <a:cs typeface="Arial"/>
-              </a:rPr>
-              <a:t>Objectives</a:t>
-            </a:r>
-          </a:p>
-          <a:p>
-            <a:pPr>
-              <a:defRPr sz="2550" b="0">
-                <a:solidFill>
-                  <a:srgbClr val="15354B"/>
-                </a:solidFill>
-                <a:latin typeface="Arial"/>
-                <a:ea typeface="Arial"/>
-                <a:cs typeface="Arial"/>
-              </a:defRPr>
-            </a:pPr>
-            <a:r>
-              <a:rPr sz="2550" b="0" dirty="0">
-                <a:solidFill>
-                  <a:srgbClr val="15354B"/>
-                </a:solidFill>
-                <a:latin typeface="Arial"/>
-                <a:ea typeface="Arial"/>
-                <a:cs typeface="Arial"/>
-              </a:rPr>
-              <a:t>1. [</a:t>
-            </a:r>
-            <a:r>
-              <a:rPr lang="en-US" sz="2550" b="0" dirty="0">
-                <a:solidFill>
-                  <a:srgbClr val="15354B"/>
-                </a:solidFill>
-                <a:latin typeface="Arial"/>
-                <a:ea typeface="Arial"/>
-                <a:cs typeface="Arial"/>
-              </a:rPr>
-              <a:t>---</a:t>
-            </a:r>
-            <a:r>
-              <a:rPr sz="2550" b="0" dirty="0">
-                <a:solidFill>
-                  <a:srgbClr val="15354B"/>
-                </a:solidFill>
-                <a:latin typeface="Arial"/>
-                <a:ea typeface="Arial"/>
-                <a:cs typeface="Arial"/>
-              </a:rPr>
-              <a:t>]</a:t>
-            </a:r>
-          </a:p>
-          <a:p>
-            <a:pPr>
-              <a:defRPr sz="2550" b="0">
-                <a:solidFill>
-                  <a:srgbClr val="15354B"/>
-                </a:solidFill>
-                <a:latin typeface="Arial"/>
-                <a:ea typeface="Arial"/>
-                <a:cs typeface="Arial"/>
-              </a:defRPr>
-            </a:pPr>
-            <a:r>
-              <a:rPr sz="2550" b="0" dirty="0">
-                <a:solidFill>
-                  <a:srgbClr val="15354B"/>
-                </a:solidFill>
-                <a:latin typeface="Arial"/>
-                <a:ea typeface="Arial"/>
-                <a:cs typeface="Arial"/>
-              </a:rPr>
-              <a:t>2. [</a:t>
-            </a:r>
-            <a:r>
-              <a:rPr lang="en-US" sz="2550" b="0" dirty="0">
-                <a:solidFill>
-                  <a:srgbClr val="15354B"/>
-                </a:solidFill>
-                <a:latin typeface="Arial"/>
-                <a:ea typeface="Arial"/>
-                <a:cs typeface="Arial"/>
-              </a:rPr>
-              <a:t>---</a:t>
-            </a:r>
-            <a:r>
-              <a:rPr sz="2550" b="0" dirty="0">
-                <a:solidFill>
-                  <a:srgbClr val="15354B"/>
-                </a:solidFill>
-                <a:latin typeface="Arial"/>
-                <a:ea typeface="Arial"/>
-                <a:cs typeface="Arial"/>
-              </a:rPr>
-              <a:t>]</a:t>
-            </a:r>
-          </a:p>
-          <a:p>
-            <a:pPr>
-              <a:defRPr sz="2550" b="0">
-                <a:solidFill>
-                  <a:srgbClr val="15354B"/>
-                </a:solidFill>
-                <a:latin typeface="Arial"/>
-                <a:ea typeface="Arial"/>
-                <a:cs typeface="Arial"/>
-              </a:defRPr>
-            </a:pPr>
-            <a:r>
-              <a:rPr sz="2550" b="0" dirty="0">
-                <a:solidFill>
-                  <a:srgbClr val="15354B"/>
-                </a:solidFill>
-                <a:latin typeface="Arial"/>
-                <a:ea typeface="Arial"/>
-                <a:cs typeface="Arial"/>
-              </a:rPr>
-              <a:t>3. [</a:t>
-            </a:r>
-            <a:r>
-              <a:rPr lang="en-US" sz="2550" b="0" dirty="0">
-                <a:solidFill>
-                  <a:srgbClr val="15354B"/>
-                </a:solidFill>
-                <a:latin typeface="Arial"/>
-                <a:ea typeface="Arial"/>
-                <a:cs typeface="Arial"/>
-              </a:rPr>
-              <a:t>---</a:t>
-            </a:r>
-            <a:r>
-              <a:rPr sz="2550" b="0" dirty="0">
-                <a:solidFill>
-                  <a:srgbClr val="15354B"/>
-                </a:solidFill>
-                <a:latin typeface="Arial"/>
-                <a:ea typeface="Arial"/>
-                <a:cs typeface="Arial"/>
-              </a:rPr>
-              <a:t>]</a:t>
-            </a:r>
           </a:p>
         </p:txBody>
       </p:sp>
@@ -3327,8 +3007,8 @@
         </p:nvSpPr>
         <p:spPr>
           <a:xfrm>
-            <a:off x="378493" y="8478378"/>
-            <a:ext cx="8634162" cy="666750"/>
+            <a:off x="454056" y="9043296"/>
+            <a:ext cx="8513564" cy="666750"/>
           </a:xfrm>
           <a:prstGeom prst="rect">
             <a:avLst/>
@@ -3373,472 +3053,6 @@
                 <a:cs typeface="Arial"/>
               </a:rPr>
               <a:t>Related work and research gap</a:t>
-            </a:r>
-          </a:p>
-        </p:txBody>
-      </p:sp>
-      <p:graphicFrame>
-        <p:nvGraphicFramePr>
-          <p:cNvPr id="13" name="Table 12">
-            <a:extLst>
-              <a:ext uri="{FF2B5EF4-FFF2-40B4-BE49-F238E27FC236}">
-                <a16:creationId xmlns:a16="http://schemas.microsoft.com/office/drawing/2014/main" id="{E05B4583-2FFE-4AF7-AD90-72D7E5C9B666}"/>
-              </a:ext>
-            </a:extLst>
-          </p:cNvPr>
-          <p:cNvGraphicFramePr/>
-          <p:nvPr>
-            <p:extLst>
-              <p:ext uri="{D42A27DB-BD31-4B8C-83A1-F6EECF244321}">
-                <p14:modId xmlns:p14="http://schemas.microsoft.com/office/powerpoint/2010/main" val="1062153965"/>
-              </p:ext>
-            </p:extLst>
-          </p:nvPr>
-        </p:nvGraphicFramePr>
-        <p:xfrm>
-          <a:off x="506830" y="9436016"/>
-          <a:ext cx="8505825" cy="2333625"/>
-        </p:xfrm>
-        <a:graphic>
-          <a:graphicData uri="http://schemas.openxmlformats.org/drawingml/2006/table">
-            <a:tbl>
-              <a:tblPr/>
-              <a:tblGrid>
-                <a:gridCol w="1857375">
-                  <a:extLst>
-                    <a:ext uri="{9D8B030D-6E8A-4147-A177-3AD203B41FA5}">
-                      <a16:colId xmlns:a16="http://schemas.microsoft.com/office/drawing/2014/main" val="20001"/>
-                    </a:ext>
-                  </a:extLst>
-                </a:gridCol>
-                <a:gridCol w="2095500">
-                  <a:extLst>
-                    <a:ext uri="{9D8B030D-6E8A-4147-A177-3AD203B41FA5}">
-                      <a16:colId xmlns:a16="http://schemas.microsoft.com/office/drawing/2014/main" val="20002"/>
-                    </a:ext>
-                  </a:extLst>
-                </a:gridCol>
-                <a:gridCol w="2286000">
-                  <a:extLst>
-                    <a:ext uri="{9D8B030D-6E8A-4147-A177-3AD203B41FA5}">
-                      <a16:colId xmlns:a16="http://schemas.microsoft.com/office/drawing/2014/main" val="20003"/>
-                    </a:ext>
-                  </a:extLst>
-                </a:gridCol>
-                <a:gridCol w="2266950">
-                  <a:extLst>
-                    <a:ext uri="{9D8B030D-6E8A-4147-A177-3AD203B41FA5}">
-                      <a16:colId xmlns:a16="http://schemas.microsoft.com/office/drawing/2014/main" val="20004"/>
-                    </a:ext>
-                  </a:extLst>
-                </a:gridCol>
-              </a:tblGrid>
-              <a:tr h="777875">
-                <a:tc>
-                  <a:txBody>
-                    <a:bodyPr/>
-                    <a:lstStyle/>
-                    <a:p>
-                      <a:r>
-                        <a:rPr sz="2025" b="1" dirty="0">
-                          <a:solidFill>
-                            <a:srgbClr val="FFFFFF"/>
-                          </a:solidFill>
-                          <a:latin typeface="Arial"/>
-                          <a:ea typeface="Arial"/>
-                          <a:cs typeface="Arial"/>
-                        </a:rPr>
-                        <a:t>Author/Year</a:t>
-                      </a:r>
-                    </a:p>
-                  </a:txBody>
-                  <a:tcPr>
-                    <a:solidFill>
-                      <a:srgbClr val="15354B"/>
-                    </a:solidFill>
-                  </a:tcPr>
-                </a:tc>
-                <a:tc>
-                  <a:txBody>
-                    <a:bodyPr/>
-                    <a:lstStyle/>
-                    <a:p>
-                      <a:r>
-                        <a:rPr sz="2025" b="1">
-                          <a:solidFill>
-                            <a:srgbClr val="FFFFFF"/>
-                          </a:solidFill>
-                          <a:latin typeface="Arial"/>
-                          <a:ea typeface="Arial"/>
-                          <a:cs typeface="Arial"/>
-                        </a:rPr>
-                        <a:t>Proposed Method</a:t>
-                      </a:r>
-                    </a:p>
-                  </a:txBody>
-                  <a:tcPr>
-                    <a:solidFill>
-                      <a:srgbClr val="15354B"/>
-                    </a:solidFill>
-                  </a:tcPr>
-                </a:tc>
-                <a:tc>
-                  <a:txBody>
-                    <a:bodyPr/>
-                    <a:lstStyle/>
-                    <a:p>
-                      <a:r>
-                        <a:rPr sz="2025" b="1">
-                          <a:solidFill>
-                            <a:srgbClr val="FFFFFF"/>
-                          </a:solidFill>
-                          <a:latin typeface="Arial"/>
-                          <a:ea typeface="Arial"/>
-                          <a:cs typeface="Arial"/>
-                        </a:rPr>
-                        <a:t>Key Findings</a:t>
-                      </a:r>
-                    </a:p>
-                  </a:txBody>
-                  <a:tcPr>
-                    <a:solidFill>
-                      <a:srgbClr val="15354B"/>
-                    </a:solidFill>
-                  </a:tcPr>
-                </a:tc>
-                <a:tc>
-                  <a:txBody>
-                    <a:bodyPr/>
-                    <a:lstStyle/>
-                    <a:p>
-                      <a:r>
-                        <a:rPr sz="2025" b="1" dirty="0">
-                          <a:solidFill>
-                            <a:srgbClr val="FFFFFF"/>
-                          </a:solidFill>
-                          <a:latin typeface="Arial"/>
-                          <a:ea typeface="Arial"/>
-                          <a:cs typeface="Arial"/>
-                        </a:rPr>
-                        <a:t>Limitations</a:t>
-                      </a:r>
-                    </a:p>
-                  </a:txBody>
-                  <a:tcPr>
-                    <a:solidFill>
-                      <a:srgbClr val="15354B"/>
-                    </a:solidFill>
-                  </a:tcPr>
-                </a:tc>
-                <a:extLst>
-                  <a:ext uri="{0D108BD9-81ED-4DB2-BD59-A6C34878D82A}">
-                    <a16:rowId xmlns:a16="http://schemas.microsoft.com/office/drawing/2014/main" val="10000"/>
-                  </a:ext>
-                </a:extLst>
-              </a:tr>
-              <a:tr h="777875">
-                <a:tc>
-                  <a:txBody>
-                    <a:bodyPr/>
-                    <a:lstStyle/>
-                    <a:p>
-                      <a:r>
-                        <a:rPr sz="2025">
-                          <a:solidFill>
-                            <a:srgbClr val="15354B"/>
-                          </a:solidFill>
-                          <a:latin typeface="Arial"/>
-                          <a:ea typeface="Arial"/>
-                          <a:cs typeface="Arial"/>
-                        </a:rPr>
-                        <a:t>[Author, year]</a:t>
-                      </a:r>
-                    </a:p>
-                  </a:txBody>
-                  <a:tcPr>
-                    <a:solidFill>
-                      <a:srgbClr val="F5F8FA"/>
-                    </a:solidFill>
-                  </a:tcPr>
-                </a:tc>
-                <a:tc>
-                  <a:txBody>
-                    <a:bodyPr/>
-                    <a:lstStyle/>
-                    <a:p>
-                      <a:r>
-                        <a:rPr sz="2025">
-                          <a:solidFill>
-                            <a:srgbClr val="15354B"/>
-                          </a:solidFill>
-                          <a:latin typeface="Arial"/>
-                          <a:ea typeface="Arial"/>
-                          <a:cs typeface="Arial"/>
-                        </a:rPr>
-                        <a:t>[Method]</a:t>
-                      </a:r>
-                    </a:p>
-                  </a:txBody>
-                  <a:tcPr>
-                    <a:solidFill>
-                      <a:srgbClr val="F5F8FA"/>
-                    </a:solidFill>
-                  </a:tcPr>
-                </a:tc>
-                <a:tc>
-                  <a:txBody>
-                    <a:bodyPr/>
-                    <a:lstStyle/>
-                    <a:p>
-                      <a:r>
-                        <a:rPr sz="2025">
-                          <a:solidFill>
-                            <a:srgbClr val="15354B"/>
-                          </a:solidFill>
-                          <a:latin typeface="Arial"/>
-                          <a:ea typeface="Arial"/>
-                          <a:cs typeface="Arial"/>
-                        </a:rPr>
-                        <a:t>[Finding]</a:t>
-                      </a:r>
-                    </a:p>
-                  </a:txBody>
-                  <a:tcPr>
-                    <a:solidFill>
-                      <a:srgbClr val="F5F8FA"/>
-                    </a:solidFill>
-                  </a:tcPr>
-                </a:tc>
-                <a:tc>
-                  <a:txBody>
-                    <a:bodyPr/>
-                    <a:lstStyle/>
-                    <a:p>
-                      <a:r>
-                        <a:rPr sz="2025">
-                          <a:solidFill>
-                            <a:srgbClr val="15354B"/>
-                          </a:solidFill>
-                          <a:latin typeface="Arial"/>
-                          <a:ea typeface="Arial"/>
-                          <a:cs typeface="Arial"/>
-                        </a:rPr>
-                        <a:t>[Limitation]</a:t>
-                      </a:r>
-                    </a:p>
-                  </a:txBody>
-                  <a:tcPr>
-                    <a:solidFill>
-                      <a:srgbClr val="F5F8FA"/>
-                    </a:solidFill>
-                  </a:tcPr>
-                </a:tc>
-                <a:extLst>
-                  <a:ext uri="{0D108BD9-81ED-4DB2-BD59-A6C34878D82A}">
-                    <a16:rowId xmlns:a16="http://schemas.microsoft.com/office/drawing/2014/main" val="10001"/>
-                  </a:ext>
-                </a:extLst>
-              </a:tr>
-              <a:tr h="777875">
-                <a:tc>
-                  <a:txBody>
-                    <a:bodyPr/>
-                    <a:lstStyle/>
-                    <a:p>
-                      <a:r>
-                        <a:rPr sz="2025" dirty="0">
-                          <a:solidFill>
-                            <a:srgbClr val="15354B"/>
-                          </a:solidFill>
-                          <a:latin typeface="Arial"/>
-                          <a:ea typeface="Arial"/>
-                          <a:cs typeface="Arial"/>
-                        </a:rPr>
-                        <a:t>[Author, year]</a:t>
-                      </a:r>
-                    </a:p>
-                  </a:txBody>
-                  <a:tcPr>
-                    <a:solidFill>
-                      <a:srgbClr val="F5F8FA"/>
-                    </a:solidFill>
-                  </a:tcPr>
-                </a:tc>
-                <a:tc>
-                  <a:txBody>
-                    <a:bodyPr/>
-                    <a:lstStyle/>
-                    <a:p>
-                      <a:r>
-                        <a:rPr sz="2025">
-                          <a:solidFill>
-                            <a:srgbClr val="15354B"/>
-                          </a:solidFill>
-                          <a:latin typeface="Arial"/>
-                          <a:ea typeface="Arial"/>
-                          <a:cs typeface="Arial"/>
-                        </a:rPr>
-                        <a:t>[Method]</a:t>
-                      </a:r>
-                    </a:p>
-                  </a:txBody>
-                  <a:tcPr>
-                    <a:solidFill>
-                      <a:srgbClr val="F5F8FA"/>
-                    </a:solidFill>
-                  </a:tcPr>
-                </a:tc>
-                <a:tc>
-                  <a:txBody>
-                    <a:bodyPr/>
-                    <a:lstStyle/>
-                    <a:p>
-                      <a:r>
-                        <a:rPr sz="2025">
-                          <a:solidFill>
-                            <a:srgbClr val="15354B"/>
-                          </a:solidFill>
-                          <a:latin typeface="Arial"/>
-                          <a:ea typeface="Arial"/>
-                          <a:cs typeface="Arial"/>
-                        </a:rPr>
-                        <a:t>[Finding]</a:t>
-                      </a:r>
-                    </a:p>
-                  </a:txBody>
-                  <a:tcPr>
-                    <a:solidFill>
-                      <a:srgbClr val="F5F8FA"/>
-                    </a:solidFill>
-                  </a:tcPr>
-                </a:tc>
-                <a:tc>
-                  <a:txBody>
-                    <a:bodyPr/>
-                    <a:lstStyle/>
-                    <a:p>
-                      <a:r>
-                        <a:rPr sz="2025" dirty="0">
-                          <a:solidFill>
-                            <a:srgbClr val="15354B"/>
-                          </a:solidFill>
-                          <a:latin typeface="Arial"/>
-                          <a:ea typeface="Arial"/>
-                          <a:cs typeface="Arial"/>
-                        </a:rPr>
-                        <a:t>[Limitation]</a:t>
-                      </a:r>
-                    </a:p>
-                  </a:txBody>
-                  <a:tcPr>
-                    <a:solidFill>
-                      <a:srgbClr val="F5F8FA"/>
-                    </a:solidFill>
-                  </a:tcPr>
-                </a:tc>
-                <a:extLst>
-                  <a:ext uri="{0D108BD9-81ED-4DB2-BD59-A6C34878D82A}">
-                    <a16:rowId xmlns:a16="http://schemas.microsoft.com/office/drawing/2014/main" val="10002"/>
-                  </a:ext>
-                </a:extLst>
-              </a:tr>
-            </a:tbl>
-          </a:graphicData>
-        </a:graphic>
-      </p:graphicFrame>
-      <p:sp>
-        <p:nvSpPr>
-          <p:cNvPr id="14" name="Rectangle 13">
-            <a:extLst>
-              <a:ext uri="{FF2B5EF4-FFF2-40B4-BE49-F238E27FC236}">
-                <a16:creationId xmlns:a16="http://schemas.microsoft.com/office/drawing/2014/main" id="{6931E5D3-CCF5-403D-B84E-EDA393E72F73}"/>
-              </a:ext>
-            </a:extLst>
-          </p:cNvPr>
-          <p:cNvSpPr>
-            <a:spLocks noGrp="1"/>
-          </p:cNvSpPr>
-          <p:nvPr/>
-        </p:nvSpPr>
-        <p:spPr>
-          <a:xfrm>
-            <a:off x="378493" y="13865140"/>
-            <a:ext cx="8634162" cy="6234616"/>
-          </a:xfrm>
-          <a:prstGeom prst="rect">
-            <a:avLst/>
-          </a:prstGeom>
-          <a:noFill/>
-          <a:ln w="0">
-            <a:noFill/>
-          </a:ln>
-        </p:spPr>
-        <p:txBody>
-          <a:bodyPr/>
-          <a:lstStyle>
-            <a:defPPr>
-              <a:defRPr sz="2550" b="0">
-                <a:solidFill>
-                  <a:srgbClr val="15354B"/>
-                </a:solidFill>
-                <a:latin typeface="Arial"/>
-                <a:ea typeface="Arial"/>
-                <a:cs typeface="Arial"/>
-              </a:defRPr>
-            </a:defPPr>
-          </a:lstStyle>
-          <a:p>
-            <a:pPr>
-              <a:defRPr sz="2550" b="0">
-                <a:solidFill>
-                  <a:srgbClr val="15354B"/>
-                </a:solidFill>
-                <a:latin typeface="Arial"/>
-                <a:ea typeface="Arial"/>
-                <a:cs typeface="Arial"/>
-              </a:defRPr>
-            </a:pPr>
-            <a:r>
-              <a:rPr sz="2550" b="0" dirty="0">
-                <a:solidFill>
-                  <a:srgbClr val="15354B"/>
-                </a:solidFill>
-                <a:latin typeface="Arial"/>
-                <a:ea typeface="Arial"/>
-                <a:cs typeface="Arial"/>
-              </a:rPr>
-              <a:t>Research gap: </a:t>
-            </a:r>
-            <a:endParaRPr lang="en-US" sz="2550" b="0" dirty="0">
-              <a:solidFill>
-                <a:srgbClr val="15354B"/>
-              </a:solidFill>
-              <a:latin typeface="Arial"/>
-              <a:ea typeface="Arial"/>
-              <a:cs typeface="Arial"/>
-            </a:endParaRPr>
-          </a:p>
-          <a:p>
-            <a:pPr>
-              <a:defRPr sz="2550" b="0">
-                <a:solidFill>
-                  <a:srgbClr val="15354B"/>
-                </a:solidFill>
-                <a:latin typeface="Arial"/>
-                <a:ea typeface="Arial"/>
-                <a:cs typeface="Arial"/>
-              </a:defRPr>
-            </a:pPr>
-            <a:r>
-              <a:rPr sz="2550" b="0" dirty="0">
-                <a:solidFill>
-                  <a:srgbClr val="15354B"/>
-                </a:solidFill>
-                <a:latin typeface="Arial"/>
-                <a:ea typeface="Arial"/>
-                <a:cs typeface="Arial"/>
-              </a:rPr>
-              <a:t>[State the unresolved limitation and how your work addresses it.]</a:t>
             </a:r>
           </a:p>
         </p:txBody>
@@ -3859,8 +3073,8 @@
         </p:nvSpPr>
         <p:spPr>
           <a:xfrm>
-            <a:off x="9256295" y="4330991"/>
-            <a:ext cx="10631905" cy="666750"/>
+            <a:off x="9194649" y="4275701"/>
+            <a:ext cx="10518981" cy="666750"/>
           </a:xfrm>
           <a:prstGeom prst="rect">
             <a:avLst/>
@@ -3905,76 +3119,6 @@
                 <a:cs typeface="Arial"/>
               </a:rPr>
               <a:t>Methodology</a:t>
-            </a:r>
-          </a:p>
-        </p:txBody>
-      </p:sp>
-      <p:sp>
-        <p:nvSpPr>
-          <p:cNvPr id="17" name="Rectangle 16">
-            <a:extLst>
-              <a:ext uri="{FF2B5EF4-FFF2-40B4-BE49-F238E27FC236}">
-                <a16:creationId xmlns:a16="http://schemas.microsoft.com/office/drawing/2014/main" id="{BA0C4176-29A0-40AD-89BA-A05B9C0CEEF0}"/>
-              </a:ext>
-            </a:extLst>
-          </p:cNvPr>
-          <p:cNvSpPr>
-            <a:spLocks noGrp="1"/>
-          </p:cNvSpPr>
-          <p:nvPr/>
-        </p:nvSpPr>
-        <p:spPr>
-          <a:xfrm>
-            <a:off x="9269830" y="5063538"/>
-            <a:ext cx="10618370" cy="8412832"/>
-          </a:xfrm>
-          <a:prstGeom prst="rect">
-            <a:avLst/>
-          </a:prstGeom>
-          <a:solidFill>
-            <a:srgbClr val="F5F8FA"/>
-          </a:solidFill>
-          <a:ln w="19050">
-            <a:solidFill>
-              <a:srgbClr val="CFDCE3"/>
-            </a:solidFill>
-          </a:ln>
-        </p:spPr>
-        <p:txBody>
-          <a:bodyPr/>
-          <a:lstStyle>
-            <a:defPPr>
-              <a:defRPr sz="2400" b="0">
-                <a:solidFill>
-                  <a:srgbClr val="506575"/>
-                </a:solidFill>
-                <a:latin typeface="Arial"/>
-                <a:ea typeface="Arial"/>
-                <a:cs typeface="Arial"/>
-              </a:defRPr>
-            </a:defPPr>
-          </a:lstStyle>
-          <a:p>
-            <a:pPr>
-              <a:defRPr sz="2400" b="0">
-                <a:solidFill>
-                  <a:srgbClr val="506575"/>
-                </a:solidFill>
-                <a:latin typeface="Arial"/>
-                <a:ea typeface="Arial"/>
-                <a:cs typeface="Arial"/>
-              </a:defRPr>
-            </a:pPr>
-            <a:r>
-              <a:rPr sz="2400" b="0" dirty="0">
-                <a:solidFill>
-                  <a:srgbClr val="506575"/>
-                </a:solidFill>
-                <a:latin typeface="Arial"/>
-                <a:ea typeface="Arial"/>
-                <a:cs typeface="Arial"/>
-              </a:rPr>
-              <a:t>[INSERT SYSTEM ARCHITECTURE]</a:t>
             </a:r>
           </a:p>
         </p:txBody>
@@ -3995,8 +3139,8 @@
         </p:nvSpPr>
         <p:spPr>
           <a:xfrm>
-            <a:off x="9269830" y="14001750"/>
-            <a:ext cx="10618370" cy="666750"/>
+            <a:off x="9194649" y="13905487"/>
+            <a:ext cx="10518981" cy="666750"/>
           </a:xfrm>
           <a:prstGeom prst="rect">
             <a:avLst/>
@@ -4045,217 +3189,6 @@
             <a:endParaRPr sz="3300" b="1" dirty="0">
               <a:solidFill>
                 <a:srgbClr val="087F8C"/>
-              </a:solidFill>
-              <a:latin typeface="Arial"/>
-              <a:ea typeface="Arial"/>
-              <a:cs typeface="Arial"/>
-            </a:endParaRPr>
-          </a:p>
-        </p:txBody>
-      </p:sp>
-      <p:sp>
-        <p:nvSpPr>
-          <p:cNvPr id="20" name="Rectangle 19">
-            <a:extLst>
-              <a:ext uri="{FF2B5EF4-FFF2-40B4-BE49-F238E27FC236}">
-                <a16:creationId xmlns:a16="http://schemas.microsoft.com/office/drawing/2014/main" id="{C367AA02-E748-43E1-B136-4C980B680767}"/>
-              </a:ext>
-            </a:extLst>
-          </p:cNvPr>
-          <p:cNvSpPr>
-            <a:spLocks noGrp="1"/>
-          </p:cNvSpPr>
-          <p:nvPr/>
-        </p:nvSpPr>
-        <p:spPr>
-          <a:xfrm>
-            <a:off x="9269830" y="14811375"/>
-            <a:ext cx="10618370" cy="1774659"/>
-          </a:xfrm>
-          <a:prstGeom prst="rect">
-            <a:avLst/>
-          </a:prstGeom>
-          <a:noFill/>
-          <a:ln w="0">
-            <a:noFill/>
-          </a:ln>
-        </p:spPr>
-        <p:txBody>
-          <a:bodyPr/>
-          <a:lstStyle>
-            <a:defPPr>
-              <a:defRPr sz="2550" b="0">
-                <a:solidFill>
-                  <a:srgbClr val="15354B"/>
-                </a:solidFill>
-                <a:latin typeface="Arial"/>
-                <a:ea typeface="Arial"/>
-                <a:cs typeface="Arial"/>
-              </a:defRPr>
-            </a:defPPr>
-          </a:lstStyle>
-          <a:p>
-            <a:pPr>
-              <a:defRPr sz="2550" b="0">
-                <a:solidFill>
-                  <a:srgbClr val="15354B"/>
-                </a:solidFill>
-                <a:latin typeface="Arial"/>
-                <a:ea typeface="Arial"/>
-                <a:cs typeface="Arial"/>
-              </a:defRPr>
-            </a:pPr>
-            <a:r>
-              <a:rPr sz="2550" b="0" dirty="0">
-                <a:solidFill>
-                  <a:srgbClr val="15354B"/>
-                </a:solidFill>
-                <a:latin typeface="Arial"/>
-                <a:ea typeface="Arial"/>
-                <a:cs typeface="Arial"/>
-              </a:rPr>
-              <a:t>Modules</a:t>
-            </a:r>
-          </a:p>
-          <a:p>
-            <a:pPr>
-              <a:defRPr sz="2550" b="0">
-                <a:solidFill>
-                  <a:srgbClr val="15354B"/>
-                </a:solidFill>
-                <a:latin typeface="Arial"/>
-                <a:ea typeface="Arial"/>
-                <a:cs typeface="Arial"/>
-              </a:defRPr>
-            </a:pPr>
-            <a:r>
-              <a:rPr sz="2550" b="0" dirty="0">
-                <a:solidFill>
-                  <a:srgbClr val="15354B"/>
-                </a:solidFill>
-                <a:latin typeface="Arial"/>
-                <a:ea typeface="Arial"/>
-                <a:cs typeface="Arial"/>
-              </a:rPr>
-              <a:t>[Module 1: </a:t>
-            </a:r>
-            <a:r>
-              <a:rPr lang="en-US" sz="2550" b="0" dirty="0">
-                <a:solidFill>
-                  <a:srgbClr val="15354B"/>
-                </a:solidFill>
-                <a:latin typeface="Arial"/>
-                <a:ea typeface="Arial"/>
-                <a:cs typeface="Arial"/>
-              </a:rPr>
-              <a:t>---</a:t>
-            </a:r>
-            <a:r>
-              <a:rPr sz="2550" b="0" dirty="0">
-                <a:solidFill>
-                  <a:srgbClr val="15354B"/>
-                </a:solidFill>
-                <a:latin typeface="Arial"/>
-                <a:ea typeface="Arial"/>
-                <a:cs typeface="Arial"/>
-              </a:rPr>
-              <a:t>]</a:t>
-            </a:r>
-          </a:p>
-          <a:p>
-            <a:pPr>
-              <a:defRPr sz="2550" b="0">
-                <a:solidFill>
-                  <a:srgbClr val="15354B"/>
-                </a:solidFill>
-                <a:latin typeface="Arial"/>
-                <a:ea typeface="Arial"/>
-                <a:cs typeface="Arial"/>
-              </a:defRPr>
-            </a:pPr>
-            <a:r>
-              <a:rPr sz="2550" b="0" dirty="0">
-                <a:solidFill>
-                  <a:srgbClr val="15354B"/>
-                </a:solidFill>
-                <a:latin typeface="Arial"/>
-                <a:ea typeface="Arial"/>
-                <a:cs typeface="Arial"/>
-              </a:rPr>
-              <a:t>[Module 2: </a:t>
-            </a:r>
-            <a:r>
-              <a:rPr lang="en-US" sz="2550" b="0" dirty="0">
-                <a:solidFill>
-                  <a:srgbClr val="15354B"/>
-                </a:solidFill>
-                <a:latin typeface="Arial"/>
-                <a:ea typeface="Arial"/>
-                <a:cs typeface="Arial"/>
-              </a:rPr>
-              <a:t>---</a:t>
-            </a:r>
-            <a:r>
-              <a:rPr sz="2550" b="0" dirty="0">
-                <a:solidFill>
-                  <a:srgbClr val="15354B"/>
-                </a:solidFill>
-                <a:latin typeface="Arial"/>
-                <a:ea typeface="Arial"/>
-                <a:cs typeface="Arial"/>
-              </a:rPr>
-              <a:t>]</a:t>
-            </a:r>
-          </a:p>
-          <a:p>
-            <a:pPr>
-              <a:defRPr sz="2550" b="0">
-                <a:solidFill>
-                  <a:srgbClr val="15354B"/>
-                </a:solidFill>
-                <a:latin typeface="Arial"/>
-                <a:ea typeface="Arial"/>
-                <a:cs typeface="Arial"/>
-              </a:defRPr>
-            </a:pPr>
-            <a:r>
-              <a:rPr sz="2550" b="0" dirty="0">
-                <a:solidFill>
-                  <a:srgbClr val="15354B"/>
-                </a:solidFill>
-                <a:latin typeface="Arial"/>
-                <a:ea typeface="Arial"/>
-                <a:cs typeface="Arial"/>
-              </a:rPr>
-              <a:t>[Module 3: </a:t>
-            </a:r>
-            <a:r>
-              <a:rPr lang="en-US" sz="2550" b="0" dirty="0">
-                <a:solidFill>
-                  <a:srgbClr val="15354B"/>
-                </a:solidFill>
-                <a:latin typeface="Arial"/>
-                <a:ea typeface="Arial"/>
-                <a:cs typeface="Arial"/>
-              </a:rPr>
-              <a:t>---</a:t>
-            </a:r>
-            <a:r>
-              <a:rPr sz="2550" b="0" dirty="0">
-                <a:solidFill>
-                  <a:srgbClr val="15354B"/>
-                </a:solidFill>
-                <a:latin typeface="Arial"/>
-                <a:ea typeface="Arial"/>
-                <a:cs typeface="Arial"/>
-              </a:rPr>
-              <a:t>]</a:t>
-            </a:r>
-          </a:p>
-          <a:p>
-            <a:endParaRPr sz="2550" b="0" dirty="0">
-              <a:solidFill>
-                <a:srgbClr val="15354B"/>
               </a:solidFill>
               <a:latin typeface="Arial"/>
               <a:ea typeface="Arial"/>
@@ -4280,8 +3213,8 @@
         </p:nvSpPr>
         <p:spPr>
           <a:xfrm>
-            <a:off x="20067172" y="4267951"/>
-            <a:ext cx="9505950" cy="666750"/>
+            <a:off x="19997416" y="4275701"/>
+            <a:ext cx="9648705" cy="666750"/>
           </a:xfrm>
           <a:prstGeom prst="rect">
             <a:avLst/>
@@ -4325,102 +3258,11 @@
                 <a:ea typeface="Arial"/>
                 <a:cs typeface="Arial"/>
               </a:rPr>
-              <a:t>Results and </a:t>
-            </a:r>
-            <a:r>
-              <a:rPr lang="en-US" sz="3300" b="1" dirty="0">
-                <a:solidFill>
-                  <a:srgbClr val="087F8C"/>
-                </a:solidFill>
-                <a:latin typeface="Arial"/>
-                <a:ea typeface="Arial"/>
-                <a:cs typeface="Arial"/>
-              </a:rPr>
-              <a:t>Analysis</a:t>
+              <a:t>Results and Analysis</a:t>
             </a:r>
             <a:endParaRPr sz="3300" b="1" dirty="0">
               <a:solidFill>
                 <a:srgbClr val="087F8C"/>
-              </a:solidFill>
-              <a:latin typeface="Arial"/>
-              <a:ea typeface="Arial"/>
-              <a:cs typeface="Arial"/>
-            </a:endParaRPr>
-          </a:p>
-        </p:txBody>
-      </p:sp>
-      <p:sp>
-        <p:nvSpPr>
-          <p:cNvPr id="24" name="Rectangle 23">
-            <a:extLst>
-              <a:ext uri="{FF2B5EF4-FFF2-40B4-BE49-F238E27FC236}">
-                <a16:creationId xmlns:a16="http://schemas.microsoft.com/office/drawing/2014/main" id="{DA2FEC55-E2BE-4A31-AF36-13C6B111FAB4}"/>
-              </a:ext>
-            </a:extLst>
-          </p:cNvPr>
-          <p:cNvSpPr>
-            <a:spLocks noGrp="1"/>
-          </p:cNvSpPr>
-          <p:nvPr/>
-        </p:nvSpPr>
-        <p:spPr>
-          <a:xfrm>
-            <a:off x="20067172" y="5060782"/>
-            <a:ext cx="9505950" cy="8415588"/>
-          </a:xfrm>
-          <a:prstGeom prst="rect">
-            <a:avLst/>
-          </a:prstGeom>
-          <a:solidFill>
-            <a:srgbClr val="F5F8FA"/>
-          </a:solidFill>
-          <a:ln w="19050">
-            <a:solidFill>
-              <a:srgbClr val="CFDCE3"/>
-            </a:solidFill>
-          </a:ln>
-        </p:spPr>
-        <p:txBody>
-          <a:bodyPr/>
-          <a:lstStyle>
-            <a:defPPr>
-              <a:defRPr sz="2400" b="0">
-                <a:solidFill>
-                  <a:srgbClr val="506575"/>
-                </a:solidFill>
-                <a:latin typeface="Arial"/>
-                <a:ea typeface="Arial"/>
-                <a:cs typeface="Arial"/>
-              </a:defRPr>
-            </a:defPPr>
-          </a:lstStyle>
-          <a:p>
-            <a:pPr>
-              <a:defRPr sz="2400" b="0">
-                <a:solidFill>
-                  <a:srgbClr val="506575"/>
-                </a:solidFill>
-                <a:latin typeface="Arial"/>
-                <a:ea typeface="Arial"/>
-                <a:cs typeface="Arial"/>
-              </a:defRPr>
-            </a:pPr>
-            <a:r>
-              <a:rPr sz="2400" b="0" dirty="0">
-                <a:solidFill>
-                  <a:srgbClr val="506575"/>
-                </a:solidFill>
-                <a:latin typeface="Arial"/>
-                <a:ea typeface="Arial"/>
-                <a:cs typeface="Arial"/>
-              </a:rPr>
-              <a:t>[INSERT RESULTS CHART OR COMPARISON TABLE]</a:t>
-            </a:r>
-          </a:p>
-          <a:p>
-            <a:endParaRPr sz="2400" b="0" dirty="0">
-              <a:solidFill>
-                <a:srgbClr val="506575"/>
               </a:solidFill>
               <a:latin typeface="Arial"/>
               <a:ea typeface="Arial"/>
@@ -4445,8 +3287,8 @@
         </p:nvSpPr>
         <p:spPr>
           <a:xfrm>
-            <a:off x="20131840" y="13984705"/>
-            <a:ext cx="9505950" cy="666750"/>
+            <a:off x="19997416" y="17905116"/>
+            <a:ext cx="9648705" cy="666750"/>
           </a:xfrm>
           <a:prstGeom prst="rect">
             <a:avLst/>
@@ -4491,138 +3333,6 @@
                 <a:cs typeface="Arial"/>
               </a:rPr>
               <a:t>Conclusion and future work</a:t>
-            </a:r>
-          </a:p>
-        </p:txBody>
-      </p:sp>
-      <p:sp>
-        <p:nvSpPr>
-          <p:cNvPr id="28" name="Rectangle 27">
-            <a:extLst>
-              <a:ext uri="{FF2B5EF4-FFF2-40B4-BE49-F238E27FC236}">
-                <a16:creationId xmlns:a16="http://schemas.microsoft.com/office/drawing/2014/main" id="{DA56CA06-E2B0-4F64-A1B6-FF31FFC63B23}"/>
-              </a:ext>
-            </a:extLst>
-          </p:cNvPr>
-          <p:cNvSpPr>
-            <a:spLocks noGrp="1"/>
-          </p:cNvSpPr>
-          <p:nvPr/>
-        </p:nvSpPr>
-        <p:spPr>
-          <a:xfrm>
-            <a:off x="20131840" y="14868523"/>
-            <a:ext cx="9505950" cy="5231233"/>
-          </a:xfrm>
-          <a:prstGeom prst="rect">
-            <a:avLst/>
-          </a:prstGeom>
-          <a:noFill/>
-          <a:ln w="0">
-            <a:noFill/>
-          </a:ln>
-        </p:spPr>
-        <p:txBody>
-          <a:bodyPr/>
-          <a:lstStyle>
-            <a:defPPr>
-              <a:defRPr sz="2550" b="0">
-                <a:solidFill>
-                  <a:srgbClr val="15354B"/>
-                </a:solidFill>
-                <a:latin typeface="Arial"/>
-                <a:ea typeface="Arial"/>
-                <a:cs typeface="Arial"/>
-              </a:defRPr>
-            </a:defPPr>
-          </a:lstStyle>
-          <a:p>
-            <a:pPr>
-              <a:defRPr sz="2550" b="0">
-                <a:solidFill>
-                  <a:srgbClr val="15354B"/>
-                </a:solidFill>
-                <a:latin typeface="Arial"/>
-                <a:ea typeface="Arial"/>
-                <a:cs typeface="Arial"/>
-              </a:defRPr>
-            </a:pPr>
-            <a:r>
-              <a:rPr sz="2550" b="0" dirty="0">
-                <a:solidFill>
-                  <a:srgbClr val="15354B"/>
-                </a:solidFill>
-                <a:latin typeface="Arial"/>
-                <a:ea typeface="Arial"/>
-                <a:cs typeface="Arial"/>
-              </a:rPr>
-              <a:t>Conclusion: [Explain how the evidence addresses the objectives.]</a:t>
-            </a:r>
-          </a:p>
-          <a:p>
-            <a:endParaRPr sz="2550" b="0" dirty="0">
-              <a:solidFill>
-                <a:srgbClr val="15354B"/>
-              </a:solidFill>
-              <a:latin typeface="Arial"/>
-              <a:ea typeface="Arial"/>
-              <a:cs typeface="Arial"/>
-            </a:endParaRPr>
-          </a:p>
-          <a:p>
-            <a:pPr>
-              <a:defRPr sz="2550" b="0">
-                <a:solidFill>
-                  <a:srgbClr val="15354B"/>
-                </a:solidFill>
-                <a:latin typeface="Arial"/>
-                <a:ea typeface="Arial"/>
-                <a:cs typeface="Arial"/>
-              </a:defRPr>
-            </a:pPr>
-            <a:r>
-              <a:rPr sz="2550" b="0" dirty="0">
-                <a:solidFill>
-                  <a:srgbClr val="15354B"/>
-                </a:solidFill>
-                <a:latin typeface="Arial"/>
-                <a:ea typeface="Arial"/>
-                <a:cs typeface="Arial"/>
-              </a:rPr>
-              <a:t>Contribution: [State the specific addition over existing work.]</a:t>
-            </a:r>
-          </a:p>
-          <a:p>
-            <a:endParaRPr sz="2550" b="0" dirty="0">
-              <a:solidFill>
-                <a:srgbClr val="15354B"/>
-              </a:solidFill>
-              <a:latin typeface="Arial"/>
-              <a:ea typeface="Arial"/>
-              <a:cs typeface="Arial"/>
-            </a:endParaRPr>
-          </a:p>
-          <a:p>
-            <a:pPr>
-              <a:defRPr sz="2550" b="0">
-                <a:solidFill>
-                  <a:srgbClr val="15354B"/>
-                </a:solidFill>
-                <a:latin typeface="Arial"/>
-                <a:ea typeface="Arial"/>
-                <a:cs typeface="Arial"/>
-              </a:defRPr>
-            </a:pPr>
-            <a:r>
-              <a:rPr sz="2550" b="0" dirty="0">
-                <a:solidFill>
-                  <a:srgbClr val="15354B"/>
-                </a:solidFill>
-                <a:latin typeface="Arial"/>
-                <a:ea typeface="Arial"/>
-                <a:cs typeface="Arial"/>
-              </a:rPr>
-              <a:t>Future work: [One or two feasible improvements]</a:t>
             </a:r>
           </a:p>
         </p:txBody>
@@ -4704,10 +3414,1423 @@
       </p:cxnSp>
       <p:sp>
         <p:nvSpPr>
-          <p:cNvPr id="37" name="Rectangle 36">
+          <p:cNvPr id="37" name="Problem and Objectives Text"/>
+          <p:cNvSpPr txBox="1"/>
+          <p:nvPr/>
+        </p:nvSpPr>
+        <p:spPr>
+          <a:xfrm>
+            <a:off x="567570" y="4956786"/>
+            <a:ext cx="8324373" cy="4729757"/>
+          </a:xfrm>
+          <a:prstGeom prst="rect">
+            <a:avLst/>
+          </a:prstGeom>
+          <a:noFill/>
+        </p:spPr>
+        <p:txBody>
+          <a:bodyPr wrap="square" lIns="0" rIns="0" tIns="0" bIns="0" anchor="t">
+            <a:spAutoFit/>
+          </a:bodyPr>
+          <a:lstStyle/>
+          <a:p>
+            <a:pPr algn="l">
+              <a:lnSpc>
+                <a:spcPts val="2250"/>
+              </a:lnSpc>
+              <a:spcBef>
+                <a:spcPts val="400"/>
+              </a:spcBef>
+            </a:pPr>
+            <a:r>
+              <a:rPr sz="2000" b="1">
+                <a:solidFill>
+                  <a:srgbClr val="087F8C"/>
+                </a:solidFill>
+                <a:latin typeface="Arial"/>
+              </a:rPr>
+              <a:t>Problem Statement</a:t>
+            </a:r>
+          </a:p>
+          <a:p>
+            <a:pPr algn="l">
+              <a:lnSpc>
+                <a:spcPts val="2250"/>
+              </a:lnSpc>
+            </a:pPr>
+            <a:r>
+              <a:rPr sz="1800" b="0">
+                <a:solidFill>
+                  <a:srgbClr val="15354B"/>
+                </a:solidFill>
+                <a:latin typeface="Arial"/>
+              </a:rPr>
+              <a:t>Existing UAV planners pick a route from the Pareto front with a payload-blind rule (entropy, crowding distance) or a weighted sum fixed before the search, so every payload change needs expert re-tuning and a fresh search. Given a stored front and payload tags (fragility F, weight class W, urgency U, priority P), select the best route with no re-tuning and no re-search, in under 1 s.</a:t>
+            </a:r>
+          </a:p>
+          <a:p>
+            <a:pPr algn="l">
+              <a:lnSpc>
+                <a:spcPts val="2250"/>
+              </a:lnSpc>
+              <a:spcBef>
+                <a:spcPts val="400"/>
+              </a:spcBef>
+            </a:pPr>
+            <a:r>
+              <a:rPr sz="2000" b="1">
+                <a:solidFill>
+                  <a:srgbClr val="087F8C"/>
+                </a:solidFill>
+                <a:latin typeface="Arial"/>
+              </a:rPr>
+              <a:t>Objectives</a:t>
+            </a:r>
+          </a:p>
+          <a:p>
+            <a:pPr algn="l">
+              <a:lnSpc>
+                <a:spcPts val="2250"/>
+              </a:lnSpc>
+            </a:pPr>
+            <a:r>
+              <a:rPr sz="1800" b="0">
+                <a:solidFill>
+                  <a:srgbClr val="15354B"/>
+                </a:solidFill>
+                <a:latin typeface="Arial"/>
+              </a:rPr>
+              <a:t>1. Precompute an exact Pareto front (NAMOA*) over a 3-D airspace graph</a:t>
+            </a:r>
+          </a:p>
+          <a:p>
+            <a:pPr algn="l">
+              <a:lnSpc>
+                <a:spcPts val="2250"/>
+              </a:lnSpc>
+            </a:pPr>
+            <a:r>
+              <a:rPr sz="1800" b="0">
+                <a:solidFill>
+                  <a:srgbClr val="15354B"/>
+                </a:solidFill>
+                <a:latin typeface="Arial"/>
+              </a:rPr>
+              <a:t>2. Model terrain, buildings, no-fly zones and direction-aware wind per edge</a:t>
+            </a:r>
+          </a:p>
+          <a:p>
+            <a:pPr algn="l">
+              <a:lnSpc>
+                <a:spcPts val="2250"/>
+              </a:lnSpc>
+            </a:pPr>
+            <a:r>
+              <a:rPr sz="1800" b="0">
+                <a:solidFill>
+                  <a:srgbClr val="15354B"/>
+                </a:solidFill>
+                <a:latin typeface="Arial"/>
+              </a:rPr>
+              <a:t>3. Map payload tags to selection weights with an explicit formula</a:t>
+            </a:r>
+          </a:p>
+          <a:p>
+            <a:pPr algn="l">
+              <a:lnSpc>
+                <a:spcPts val="2250"/>
+              </a:lnSpc>
+            </a:pPr>
+            <a:r>
+              <a:rPr sz="1800" b="0">
+                <a:solidFill>
+                  <a:srgbClr val="15354B"/>
+                </a:solidFill>
+                <a:latin typeface="Arial"/>
+              </a:rPr>
+              <a:t>4. Benchmark Tier 1 against A* and MOPSO (HV, IGD, spread)</a:t>
+            </a:r>
+          </a:p>
+          <a:p>
+            <a:pPr algn="l">
+              <a:lnSpc>
+                <a:spcPts val="2250"/>
+              </a:lnSpc>
+            </a:pPr>
+            <a:r>
+              <a:rPr sz="1800" b="0">
+                <a:solidFill>
+                  <a:srgbClr val="15354B"/>
+                </a:solidFill>
+                <a:latin typeface="Arial"/>
+              </a:rPr>
+              <a:t>5. Show Tier 2 picks suit the payload, incl. non-extreme routes, in &lt;1 s</a:t>
+            </a:r>
+          </a:p>
+          <a:p>
+            <a:pPr algn="l">
+              <a:lnSpc>
+                <a:spcPts val="2250"/>
+              </a:lnSpc>
+            </a:pPr>
+            <a:r>
+              <a:rPr sz="1800" b="0">
+                <a:solidFill>
+                  <a:srgbClr val="15354B"/>
+                </a:solidFill>
+                <a:latin typeface="Arial"/>
+              </a:rPr>
+              <a:t>6. Export the route as an ArduPilot mission; verify in Gazebo + SITL</a:t>
+            </a:r>
+          </a:p>
+        </p:txBody>
+      </p:sp>
+      <p:graphicFrame>
+        <p:nvGraphicFramePr>
+          <p:cNvPr id="38" name="Related Work Table"/>
+          <p:cNvGraphicFramePr>
+            <a:graphicFrameLocks noGrp="1"/>
+          </p:cNvGraphicFramePr>
+          <p:nvPr/>
+        </p:nvGraphicFramePr>
+        <p:xfrm>
+          <a:off x="567570" y="9686544"/>
+          <a:ext cx="8324372" cy="1816224"/>
+        </p:xfrm>
+        <a:graphic>
+          <a:graphicData uri="http://schemas.openxmlformats.org/drawingml/2006/table">
+            <a:tbl>
+              <a:tblPr firstRow="1" bandRow="0"/>
+              <a:tblGrid>
+                <a:gridCol w="1740550"/>
+                <a:gridCol w="1967579"/>
+                <a:gridCol w="2118931"/>
+                <a:gridCol w="2497312"/>
+              </a:tblGrid>
+              <a:tr h="302704">
+                <a:tc>
+                  <a:txBody>
+                    <a:bodyPr wrap="square"/>
+                    <a:lstStyle/>
+                    <a:p>
+                      <a:pPr algn="l"/>
+                      <a:r>
+                        <a:rPr sz="1400" b="1">
+                          <a:solidFill>
+                            <a:srgbClr val="FFFFFF"/>
+                          </a:solidFill>
+                          <a:latin typeface="Arial"/>
+                        </a:rPr>
+                        <a:t>Author / Year</a:t>
+                      </a:r>
+                    </a:p>
+                  </a:txBody>
+                  <a:tcPr marL="50800" marR="50800" marT="19050" marB="19050" anchor="ctr">
+                    <a:lnL w="9525" cmpd="sng">
+                      <a:solidFill>
+                        <a:srgbClr val="15354B"/>
+                      </a:solidFill>
+                    </a:lnL>
+                    <a:lnR w="9525" cmpd="sng">
+                      <a:solidFill>
+                        <a:srgbClr val="15354B"/>
+                      </a:solidFill>
+                    </a:lnR>
+                    <a:lnT w="9525" cmpd="sng">
+                      <a:solidFill>
+                        <a:srgbClr val="15354B"/>
+                      </a:solidFill>
+                    </a:lnT>
+                    <a:lnB w="9525" cmpd="sng">
+                      <a:solidFill>
+                        <a:srgbClr val="15354B"/>
+                      </a:solidFill>
+                    </a:lnB>
+                    <a:solidFill>
+                      <a:srgbClr val="15354B"/>
+                    </a:solidFill>
+                  </a:tcPr>
+                </a:tc>
+                <a:tc>
+                  <a:txBody>
+                    <a:bodyPr wrap="square"/>
+                    <a:lstStyle/>
+                    <a:p>
+                      <a:pPr algn="l"/>
+                      <a:r>
+                        <a:rPr sz="1400" b="1">
+                          <a:solidFill>
+                            <a:srgbClr val="FFFFFF"/>
+                          </a:solidFill>
+                          <a:latin typeface="Arial"/>
+                        </a:rPr>
+                        <a:t>Proposed Method</a:t>
+                      </a:r>
+                    </a:p>
+                  </a:txBody>
+                  <a:tcPr marL="50800" marR="50800" marT="19050" marB="19050" anchor="ctr">
+                    <a:lnL w="9525" cmpd="sng">
+                      <a:solidFill>
+                        <a:srgbClr val="15354B"/>
+                      </a:solidFill>
+                    </a:lnL>
+                    <a:lnR w="9525" cmpd="sng">
+                      <a:solidFill>
+                        <a:srgbClr val="15354B"/>
+                      </a:solidFill>
+                    </a:lnR>
+                    <a:lnT w="9525" cmpd="sng">
+                      <a:solidFill>
+                        <a:srgbClr val="15354B"/>
+                      </a:solidFill>
+                    </a:lnT>
+                    <a:lnB w="9525" cmpd="sng">
+                      <a:solidFill>
+                        <a:srgbClr val="15354B"/>
+                      </a:solidFill>
+                    </a:lnB>
+                    <a:solidFill>
+                      <a:srgbClr val="15354B"/>
+                    </a:solidFill>
+                  </a:tcPr>
+                </a:tc>
+                <a:tc>
+                  <a:txBody>
+                    <a:bodyPr wrap="square"/>
+                    <a:lstStyle/>
+                    <a:p>
+                      <a:pPr algn="l"/>
+                      <a:r>
+                        <a:rPr sz="1400" b="1">
+                          <a:solidFill>
+                            <a:srgbClr val="FFFFFF"/>
+                          </a:solidFill>
+                          <a:latin typeface="Arial"/>
+                        </a:rPr>
+                        <a:t>Key Findings</a:t>
+                      </a:r>
+                    </a:p>
+                  </a:txBody>
+                  <a:tcPr marL="50800" marR="50800" marT="19050" marB="19050" anchor="ctr">
+                    <a:lnL w="9525" cmpd="sng">
+                      <a:solidFill>
+                        <a:srgbClr val="15354B"/>
+                      </a:solidFill>
+                    </a:lnL>
+                    <a:lnR w="9525" cmpd="sng">
+                      <a:solidFill>
+                        <a:srgbClr val="15354B"/>
+                      </a:solidFill>
+                    </a:lnR>
+                    <a:lnT w="9525" cmpd="sng">
+                      <a:solidFill>
+                        <a:srgbClr val="15354B"/>
+                      </a:solidFill>
+                    </a:lnT>
+                    <a:lnB w="9525" cmpd="sng">
+                      <a:solidFill>
+                        <a:srgbClr val="15354B"/>
+                      </a:solidFill>
+                    </a:lnB>
+                    <a:solidFill>
+                      <a:srgbClr val="15354B"/>
+                    </a:solidFill>
+                  </a:tcPr>
+                </a:tc>
+                <a:tc>
+                  <a:txBody>
+                    <a:bodyPr wrap="square"/>
+                    <a:lstStyle/>
+                    <a:p>
+                      <a:pPr algn="l"/>
+                      <a:r>
+                        <a:rPr sz="1400" b="1">
+                          <a:solidFill>
+                            <a:srgbClr val="FFFFFF"/>
+                          </a:solidFill>
+                          <a:latin typeface="Arial"/>
+                        </a:rPr>
+                        <a:t>Limitations</a:t>
+                      </a:r>
+                    </a:p>
+                  </a:txBody>
+                  <a:tcPr marL="50800" marR="50800" marT="19050" marB="19050" anchor="ctr">
+                    <a:lnL w="9525" cmpd="sng">
+                      <a:solidFill>
+                        <a:srgbClr val="15354B"/>
+                      </a:solidFill>
+                    </a:lnL>
+                    <a:lnR w="9525" cmpd="sng">
+                      <a:solidFill>
+                        <a:srgbClr val="15354B"/>
+                      </a:solidFill>
+                    </a:lnR>
+                    <a:lnT w="9525" cmpd="sng">
+                      <a:solidFill>
+                        <a:srgbClr val="15354B"/>
+                      </a:solidFill>
+                    </a:lnT>
+                    <a:lnB w="9525" cmpd="sng">
+                      <a:solidFill>
+                        <a:srgbClr val="15354B"/>
+                      </a:solidFill>
+                    </a:lnB>
+                    <a:solidFill>
+                      <a:srgbClr val="15354B"/>
+                    </a:solidFill>
+                  </a:tcPr>
+                </a:tc>
+              </a:tr>
+              <a:tr h="302704">
+                <a:tc>
+                  <a:txBody>
+                    <a:bodyPr wrap="square"/>
+                    <a:lstStyle/>
+                    <a:p>
+                      <a:pPr algn="l"/>
+                      <a:r>
+                        <a:rPr sz="1400" b="1">
+                          <a:solidFill>
+                            <a:srgbClr val="15354B"/>
+                          </a:solidFill>
+                          <a:latin typeface="Arial"/>
+                        </a:rPr>
+                        <a:t>Chokkalingam &amp; Ganesan (2026)</a:t>
+                      </a:r>
+                    </a:p>
+                  </a:txBody>
+                  <a:tcPr marL="50800" marR="50800" marT="19050" marB="19050" anchor="ctr">
+                    <a:lnL w="9525" cmpd="sng">
+                      <a:solidFill>
+                        <a:srgbClr val="6F7F8C"/>
+                      </a:solidFill>
+                    </a:lnL>
+                    <a:lnR w="9525" cmpd="sng">
+                      <a:solidFill>
+                        <a:srgbClr val="6F7F8C"/>
+                      </a:solidFill>
+                    </a:lnR>
+                    <a:lnT w="9525" cmpd="sng">
+                      <a:solidFill>
+                        <a:srgbClr val="6F7F8C"/>
+                      </a:solidFill>
+                    </a:lnT>
+                    <a:lnB w="9525" cmpd="sng">
+                      <a:solidFill>
+                        <a:srgbClr val="6F7F8C"/>
+                      </a:solidFill>
+                    </a:lnB>
+                    <a:solidFill>
+                      <a:srgbClr val="FFFFFF"/>
+                    </a:solidFill>
+                  </a:tcPr>
+                </a:tc>
+                <a:tc>
+                  <a:txBody>
+                    <a:bodyPr wrap="square"/>
+                    <a:lstStyle/>
+                    <a:p>
+                      <a:pPr algn="l"/>
+                      <a:r>
+                        <a:rPr sz="1400" b="0">
+                          <a:solidFill>
+                            <a:srgbClr val="15354B"/>
+                          </a:solidFill>
+                          <a:latin typeface="Arial"/>
+                        </a:rPr>
+                        <a:t>POPSO with Pareto-entropy archive</a:t>
+                      </a:r>
+                    </a:p>
+                  </a:txBody>
+                  <a:tcPr marL="50800" marR="50800" marT="19050" marB="19050" anchor="ctr">
+                    <a:lnL w="9525" cmpd="sng">
+                      <a:solidFill>
+                        <a:srgbClr val="6F7F8C"/>
+                      </a:solidFill>
+                    </a:lnL>
+                    <a:lnR w="9525" cmpd="sng">
+                      <a:solidFill>
+                        <a:srgbClr val="6F7F8C"/>
+                      </a:solidFill>
+                    </a:lnR>
+                    <a:lnT w="9525" cmpd="sng">
+                      <a:solidFill>
+                        <a:srgbClr val="6F7F8C"/>
+                      </a:solidFill>
+                    </a:lnT>
+                    <a:lnB w="9525" cmpd="sng">
+                      <a:solidFill>
+                        <a:srgbClr val="6F7F8C"/>
+                      </a:solidFill>
+                    </a:lnB>
+                    <a:solidFill>
+                      <a:srgbClr val="FFFFFF"/>
+                    </a:solidFill>
+                  </a:tcPr>
+                </a:tc>
+                <a:tc>
+                  <a:txBody>
+                    <a:bodyPr wrap="square"/>
+                    <a:lstStyle/>
+                    <a:p>
+                      <a:pPr algn="l"/>
+                      <a:r>
+                        <a:rPr sz="1400" b="0">
+                          <a:solidFill>
+                            <a:srgbClr val="15354B"/>
+                          </a:solidFill>
+                          <a:latin typeface="Arial"/>
+                        </a:rPr>
+                        <a:t>Well-spread fronts; better path efficiency and safety</a:t>
+                      </a:r>
+                    </a:p>
+                  </a:txBody>
+                  <a:tcPr marL="50800" marR="50800" marT="19050" marB="19050" anchor="ctr">
+                    <a:lnL w="9525" cmpd="sng">
+                      <a:solidFill>
+                        <a:srgbClr val="6F7F8C"/>
+                      </a:solidFill>
+                    </a:lnL>
+                    <a:lnR w="9525" cmpd="sng">
+                      <a:solidFill>
+                        <a:srgbClr val="6F7F8C"/>
+                      </a:solidFill>
+                    </a:lnR>
+                    <a:lnT w="9525" cmpd="sng">
+                      <a:solidFill>
+                        <a:srgbClr val="6F7F8C"/>
+                      </a:solidFill>
+                    </a:lnT>
+                    <a:lnB w="9525" cmpd="sng">
+                      <a:solidFill>
+                        <a:srgbClr val="6F7F8C"/>
+                      </a:solidFill>
+                    </a:lnB>
+                    <a:solidFill>
+                      <a:srgbClr val="FFFFFF"/>
+                    </a:solidFill>
+                  </a:tcPr>
+                </a:tc>
+                <a:tc>
+                  <a:txBody>
+                    <a:bodyPr wrap="square"/>
+                    <a:lstStyle/>
+                    <a:p>
+                      <a:pPr algn="l"/>
+                      <a:r>
+                        <a:rPr sz="1400" b="0">
+                          <a:solidFill>
+                            <a:srgbClr val="15354B"/>
+                          </a:solidFill>
+                          <a:latin typeface="Arial"/>
+                        </a:rPr>
+                        <a:t>Final pick by hand-set weighted sum; wind is speed-only; no payload</a:t>
+                      </a:r>
+                    </a:p>
+                  </a:txBody>
+                  <a:tcPr marL="50800" marR="50800" marT="19050" marB="19050" anchor="ctr">
+                    <a:lnL w="9525" cmpd="sng">
+                      <a:solidFill>
+                        <a:srgbClr val="6F7F8C"/>
+                      </a:solidFill>
+                    </a:lnL>
+                    <a:lnR w="9525" cmpd="sng">
+                      <a:solidFill>
+                        <a:srgbClr val="6F7F8C"/>
+                      </a:solidFill>
+                    </a:lnR>
+                    <a:lnT w="9525" cmpd="sng">
+                      <a:solidFill>
+                        <a:srgbClr val="6F7F8C"/>
+                      </a:solidFill>
+                    </a:lnT>
+                    <a:lnB w="9525" cmpd="sng">
+                      <a:solidFill>
+                        <a:srgbClr val="6F7F8C"/>
+                      </a:solidFill>
+                    </a:lnB>
+                    <a:solidFill>
+                      <a:srgbClr val="FFFFFF"/>
+                    </a:solidFill>
+                  </a:tcPr>
+                </a:tc>
+              </a:tr>
+              <a:tr h="302704">
+                <a:tc>
+                  <a:txBody>
+                    <a:bodyPr wrap="square"/>
+                    <a:lstStyle/>
+                    <a:p>
+                      <a:pPr algn="l"/>
+                      <a:r>
+                        <a:rPr sz="1400" b="1">
+                          <a:solidFill>
+                            <a:srgbClr val="15354B"/>
+                          </a:solidFill>
+                          <a:latin typeface="Arial"/>
+                        </a:rPr>
+                        <a:t>Ren et al. (2019)</a:t>
+                      </a:r>
+                    </a:p>
+                  </a:txBody>
+                  <a:tcPr marL="50800" marR="50800" marT="19050" marB="19050" anchor="ctr">
+                    <a:lnL w="9525" cmpd="sng">
+                      <a:solidFill>
+                        <a:srgbClr val="6F7F8C"/>
+                      </a:solidFill>
+                    </a:lnL>
+                    <a:lnR w="9525" cmpd="sng">
+                      <a:solidFill>
+                        <a:srgbClr val="6F7F8C"/>
+                      </a:solidFill>
+                    </a:lnR>
+                    <a:lnT w="9525" cmpd="sng">
+                      <a:solidFill>
+                        <a:srgbClr val="6F7F8C"/>
+                      </a:solidFill>
+                    </a:lnT>
+                    <a:lnB w="9525" cmpd="sng">
+                      <a:solidFill>
+                        <a:srgbClr val="6F7F8C"/>
+                      </a:solidFill>
+                    </a:lnB>
+                    <a:solidFill>
+                      <a:srgbClr val="FFFFFF"/>
+                    </a:solidFill>
+                  </a:tcPr>
+                </a:tc>
+                <a:tc>
+                  <a:txBody>
+                    <a:bodyPr wrap="square"/>
+                    <a:lstStyle/>
+                    <a:p>
+                      <a:pPr algn="l"/>
+                      <a:r>
+                        <a:rPr sz="1400" b="0">
+                          <a:solidFill>
+                            <a:srgbClr val="15354B"/>
+                          </a:solidFill>
+                          <a:latin typeface="Arial"/>
+                        </a:rPr>
+                        <a:t>CDNSGA-II over an octree city model</a:t>
+                      </a:r>
+                    </a:p>
+                  </a:txBody>
+                  <a:tcPr marL="50800" marR="50800" marT="19050" marB="19050" anchor="ctr">
+                    <a:lnL w="9525" cmpd="sng">
+                      <a:solidFill>
+                        <a:srgbClr val="6F7F8C"/>
+                      </a:solidFill>
+                    </a:lnL>
+                    <a:lnR w="9525" cmpd="sng">
+                      <a:solidFill>
+                        <a:srgbClr val="6F7F8C"/>
+                      </a:solidFill>
+                    </a:lnR>
+                    <a:lnT w="9525" cmpd="sng">
+                      <a:solidFill>
+                        <a:srgbClr val="6F7F8C"/>
+                      </a:solidFill>
+                    </a:lnT>
+                    <a:lnB w="9525" cmpd="sng">
+                      <a:solidFill>
+                        <a:srgbClr val="6F7F8C"/>
+                      </a:solidFill>
+                    </a:lnB>
+                    <a:solidFill>
+                      <a:srgbClr val="FFFFFF"/>
+                    </a:solidFill>
+                  </a:tcPr>
+                </a:tc>
+                <a:tc>
+                  <a:txBody>
+                    <a:bodyPr wrap="square"/>
+                    <a:lstStyle/>
+                    <a:p>
+                      <a:pPr algn="l"/>
+                      <a:r>
+                        <a:rPr sz="1400" b="0">
+                          <a:solidFill>
+                            <a:srgbClr val="15354B"/>
+                          </a:solidFill>
+                          <a:latin typeface="Arial"/>
+                        </a:rPr>
+                        <a:t>Spread-out, collision-free distance/safety paths</a:t>
+                      </a:r>
+                    </a:p>
+                  </a:txBody>
+                  <a:tcPr marL="50800" marR="50800" marT="19050" marB="19050" anchor="ctr">
+                    <a:lnL w="9525" cmpd="sng">
+                      <a:solidFill>
+                        <a:srgbClr val="6F7F8C"/>
+                      </a:solidFill>
+                    </a:lnL>
+                    <a:lnR w="9525" cmpd="sng">
+                      <a:solidFill>
+                        <a:srgbClr val="6F7F8C"/>
+                      </a:solidFill>
+                    </a:lnR>
+                    <a:lnT w="9525" cmpd="sng">
+                      <a:solidFill>
+                        <a:srgbClr val="6F7F8C"/>
+                      </a:solidFill>
+                    </a:lnT>
+                    <a:lnB w="9525" cmpd="sng">
+                      <a:solidFill>
+                        <a:srgbClr val="6F7F8C"/>
+                      </a:solidFill>
+                    </a:lnB>
+                    <a:solidFill>
+                      <a:srgbClr val="FFFFFF"/>
+                    </a:solidFill>
+                  </a:tcPr>
+                </a:tc>
+                <a:tc>
+                  <a:txBody>
+                    <a:bodyPr wrap="square"/>
+                    <a:lstStyle/>
+                    <a:p>
+                      <a:pPr algn="l"/>
+                      <a:r>
+                        <a:rPr sz="1400" b="0">
+                          <a:solidFill>
+                            <a:srgbClr val="15354B"/>
+                          </a:solidFill>
+                          <a:latin typeface="Arial"/>
+                        </a:rPr>
+                        <a:t>Pick by crowding distance only; no mission context or wind</a:t>
+                      </a:r>
+                    </a:p>
+                  </a:txBody>
+                  <a:tcPr marL="50800" marR="50800" marT="19050" marB="19050" anchor="ctr">
+                    <a:lnL w="9525" cmpd="sng">
+                      <a:solidFill>
+                        <a:srgbClr val="6F7F8C"/>
+                      </a:solidFill>
+                    </a:lnL>
+                    <a:lnR w="9525" cmpd="sng">
+                      <a:solidFill>
+                        <a:srgbClr val="6F7F8C"/>
+                      </a:solidFill>
+                    </a:lnR>
+                    <a:lnT w="9525" cmpd="sng">
+                      <a:solidFill>
+                        <a:srgbClr val="6F7F8C"/>
+                      </a:solidFill>
+                    </a:lnT>
+                    <a:lnB w="9525" cmpd="sng">
+                      <a:solidFill>
+                        <a:srgbClr val="6F7F8C"/>
+                      </a:solidFill>
+                    </a:lnB>
+                    <a:solidFill>
+                      <a:srgbClr val="FFFFFF"/>
+                    </a:solidFill>
+                  </a:tcPr>
+                </a:tc>
+              </a:tr>
+              <a:tr h="302704">
+                <a:tc>
+                  <a:txBody>
+                    <a:bodyPr wrap="square"/>
+                    <a:lstStyle/>
+                    <a:p>
+                      <a:pPr algn="l"/>
+                      <a:r>
+                        <a:rPr sz="1400" b="1">
+                          <a:solidFill>
+                            <a:srgbClr val="15354B"/>
+                          </a:solidFill>
+                          <a:latin typeface="Arial"/>
+                        </a:rPr>
+                        <a:t>Deng et al. (2026)</a:t>
+                      </a:r>
+                    </a:p>
+                  </a:txBody>
+                  <a:tcPr marL="50800" marR="50800" marT="19050" marB="19050" anchor="ctr">
+                    <a:lnL w="9525" cmpd="sng">
+                      <a:solidFill>
+                        <a:srgbClr val="6F7F8C"/>
+                      </a:solidFill>
+                    </a:lnL>
+                    <a:lnR w="9525" cmpd="sng">
+                      <a:solidFill>
+                        <a:srgbClr val="6F7F8C"/>
+                      </a:solidFill>
+                    </a:lnR>
+                    <a:lnT w="9525" cmpd="sng">
+                      <a:solidFill>
+                        <a:srgbClr val="6F7F8C"/>
+                      </a:solidFill>
+                    </a:lnT>
+                    <a:lnB w="9525" cmpd="sng">
+                      <a:solidFill>
+                        <a:srgbClr val="6F7F8C"/>
+                      </a:solidFill>
+                    </a:lnB>
+                    <a:solidFill>
+                      <a:srgbClr val="FFFFFF"/>
+                    </a:solidFill>
+                  </a:tcPr>
+                </a:tc>
+                <a:tc>
+                  <a:txBody>
+                    <a:bodyPr wrap="square"/>
+                    <a:lstStyle/>
+                    <a:p>
+                      <a:pPr algn="l"/>
+                      <a:r>
+                        <a:rPr sz="1400" b="0">
+                          <a:solidFill>
+                            <a:srgbClr val="15354B"/>
+                          </a:solidFill>
+                          <a:latin typeface="Arial"/>
+                        </a:rPr>
+                        <a:t>MS-INSGA2: adaptive operators + local search</a:t>
+                      </a:r>
+                    </a:p>
+                  </a:txBody>
+                  <a:tcPr marL="50800" marR="50800" marT="19050" marB="19050" anchor="ctr">
+                    <a:lnL w="9525" cmpd="sng">
+                      <a:solidFill>
+                        <a:srgbClr val="6F7F8C"/>
+                      </a:solidFill>
+                    </a:lnL>
+                    <a:lnR w="9525" cmpd="sng">
+                      <a:solidFill>
+                        <a:srgbClr val="6F7F8C"/>
+                      </a:solidFill>
+                    </a:lnR>
+                    <a:lnT w="9525" cmpd="sng">
+                      <a:solidFill>
+                        <a:srgbClr val="6F7F8C"/>
+                      </a:solidFill>
+                    </a:lnT>
+                    <a:lnB w="9525" cmpd="sng">
+                      <a:solidFill>
+                        <a:srgbClr val="6F7F8C"/>
+                      </a:solidFill>
+                    </a:lnB>
+                    <a:solidFill>
+                      <a:srgbClr val="FFFFFF"/>
+                    </a:solidFill>
+                  </a:tcPr>
+                </a:tc>
+                <a:tc>
+                  <a:txBody>
+                    <a:bodyPr wrap="square"/>
+                    <a:lstStyle/>
+                    <a:p>
+                      <a:pPr algn="l"/>
+                      <a:r>
+                        <a:rPr sz="1400" b="0">
+                          <a:solidFill>
+                            <a:srgbClr val="15354B"/>
+                          </a:solidFill>
+                          <a:latin typeface="Arial"/>
+                        </a:rPr>
+                        <a:t>Beat 11 algorithms on 3-D planning tasks</a:t>
+                      </a:r>
+                    </a:p>
+                  </a:txBody>
+                  <a:tcPr marL="50800" marR="50800" marT="19050" marB="19050" anchor="ctr">
+                    <a:lnL w="9525" cmpd="sng">
+                      <a:solidFill>
+                        <a:srgbClr val="6F7F8C"/>
+                      </a:solidFill>
+                    </a:lnL>
+                    <a:lnR w="9525" cmpd="sng">
+                      <a:solidFill>
+                        <a:srgbClr val="6F7F8C"/>
+                      </a:solidFill>
+                    </a:lnR>
+                    <a:lnT w="9525" cmpd="sng">
+                      <a:solidFill>
+                        <a:srgbClr val="6F7F8C"/>
+                      </a:solidFill>
+                    </a:lnT>
+                    <a:lnB w="9525" cmpd="sng">
+                      <a:solidFill>
+                        <a:srgbClr val="6F7F8C"/>
+                      </a:solidFill>
+                    </a:lnB>
+                    <a:solidFill>
+                      <a:srgbClr val="FFFFFF"/>
+                    </a:solidFill>
+                  </a:tcPr>
+                </a:tc>
+                <a:tc>
+                  <a:txBody>
+                    <a:bodyPr wrap="square"/>
+                    <a:lstStyle/>
+                    <a:p>
+                      <a:pPr algn="l"/>
+                      <a:r>
+                        <a:rPr sz="1400" b="0">
+                          <a:solidFill>
+                            <a:srgbClr val="15354B"/>
+                          </a:solidFill>
+                          <a:latin typeface="Arial"/>
+                        </a:rPr>
+                        <a:t>No payload context; wind left to future work; front rebuilt per task</a:t>
+                      </a:r>
+                    </a:p>
+                  </a:txBody>
+                  <a:tcPr marL="50800" marR="50800" marT="19050" marB="19050" anchor="ctr">
+                    <a:lnL w="9525" cmpd="sng">
+                      <a:solidFill>
+                        <a:srgbClr val="6F7F8C"/>
+                      </a:solidFill>
+                    </a:lnL>
+                    <a:lnR w="9525" cmpd="sng">
+                      <a:solidFill>
+                        <a:srgbClr val="6F7F8C"/>
+                      </a:solidFill>
+                    </a:lnR>
+                    <a:lnT w="9525" cmpd="sng">
+                      <a:solidFill>
+                        <a:srgbClr val="6F7F8C"/>
+                      </a:solidFill>
+                    </a:lnT>
+                    <a:lnB w="9525" cmpd="sng">
+                      <a:solidFill>
+                        <a:srgbClr val="6F7F8C"/>
+                      </a:solidFill>
+                    </a:lnB>
+                    <a:solidFill>
+                      <a:srgbClr val="FFFFFF"/>
+                    </a:solidFill>
+                  </a:tcPr>
+                </a:tc>
+              </a:tr>
+              <a:tr h="302704">
+                <a:tc>
+                  <a:txBody>
+                    <a:bodyPr wrap="square"/>
+                    <a:lstStyle/>
+                    <a:p>
+                      <a:pPr algn="l"/>
+                      <a:r>
+                        <a:rPr sz="1400" b="1">
+                          <a:solidFill>
+                            <a:srgbClr val="15354B"/>
+                          </a:solidFill>
+                          <a:latin typeface="Arial"/>
+                        </a:rPr>
+                        <a:t>Mandow &amp; Pérez de la Cruz (2010)</a:t>
+                      </a:r>
+                    </a:p>
+                  </a:txBody>
+                  <a:tcPr marL="50800" marR="50800" marT="19050" marB="19050" anchor="ctr">
+                    <a:lnL w="9525" cmpd="sng">
+                      <a:solidFill>
+                        <a:srgbClr val="6F7F8C"/>
+                      </a:solidFill>
+                    </a:lnL>
+                    <a:lnR w="9525" cmpd="sng">
+                      <a:solidFill>
+                        <a:srgbClr val="6F7F8C"/>
+                      </a:solidFill>
+                    </a:lnR>
+                    <a:lnT w="9525" cmpd="sng">
+                      <a:solidFill>
+                        <a:srgbClr val="6F7F8C"/>
+                      </a:solidFill>
+                    </a:lnT>
+                    <a:lnB w="9525" cmpd="sng">
+                      <a:solidFill>
+                        <a:srgbClr val="6F7F8C"/>
+                      </a:solidFill>
+                    </a:lnB>
+                    <a:solidFill>
+                      <a:srgbClr val="FFFFFF"/>
+                    </a:solidFill>
+                  </a:tcPr>
+                </a:tc>
+                <a:tc>
+                  <a:txBody>
+                    <a:bodyPr wrap="square"/>
+                    <a:lstStyle/>
+                    <a:p>
+                      <a:pPr algn="l"/>
+                      <a:r>
+                        <a:rPr sz="1400" b="0">
+                          <a:solidFill>
+                            <a:srgbClr val="15354B"/>
+                          </a:solidFill>
+                          <a:latin typeface="Arial"/>
+                        </a:rPr>
+                        <a:t>NAMOA*: label-based multi-objective A*</a:t>
+                      </a:r>
+                    </a:p>
+                  </a:txBody>
+                  <a:tcPr marL="50800" marR="50800" marT="19050" marB="19050" anchor="ctr">
+                    <a:lnL w="9525" cmpd="sng">
+                      <a:solidFill>
+                        <a:srgbClr val="6F7F8C"/>
+                      </a:solidFill>
+                    </a:lnL>
+                    <a:lnR w="9525" cmpd="sng">
+                      <a:solidFill>
+                        <a:srgbClr val="6F7F8C"/>
+                      </a:solidFill>
+                    </a:lnR>
+                    <a:lnT w="9525" cmpd="sng">
+                      <a:solidFill>
+                        <a:srgbClr val="6F7F8C"/>
+                      </a:solidFill>
+                    </a:lnT>
+                    <a:lnB w="9525" cmpd="sng">
+                      <a:solidFill>
+                        <a:srgbClr val="6F7F8C"/>
+                      </a:solidFill>
+                    </a:lnB>
+                    <a:solidFill>
+                      <a:srgbClr val="FFFFFF"/>
+                    </a:solidFill>
+                  </a:tcPr>
+                </a:tc>
+                <a:tc>
+                  <a:txBody>
+                    <a:bodyPr wrap="square"/>
+                    <a:lstStyle/>
+                    <a:p>
+                      <a:pPr algn="l"/>
+                      <a:r>
+                        <a:rPr sz="1400" b="0">
+                          <a:solidFill>
+                            <a:srgbClr val="15354B"/>
+                          </a:solidFill>
+                          <a:latin typeface="Arial"/>
+                        </a:rPr>
+                        <a:t>Exact Pareto front with admissible heuristics</a:t>
+                      </a:r>
+                    </a:p>
+                  </a:txBody>
+                  <a:tcPr marL="50800" marR="50800" marT="19050" marB="19050" anchor="ctr">
+                    <a:lnL w="9525" cmpd="sng">
+                      <a:solidFill>
+                        <a:srgbClr val="6F7F8C"/>
+                      </a:solidFill>
+                    </a:lnL>
+                    <a:lnR w="9525" cmpd="sng">
+                      <a:solidFill>
+                        <a:srgbClr val="6F7F8C"/>
+                      </a:solidFill>
+                    </a:lnR>
+                    <a:lnT w="9525" cmpd="sng">
+                      <a:solidFill>
+                        <a:srgbClr val="6F7F8C"/>
+                      </a:solidFill>
+                    </a:lnT>
+                    <a:lnB w="9525" cmpd="sng">
+                      <a:solidFill>
+                        <a:srgbClr val="6F7F8C"/>
+                      </a:solidFill>
+                    </a:lnB>
+                    <a:solidFill>
+                      <a:srgbClr val="FFFFFF"/>
+                    </a:solidFill>
+                  </a:tcPr>
+                </a:tc>
+                <a:tc>
+                  <a:txBody>
+                    <a:bodyPr wrap="square"/>
+                    <a:lstStyle/>
+                    <a:p>
+                      <a:pPr algn="l"/>
+                      <a:r>
+                        <a:rPr sz="1400" b="0">
+                          <a:solidFill>
+                            <a:srgbClr val="15354B"/>
+                          </a:solidFill>
+                          <a:latin typeface="Arial"/>
+                        </a:rPr>
+                        <a:t>Says nothing about which route to fly</a:t>
+                      </a:r>
+                    </a:p>
+                  </a:txBody>
+                  <a:tcPr marL="50800" marR="50800" marT="19050" marB="19050" anchor="ctr">
+                    <a:lnL w="9525" cmpd="sng">
+                      <a:solidFill>
+                        <a:srgbClr val="6F7F8C"/>
+                      </a:solidFill>
+                    </a:lnL>
+                    <a:lnR w="9525" cmpd="sng">
+                      <a:solidFill>
+                        <a:srgbClr val="6F7F8C"/>
+                      </a:solidFill>
+                    </a:lnR>
+                    <a:lnT w="9525" cmpd="sng">
+                      <a:solidFill>
+                        <a:srgbClr val="6F7F8C"/>
+                      </a:solidFill>
+                    </a:lnT>
+                    <a:lnB w="9525" cmpd="sng">
+                      <a:solidFill>
+                        <a:srgbClr val="6F7F8C"/>
+                      </a:solidFill>
+                    </a:lnB>
+                    <a:solidFill>
+                      <a:srgbClr val="FFFFFF"/>
+                    </a:solidFill>
+                  </a:tcPr>
+                </a:tc>
+              </a:tr>
+              <a:tr h="302704">
+                <a:tc>
+                  <a:txBody>
+                    <a:bodyPr wrap="square"/>
+                    <a:lstStyle/>
+                    <a:p>
+                      <a:pPr algn="l"/>
+                      <a:r>
+                        <a:rPr sz="1400" b="1">
+                          <a:solidFill>
+                            <a:srgbClr val="15354B"/>
+                          </a:solidFill>
+                          <a:latin typeface="Arial"/>
+                        </a:rPr>
+                        <a:t>Tsoutsouras et al. (2020)</a:t>
+                      </a:r>
+                    </a:p>
+                  </a:txBody>
+                  <a:tcPr marL="50800" marR="50800" marT="19050" marB="19050" anchor="ctr">
+                    <a:lnL w="9525" cmpd="sng">
+                      <a:solidFill>
+                        <a:srgbClr val="6F7F8C"/>
+                      </a:solidFill>
+                    </a:lnL>
+                    <a:lnR w="9525" cmpd="sng">
+                      <a:solidFill>
+                        <a:srgbClr val="6F7F8C"/>
+                      </a:solidFill>
+                    </a:lnR>
+                    <a:lnT w="9525" cmpd="sng">
+                      <a:solidFill>
+                        <a:srgbClr val="6F7F8C"/>
+                      </a:solidFill>
+                    </a:lnT>
+                    <a:lnB w="9525" cmpd="sng">
+                      <a:solidFill>
+                        <a:srgbClr val="6F7F8C"/>
+                      </a:solidFill>
+                    </a:lnB>
+                    <a:solidFill>
+                      <a:srgbClr val="FFFFFF"/>
+                    </a:solidFill>
+                  </a:tcPr>
+                </a:tc>
+                <a:tc>
+                  <a:txBody>
+                    <a:bodyPr wrap="square"/>
+                    <a:lstStyle/>
+                    <a:p>
+                      <a:pPr algn="l"/>
+                      <a:r>
+                        <a:rPr sz="1400" b="0">
+                          <a:solidFill>
+                            <a:srgbClr val="15354B"/>
+                          </a:solidFill>
+                          <a:latin typeface="Arial"/>
+                        </a:rPr>
+                        <a:t>Mass- and speed-aware power model, multi-drop planning</a:t>
+                      </a:r>
+                    </a:p>
+                  </a:txBody>
+                  <a:tcPr marL="50800" marR="50800" marT="19050" marB="19050" anchor="ctr">
+                    <a:lnL w="9525" cmpd="sng">
+                      <a:solidFill>
+                        <a:srgbClr val="6F7F8C"/>
+                      </a:solidFill>
+                    </a:lnL>
+                    <a:lnR w="9525" cmpd="sng">
+                      <a:solidFill>
+                        <a:srgbClr val="6F7F8C"/>
+                      </a:solidFill>
+                    </a:lnR>
+                    <a:lnT w="9525" cmpd="sng">
+                      <a:solidFill>
+                        <a:srgbClr val="6F7F8C"/>
+                      </a:solidFill>
+                    </a:lnT>
+                    <a:lnB w="9525" cmpd="sng">
+                      <a:solidFill>
+                        <a:srgbClr val="6F7F8C"/>
+                      </a:solidFill>
+                    </a:lnB>
+                    <a:solidFill>
+                      <a:srgbClr val="FFFFFF"/>
+                    </a:solidFill>
+                  </a:tcPr>
+                </a:tc>
+                <a:tc>
+                  <a:txBody>
+                    <a:bodyPr wrap="square"/>
+                    <a:lstStyle/>
+                    <a:p>
+                      <a:pPr algn="l"/>
+                      <a:r>
+                        <a:rPr sz="1400" b="0">
+                          <a:solidFill>
+                            <a:srgbClr val="15354B"/>
+                          </a:solidFill>
+                          <a:latin typeface="Arial"/>
+                        </a:rPr>
+                        <a:t>Near-optimal on-board trajectories in ~320 ms</a:t>
+                      </a:r>
+                    </a:p>
+                  </a:txBody>
+                  <a:tcPr marL="50800" marR="50800" marT="19050" marB="19050" anchor="ctr">
+                    <a:lnL w="9525" cmpd="sng">
+                      <a:solidFill>
+                        <a:srgbClr val="6F7F8C"/>
+                      </a:solidFill>
+                    </a:lnL>
+                    <a:lnR w="9525" cmpd="sng">
+                      <a:solidFill>
+                        <a:srgbClr val="6F7F8C"/>
+                      </a:solidFill>
+                    </a:lnR>
+                    <a:lnT w="9525" cmpd="sng">
+                      <a:solidFill>
+                        <a:srgbClr val="6F7F8C"/>
+                      </a:solidFill>
+                    </a:lnT>
+                    <a:lnB w="9525" cmpd="sng">
+                      <a:solidFill>
+                        <a:srgbClr val="6F7F8C"/>
+                      </a:solidFill>
+                    </a:lnB>
+                    <a:solidFill>
+                      <a:srgbClr val="FFFFFF"/>
+                    </a:solidFill>
+                  </a:tcPr>
+                </a:tc>
+                <a:tc>
+                  <a:txBody>
+                    <a:bodyPr wrap="square"/>
+                    <a:lstStyle/>
+                    <a:p>
+                      <a:pPr algn="l"/>
+                      <a:r>
+                        <a:rPr sz="1400" b="0">
+                          <a:solidFill>
+                            <a:srgbClr val="15354B"/>
+                          </a:solidFill>
+                          <a:latin typeface="Arial"/>
+                        </a:rPr>
+                        <a:t>One trajectory, no front; mass is physical, not a selector</a:t>
+                      </a:r>
+                    </a:p>
+                  </a:txBody>
+                  <a:tcPr marL="50800" marR="50800" marT="19050" marB="19050" anchor="ctr">
+                    <a:lnL w="9525" cmpd="sng">
+                      <a:solidFill>
+                        <a:srgbClr val="6F7F8C"/>
+                      </a:solidFill>
+                    </a:lnL>
+                    <a:lnR w="9525" cmpd="sng">
+                      <a:solidFill>
+                        <a:srgbClr val="6F7F8C"/>
+                      </a:solidFill>
+                    </a:lnR>
+                    <a:lnT w="9525" cmpd="sng">
+                      <a:solidFill>
+                        <a:srgbClr val="6F7F8C"/>
+                      </a:solidFill>
+                    </a:lnT>
+                    <a:lnB w="9525" cmpd="sng">
+                      <a:solidFill>
+                        <a:srgbClr val="6F7F8C"/>
+                      </a:solidFill>
+                    </a:lnB>
+                    <a:solidFill>
+                      <a:srgbClr val="FFFFFF"/>
+                    </a:solidFill>
+                  </a:tcPr>
+                </a:tc>
+              </a:tr>
+            </a:tbl>
+          </a:graphicData>
+        </a:graphic>
+      </p:graphicFrame>
+      <p:sp>
+        <p:nvSpPr>
+          <p:cNvPr id="39" name="Research Gap Text"/>
+          <p:cNvSpPr txBox="1"/>
+          <p:nvPr/>
+        </p:nvSpPr>
+        <p:spPr>
+          <a:xfrm>
+            <a:off x="567570" y="13659540"/>
+            <a:ext cx="8324373" cy="2554069"/>
+          </a:xfrm>
+          <a:prstGeom prst="rect">
+            <a:avLst/>
+          </a:prstGeom>
+          <a:noFill/>
+        </p:spPr>
+        <p:txBody>
+          <a:bodyPr wrap="square" lIns="0" rIns="0" tIns="0" bIns="0" anchor="t">
+            <a:spAutoFit/>
+          </a:bodyPr>
+          <a:lstStyle/>
+          <a:p>
+            <a:pPr algn="l">
+              <a:lnSpc>
+                <a:spcPts val="2250"/>
+              </a:lnSpc>
+              <a:spcBef>
+                <a:spcPts val="400"/>
+              </a:spcBef>
+            </a:pPr>
+            <a:r>
+              <a:rPr sz="2000" b="1">
+                <a:solidFill>
+                  <a:srgbClr val="087F8C"/>
+                </a:solidFill>
+                <a:latin typeface="Arial"/>
+              </a:rPr>
+              <a:t>Research gap</a:t>
+            </a:r>
+          </a:p>
+          <a:p>
+            <a:pPr algn="l">
+              <a:lnSpc>
+                <a:spcPts val="2250"/>
+              </a:lnSpc>
+            </a:pPr>
+            <a:r>
+              <a:rPr sz="1800" b="1">
+                <a:solidFill>
+                  <a:srgbClr val="15354B"/>
+                </a:solidFill>
+                <a:latin typeface="Arial"/>
+              </a:rPr>
+              <a:t>Gap 1 </a:t>
+            </a:r>
+            <a:r>
+              <a:rPr sz="1800" b="0">
+                <a:solidFill>
+                  <a:srgbClr val="15354B"/>
+                </a:solidFill>
+                <a:latin typeface="Arial"/>
+              </a:rPr>
+              <a:t>No payload-aware selection: fixed rule, hand-tuned sum, or none</a:t>
+            </a:r>
+          </a:p>
+          <a:p>
+            <a:pPr algn="l">
+              <a:lnSpc>
+                <a:spcPts val="2250"/>
+              </a:lnSpc>
+            </a:pPr>
+            <a:r>
+              <a:rPr sz="1800" b="1">
+                <a:solidFill>
+                  <a:srgbClr val="15354B"/>
+                </a:solidFill>
+                <a:latin typeface="Arial"/>
+              </a:rPr>
+              <a:t>Gap 2 </a:t>
+            </a:r>
+            <a:r>
+              <a:rPr sz="1800" b="0">
+                <a:solidFill>
+                  <a:srgbClr val="15354B"/>
+                </a:solidFill>
+                <a:latin typeface="Arial"/>
+              </a:rPr>
+              <a:t>No front reuse: search is re-run whenever the mission changes</a:t>
+            </a:r>
+          </a:p>
+          <a:p>
+            <a:pPr algn="l">
+              <a:lnSpc>
+                <a:spcPts val="2250"/>
+              </a:lnSpc>
+            </a:pPr>
+            <a:r>
+              <a:rPr sz="1800" b="1">
+                <a:solidFill>
+                  <a:srgbClr val="15354B"/>
+                </a:solidFill>
+                <a:latin typeface="Arial"/>
+              </a:rPr>
+              <a:t>Gap 3 </a:t>
+            </a:r>
+            <a:r>
+              <a:rPr sz="1800" b="0">
+                <a:solidFill>
+                  <a:srgbClr val="15354B"/>
+                </a:solidFill>
+                <a:latin typeface="Arial"/>
+              </a:rPr>
+              <a:t>No explicit mapping from payload description to trade-off</a:t>
+            </a:r>
+          </a:p>
+          <a:p>
+            <a:pPr algn="l">
+              <a:lnSpc>
+                <a:spcPts val="2250"/>
+              </a:lnSpc>
+            </a:pPr>
+            <a:r>
+              <a:rPr sz="1800" b="1">
+                <a:solidFill>
+                  <a:srgbClr val="15354B"/>
+                </a:solidFill>
+                <a:latin typeface="Arial"/>
+              </a:rPr>
+              <a:t>Gap 4 </a:t>
+            </a:r>
+            <a:r>
+              <a:rPr sz="1800" b="0">
+                <a:solidFill>
+                  <a:srgbClr val="15354B"/>
+                </a:solidFill>
+                <a:latin typeface="Arial"/>
+              </a:rPr>
+              <a:t>Wind direction not modelled per edge; fronts carry no weather record</a:t>
+            </a:r>
+          </a:p>
+          <a:p>
+            <a:pPr algn="l">
+              <a:lnSpc>
+                <a:spcPts val="2250"/>
+              </a:lnSpc>
+              <a:spcBef>
+                <a:spcPts val="300"/>
+              </a:spcBef>
+            </a:pPr>
+            <a:r>
+              <a:rPr sz="1800" b="1">
+                <a:solidFill>
+                  <a:srgbClr val="087F8C"/>
+                </a:solidFill>
+                <a:latin typeface="Arial"/>
+              </a:rPr>
+              <a:t>Our work: </a:t>
+            </a:r>
+            <a:r>
+              <a:rPr sz="1800" b="0">
+                <a:solidFill>
+                  <a:srgbClr val="15354B"/>
+                </a:solidFill>
+                <a:latin typeface="Arial"/>
+              </a:rPr>
+              <a:t>Tier 1 builds an exact front once per region and weather window; Tier 2 turns payload tags into weights and picks the best route from that stored front.</a:t>
+            </a:r>
+          </a:p>
+        </p:txBody>
+      </p:sp>
+      <p:sp>
+        <p:nvSpPr>
+          <p:cNvPr id="40" name="Evaluation Metrics">
             <a:extLst>
               <a:ext uri="{FF2B5EF4-FFF2-40B4-BE49-F238E27FC236}">
-                <a16:creationId xmlns:a16="http://schemas.microsoft.com/office/drawing/2014/main" id="{B825398C-3094-6C2E-F51B-7E7DE07004CA}"/>
+                <a16:creationId xmlns:a16="http://schemas.microsoft.com/office/drawing/2014/main" id="{75745C2B-38B5-4B73-945F-5B1E00D6EB36}"/>
               </a:ext>
             </a:extLst>
           </p:cNvPr>
@@ -4718,8 +4841,8 @@
         </p:nvSpPr>
         <p:spPr>
           <a:xfrm>
-            <a:off x="9269830" y="16966030"/>
-            <a:ext cx="10618370" cy="3133726"/>
+            <a:off x="454056" y="16119014"/>
+            <a:ext cx="8513564" cy="666750"/>
           </a:xfrm>
           <a:prstGeom prst="rect">
             <a:avLst/>
@@ -4733,9 +4856,9 @@
           <a:bodyPr/>
           <a:lstStyle>
             <a:defPPr>
-              <a:defRPr sz="2550" b="0">
-                <a:solidFill>
-                  <a:srgbClr val="15354B"/>
+              <a:defRPr sz="3300" b="1">
+                <a:solidFill>
+                  <a:srgbClr val="087F8C"/>
                 </a:solidFill>
                 <a:latin typeface="Arial"/>
                 <a:ea typeface="Arial"/>
@@ -4745,9 +4868,9 @@
           </a:lstStyle>
           <a:p>
             <a:pPr>
-              <a:defRPr sz="2550" b="0">
-                <a:solidFill>
-                  <a:srgbClr val="15354B"/>
+              <a:defRPr sz="3300" b="1">
+                <a:solidFill>
+                  <a:srgbClr val="087F8C"/>
                 </a:solidFill>
                 <a:latin typeface="Arial"/>
                 <a:ea typeface="Arial"/>
@@ -4755,180 +4878,5448 @@
               </a:defRPr>
             </a:pPr>
             <a:r>
-              <a:rPr lang="en-US" sz="2550" b="0" dirty="0">
-                <a:solidFill>
-                  <a:srgbClr val="15354B"/>
+              <a:rPr sz="3300" b="1" dirty="0">
+                <a:solidFill>
+                  <a:srgbClr val="087F8C"/>
                 </a:solidFill>
                 <a:latin typeface="Arial"/>
                 <a:ea typeface="Arial"/>
                 <a:cs typeface="Arial"/>
               </a:rPr>
-              <a:t>Dataset Description</a:t>
+              <a:t>Evaluation Metrics</a:t>
             </a:r>
-            <a:endParaRPr sz="2550" b="0" dirty="0">
-              <a:solidFill>
-                <a:srgbClr val="15354B"/>
-              </a:solidFill>
-              <a:latin typeface="Arial"/>
-              <a:ea typeface="Arial"/>
-              <a:cs typeface="Arial"/>
-            </a:endParaRPr>
-          </a:p>
-          <a:p>
-            <a:pPr>
-              <a:defRPr sz="2550" b="0">
-                <a:solidFill>
-                  <a:srgbClr val="15354B"/>
-                </a:solidFill>
-                <a:latin typeface="Arial"/>
-                <a:ea typeface="Arial"/>
-                <a:cs typeface="Arial"/>
-              </a:defRPr>
-            </a:pPr>
-            <a:endParaRPr sz="2550" b="0" dirty="0">
-              <a:solidFill>
-                <a:srgbClr val="15354B"/>
-              </a:solidFill>
-              <a:latin typeface="Arial"/>
-              <a:ea typeface="Arial"/>
-              <a:cs typeface="Arial"/>
-            </a:endParaRPr>
-          </a:p>
-          <a:p>
-            <a:endParaRPr sz="2550" b="0" dirty="0">
-              <a:solidFill>
-                <a:srgbClr val="15354B"/>
-              </a:solidFill>
-              <a:latin typeface="Arial"/>
-              <a:ea typeface="Arial"/>
-              <a:cs typeface="Arial"/>
-            </a:endParaRPr>
           </a:p>
         </p:txBody>
       </p:sp>
       <p:sp>
         <p:nvSpPr>
-          <p:cNvPr id="38" name="Rectangle 37">
-            <a:extLst>
-              <a:ext uri="{FF2B5EF4-FFF2-40B4-BE49-F238E27FC236}">
-                <a16:creationId xmlns:a16="http://schemas.microsoft.com/office/drawing/2014/main" id="{68D29E1E-0E39-FF0F-E884-F97E918FB502}"/>
-              </a:ext>
-            </a:extLst>
-          </p:cNvPr>
-          <p:cNvSpPr>
-            <a:spLocks noGrp="1"/>
-          </p:cNvSpPr>
+          <p:cNvPr id="41" name="Metrics Note"/>
+          <p:cNvSpPr txBox="1"/>
           <p:nvPr/>
         </p:nvSpPr>
         <p:spPr>
           <a:xfrm>
-            <a:off x="378493" y="12060529"/>
-            <a:ext cx="8634162" cy="1415841"/>
+            <a:off x="567570" y="16781180"/>
+            <a:ext cx="8324373" cy="378380"/>
           </a:xfrm>
           <a:prstGeom prst="rect">
             <a:avLst/>
           </a:prstGeom>
           <a:noFill/>
-          <a:ln w="0">
-            <a:noFill/>
-          </a:ln>
         </p:spPr>
         <p:txBody>
-          <a:bodyPr/>
-          <a:lstStyle>
-            <a:defPPr>
-              <a:defRPr sz="2550" b="0">
-                <a:solidFill>
-                  <a:srgbClr val="15354B"/>
-                </a:solidFill>
-                <a:latin typeface="Arial"/>
-                <a:ea typeface="Arial"/>
-                <a:cs typeface="Arial"/>
-              </a:defRPr>
-            </a:defPPr>
-          </a:lstStyle>
+          <a:bodyPr wrap="square" lIns="0" rIns="0" tIns="0" bIns="0" anchor="t">
+            <a:spAutoFit/>
+          </a:bodyPr>
+          <a:lstStyle/>
           <a:p>
-            <a:pPr>
-              <a:defRPr sz="2550" b="0">
-                <a:solidFill>
-                  <a:srgbClr val="15354B"/>
-                </a:solidFill>
-                <a:latin typeface="Arial"/>
-                <a:ea typeface="Arial"/>
-                <a:cs typeface="Arial"/>
-              </a:defRPr>
+            <a:pPr algn="l">
+              <a:lnSpc>
+                <a:spcPts val="1900"/>
+              </a:lnSpc>
             </a:pPr>
             <a:r>
-              <a:rPr lang="en-US" sz="2550" b="0" dirty="0">
+              <a:rPr sz="1550" b="0">
+                <a:solidFill>
+                  <a:srgbClr val="506575"/>
+                </a:solidFill>
+                <a:latin typeface="Arial"/>
+              </a:rPr>
+              <a:t>Reference front = non-dominated union of every route found by every method; objectives min–max normalised.</a:t>
+            </a:r>
+          </a:p>
+        </p:txBody>
+      </p:sp>
+      <p:graphicFrame>
+        <p:nvGraphicFramePr>
+          <p:cNvPr id="42" name="Evaluation Metrics Table"/>
+          <p:cNvGraphicFramePr>
+            <a:graphicFrameLocks noGrp="1"/>
+          </p:cNvGraphicFramePr>
+          <p:nvPr/>
+        </p:nvGraphicFramePr>
+        <p:xfrm>
+          <a:off x="567570" y="17405508"/>
+          <a:ext cx="8324372" cy="1986495"/>
+        </p:xfrm>
+        <a:graphic>
+          <a:graphicData uri="http://schemas.openxmlformats.org/drawingml/2006/table">
+            <a:tbl>
+              <a:tblPr firstRow="1" bandRow="0"/>
+              <a:tblGrid>
+                <a:gridCol w="1967579"/>
+                <a:gridCol w="4805433"/>
+                <a:gridCol w="1551360"/>
+              </a:tblGrid>
+              <a:tr h="283785">
+                <a:tc>
+                  <a:txBody>
+                    <a:bodyPr wrap="square"/>
+                    <a:lstStyle/>
+                    <a:p>
+                      <a:pPr algn="l"/>
+                      <a:r>
+                        <a:rPr sz="1350" b="1">
+                          <a:solidFill>
+                            <a:srgbClr val="FFFFFF"/>
+                          </a:solidFill>
+                          <a:latin typeface="Arial"/>
+                        </a:rPr>
+                        <a:t>Metric</a:t>
+                      </a:r>
+                    </a:p>
+                  </a:txBody>
+                  <a:tcPr marL="50800" marR="50800" marT="19050" marB="19050" anchor="ctr">
+                    <a:lnL w="9525" cmpd="sng">
+                      <a:solidFill>
+                        <a:srgbClr val="15354B"/>
+                      </a:solidFill>
+                    </a:lnL>
+                    <a:lnR w="9525" cmpd="sng">
+                      <a:solidFill>
+                        <a:srgbClr val="15354B"/>
+                      </a:solidFill>
+                    </a:lnR>
+                    <a:lnT w="9525" cmpd="sng">
+                      <a:solidFill>
+                        <a:srgbClr val="15354B"/>
+                      </a:solidFill>
+                    </a:lnT>
+                    <a:lnB w="9525" cmpd="sng">
+                      <a:solidFill>
+                        <a:srgbClr val="15354B"/>
+                      </a:solidFill>
+                    </a:lnB>
+                    <a:solidFill>
+                      <a:srgbClr val="15354B"/>
+                    </a:solidFill>
+                  </a:tcPr>
+                </a:tc>
+                <a:tc>
+                  <a:txBody>
+                    <a:bodyPr wrap="square"/>
+                    <a:lstStyle/>
+                    <a:p>
+                      <a:pPr algn="l"/>
+                      <a:r>
+                        <a:rPr sz="1350" b="1">
+                          <a:solidFill>
+                            <a:srgbClr val="FFFFFF"/>
+                          </a:solidFill>
+                          <a:latin typeface="Arial"/>
+                        </a:rPr>
+                        <a:t>What it measures</a:t>
+                      </a:r>
+                    </a:p>
+                  </a:txBody>
+                  <a:tcPr marL="50800" marR="50800" marT="19050" marB="19050" anchor="ctr">
+                    <a:lnL w="9525" cmpd="sng">
+                      <a:solidFill>
+                        <a:srgbClr val="15354B"/>
+                      </a:solidFill>
+                    </a:lnL>
+                    <a:lnR w="9525" cmpd="sng">
+                      <a:solidFill>
+                        <a:srgbClr val="15354B"/>
+                      </a:solidFill>
+                    </a:lnR>
+                    <a:lnT w="9525" cmpd="sng">
+                      <a:solidFill>
+                        <a:srgbClr val="15354B"/>
+                      </a:solidFill>
+                    </a:lnT>
+                    <a:lnB w="9525" cmpd="sng">
+                      <a:solidFill>
+                        <a:srgbClr val="15354B"/>
+                      </a:solidFill>
+                    </a:lnB>
+                    <a:solidFill>
+                      <a:srgbClr val="15354B"/>
+                    </a:solidFill>
+                  </a:tcPr>
+                </a:tc>
+                <a:tc>
+                  <a:txBody>
+                    <a:bodyPr wrap="square"/>
+                    <a:lstStyle/>
+                    <a:p>
+                      <a:pPr algn="ctr"/>
+                      <a:r>
+                        <a:rPr sz="1350" b="1">
+                          <a:solidFill>
+                            <a:srgbClr val="FFFFFF"/>
+                          </a:solidFill>
+                          <a:latin typeface="Arial"/>
+                        </a:rPr>
+                        <a:t>Better</a:t>
+                      </a:r>
+                    </a:p>
+                  </a:txBody>
+                  <a:tcPr marL="50800" marR="50800" marT="19050" marB="19050" anchor="ctr">
+                    <a:lnL w="9525" cmpd="sng">
+                      <a:solidFill>
+                        <a:srgbClr val="15354B"/>
+                      </a:solidFill>
+                    </a:lnL>
+                    <a:lnR w="9525" cmpd="sng">
+                      <a:solidFill>
+                        <a:srgbClr val="15354B"/>
+                      </a:solidFill>
+                    </a:lnR>
+                    <a:lnT w="9525" cmpd="sng">
+                      <a:solidFill>
+                        <a:srgbClr val="15354B"/>
+                      </a:solidFill>
+                    </a:lnT>
+                    <a:lnB w="9525" cmpd="sng">
+                      <a:solidFill>
+                        <a:srgbClr val="15354B"/>
+                      </a:solidFill>
+                    </a:lnB>
+                    <a:solidFill>
+                      <a:srgbClr val="15354B"/>
+                    </a:solidFill>
+                  </a:tcPr>
+                </a:tc>
+              </a:tr>
+              <a:tr h="283785">
+                <a:tc>
+                  <a:txBody>
+                    <a:bodyPr wrap="square"/>
+                    <a:lstStyle/>
+                    <a:p>
+                      <a:pPr algn="l"/>
+                      <a:r>
+                        <a:rPr sz="1350" b="1">
+                          <a:solidFill>
+                            <a:srgbClr val="15354B"/>
+                          </a:solidFill>
+                          <a:latin typeface="Arial"/>
+                        </a:rPr>
+                        <a:t>Hypervolume (HV)</a:t>
+                      </a:r>
+                    </a:p>
+                  </a:txBody>
+                  <a:tcPr marL="50800" marR="50800" marT="19050" marB="19050" anchor="ctr">
+                    <a:lnL w="9525" cmpd="sng">
+                      <a:solidFill>
+                        <a:srgbClr val="C9D3DB"/>
+                      </a:solidFill>
+                    </a:lnL>
+                    <a:lnR w="9525" cmpd="sng">
+                      <a:solidFill>
+                        <a:srgbClr val="C9D3DB"/>
+                      </a:solidFill>
+                    </a:lnR>
+                    <a:lnT w="9525" cmpd="sng">
+                      <a:solidFill>
+                        <a:srgbClr val="C9D3DB"/>
+                      </a:solidFill>
+                    </a:lnT>
+                    <a:lnB w="9525" cmpd="sng">
+                      <a:solidFill>
+                        <a:srgbClr val="C9D3DB"/>
+                      </a:solidFill>
+                    </a:lnB>
+                    <a:solidFill>
+                      <a:srgbClr val="FFFFFF"/>
+                    </a:solidFill>
+                  </a:tcPr>
+                </a:tc>
+                <a:tc>
+                  <a:txBody>
+                    <a:bodyPr wrap="square"/>
+                    <a:lstStyle/>
+                    <a:p>
+                      <a:pPr algn="l"/>
+                      <a:r>
+                        <a:rPr sz="1350" b="0">
+                          <a:solidFill>
+                            <a:srgbClr val="15354B"/>
+                          </a:solidFill>
+                          <a:latin typeface="Arial"/>
+                        </a:rPr>
+                        <a:t>Objective space the front dominates, up to reference point [1.1, 1.1, 1.1]</a:t>
+                      </a:r>
+                    </a:p>
+                  </a:txBody>
+                  <a:tcPr marL="50800" marR="50800" marT="19050" marB="19050" anchor="ctr">
+                    <a:lnL w="9525" cmpd="sng">
+                      <a:solidFill>
+                        <a:srgbClr val="C9D3DB"/>
+                      </a:solidFill>
+                    </a:lnL>
+                    <a:lnR w="9525" cmpd="sng">
+                      <a:solidFill>
+                        <a:srgbClr val="C9D3DB"/>
+                      </a:solidFill>
+                    </a:lnR>
+                    <a:lnT w="9525" cmpd="sng">
+                      <a:solidFill>
+                        <a:srgbClr val="C9D3DB"/>
+                      </a:solidFill>
+                    </a:lnT>
+                    <a:lnB w="9525" cmpd="sng">
+                      <a:solidFill>
+                        <a:srgbClr val="C9D3DB"/>
+                      </a:solidFill>
+                    </a:lnB>
+                    <a:solidFill>
+                      <a:srgbClr val="FFFFFF"/>
+                    </a:solidFill>
+                  </a:tcPr>
+                </a:tc>
+                <a:tc>
+                  <a:txBody>
+                    <a:bodyPr wrap="square"/>
+                    <a:lstStyle/>
+                    <a:p>
+                      <a:pPr algn="ctr"/>
+                      <a:r>
+                        <a:rPr sz="1350" b="0">
+                          <a:solidFill>
+                            <a:srgbClr val="15354B"/>
+                          </a:solidFill>
+                          <a:latin typeface="Arial"/>
+                        </a:rPr>
+                        <a:t>Higher</a:t>
+                      </a:r>
+                    </a:p>
+                  </a:txBody>
+                  <a:tcPr marL="50800" marR="50800" marT="19050" marB="19050" anchor="ctr">
+                    <a:lnL w="9525" cmpd="sng">
+                      <a:solidFill>
+                        <a:srgbClr val="C9D3DB"/>
+                      </a:solidFill>
+                    </a:lnL>
+                    <a:lnR w="9525" cmpd="sng">
+                      <a:solidFill>
+                        <a:srgbClr val="C9D3DB"/>
+                      </a:solidFill>
+                    </a:lnR>
+                    <a:lnT w="9525" cmpd="sng">
+                      <a:solidFill>
+                        <a:srgbClr val="C9D3DB"/>
+                      </a:solidFill>
+                    </a:lnT>
+                    <a:lnB w="9525" cmpd="sng">
+                      <a:solidFill>
+                        <a:srgbClr val="C9D3DB"/>
+                      </a:solidFill>
+                    </a:lnB>
+                    <a:solidFill>
+                      <a:srgbClr val="FFFFFF"/>
+                    </a:solidFill>
+                  </a:tcPr>
+                </a:tc>
+              </a:tr>
+              <a:tr h="283785">
+                <a:tc>
+                  <a:txBody>
+                    <a:bodyPr wrap="square"/>
+                    <a:lstStyle/>
+                    <a:p>
+                      <a:pPr algn="l"/>
+                      <a:r>
+                        <a:rPr sz="1350" b="1">
+                          <a:solidFill>
+                            <a:srgbClr val="15354B"/>
+                          </a:solidFill>
+                          <a:latin typeface="Arial"/>
+                        </a:rPr>
+                        <a:t>IGD</a:t>
+                      </a:r>
+                    </a:p>
+                  </a:txBody>
+                  <a:tcPr marL="50800" marR="50800" marT="19050" marB="19050" anchor="ctr">
+                    <a:lnL w="9525" cmpd="sng">
+                      <a:solidFill>
+                        <a:srgbClr val="C9D3DB"/>
+                      </a:solidFill>
+                    </a:lnL>
+                    <a:lnR w="9525" cmpd="sng">
+                      <a:solidFill>
+                        <a:srgbClr val="C9D3DB"/>
+                      </a:solidFill>
+                    </a:lnR>
+                    <a:lnT w="9525" cmpd="sng">
+                      <a:solidFill>
+                        <a:srgbClr val="C9D3DB"/>
+                      </a:solidFill>
+                    </a:lnT>
+                    <a:lnB w="9525" cmpd="sng">
+                      <a:solidFill>
+                        <a:srgbClr val="C9D3DB"/>
+                      </a:solidFill>
+                    </a:lnB>
+                    <a:solidFill>
+                      <a:srgbClr val="F5F8FA"/>
+                    </a:solidFill>
+                  </a:tcPr>
+                </a:tc>
+                <a:tc>
+                  <a:txBody>
+                    <a:bodyPr wrap="square"/>
+                    <a:lstStyle/>
+                    <a:p>
+                      <a:pPr algn="l"/>
+                      <a:r>
+                        <a:rPr sz="1350" b="0">
+                          <a:solidFill>
+                            <a:srgbClr val="15354B"/>
+                          </a:solidFill>
+                          <a:latin typeface="Arial"/>
+                        </a:rPr>
+                        <a:t>Mean distance from each reference route to the nearest found route</a:t>
+                      </a:r>
+                    </a:p>
+                  </a:txBody>
+                  <a:tcPr marL="50800" marR="50800" marT="19050" marB="19050" anchor="ctr">
+                    <a:lnL w="9525" cmpd="sng">
+                      <a:solidFill>
+                        <a:srgbClr val="C9D3DB"/>
+                      </a:solidFill>
+                    </a:lnL>
+                    <a:lnR w="9525" cmpd="sng">
+                      <a:solidFill>
+                        <a:srgbClr val="C9D3DB"/>
+                      </a:solidFill>
+                    </a:lnR>
+                    <a:lnT w="9525" cmpd="sng">
+                      <a:solidFill>
+                        <a:srgbClr val="C9D3DB"/>
+                      </a:solidFill>
+                    </a:lnT>
+                    <a:lnB w="9525" cmpd="sng">
+                      <a:solidFill>
+                        <a:srgbClr val="C9D3DB"/>
+                      </a:solidFill>
+                    </a:lnB>
+                    <a:solidFill>
+                      <a:srgbClr val="F5F8FA"/>
+                    </a:solidFill>
+                  </a:tcPr>
+                </a:tc>
+                <a:tc>
+                  <a:txBody>
+                    <a:bodyPr wrap="square"/>
+                    <a:lstStyle/>
+                    <a:p>
+                      <a:pPr algn="ctr"/>
+                      <a:r>
+                        <a:rPr sz="1350" b="0">
+                          <a:solidFill>
+                            <a:srgbClr val="15354B"/>
+                          </a:solidFill>
+                          <a:latin typeface="Arial"/>
+                        </a:rPr>
+                        <a:t>Lower; 0 = exact</a:t>
+                      </a:r>
+                    </a:p>
+                  </a:txBody>
+                  <a:tcPr marL="50800" marR="50800" marT="19050" marB="19050" anchor="ctr">
+                    <a:lnL w="9525" cmpd="sng">
+                      <a:solidFill>
+                        <a:srgbClr val="C9D3DB"/>
+                      </a:solidFill>
+                    </a:lnL>
+                    <a:lnR w="9525" cmpd="sng">
+                      <a:solidFill>
+                        <a:srgbClr val="C9D3DB"/>
+                      </a:solidFill>
+                    </a:lnR>
+                    <a:lnT w="9525" cmpd="sng">
+                      <a:solidFill>
+                        <a:srgbClr val="C9D3DB"/>
+                      </a:solidFill>
+                    </a:lnT>
+                    <a:lnB w="9525" cmpd="sng">
+                      <a:solidFill>
+                        <a:srgbClr val="C9D3DB"/>
+                      </a:solidFill>
+                    </a:lnB>
+                    <a:solidFill>
+                      <a:srgbClr val="F5F8FA"/>
+                    </a:solidFill>
+                  </a:tcPr>
+                </a:tc>
+              </a:tr>
+              <a:tr h="283785">
+                <a:tc>
+                  <a:txBody>
+                    <a:bodyPr wrap="square"/>
+                    <a:lstStyle/>
+                    <a:p>
+                      <a:pPr algn="l"/>
+                      <a:r>
+                        <a:rPr sz="1350" b="1">
+                          <a:solidFill>
+                            <a:srgbClr val="15354B"/>
+                          </a:solidFill>
+                          <a:latin typeface="Arial"/>
+                        </a:rPr>
+                        <a:t>Spread Δ</a:t>
+                      </a:r>
+                    </a:p>
+                  </a:txBody>
+                  <a:tcPr marL="50800" marR="50800" marT="19050" marB="19050" anchor="ctr">
+                    <a:lnL w="9525" cmpd="sng">
+                      <a:solidFill>
+                        <a:srgbClr val="C9D3DB"/>
+                      </a:solidFill>
+                    </a:lnL>
+                    <a:lnR w="9525" cmpd="sng">
+                      <a:solidFill>
+                        <a:srgbClr val="C9D3DB"/>
+                      </a:solidFill>
+                    </a:lnR>
+                    <a:lnT w="9525" cmpd="sng">
+                      <a:solidFill>
+                        <a:srgbClr val="C9D3DB"/>
+                      </a:solidFill>
+                    </a:lnT>
+                    <a:lnB w="9525" cmpd="sng">
+                      <a:solidFill>
+                        <a:srgbClr val="C9D3DB"/>
+                      </a:solidFill>
+                    </a:lnB>
+                    <a:solidFill>
+                      <a:srgbClr val="FFFFFF"/>
+                    </a:solidFill>
+                  </a:tcPr>
+                </a:tc>
+                <a:tc>
+                  <a:txBody>
+                    <a:bodyPr wrap="square"/>
+                    <a:lstStyle/>
+                    <a:p>
+                      <a:pPr algn="l"/>
+                      <a:r>
+                        <a:rPr sz="1350" b="0">
+                          <a:solidFill>
+                            <a:srgbClr val="15354B"/>
+                          </a:solidFill>
+                          <a:latin typeface="Arial"/>
+                        </a:rPr>
+                        <a:t>How evenly the routes cover the front out to its extremes</a:t>
+                      </a:r>
+                    </a:p>
+                  </a:txBody>
+                  <a:tcPr marL="50800" marR="50800" marT="19050" marB="19050" anchor="ctr">
+                    <a:lnL w="9525" cmpd="sng">
+                      <a:solidFill>
+                        <a:srgbClr val="C9D3DB"/>
+                      </a:solidFill>
+                    </a:lnL>
+                    <a:lnR w="9525" cmpd="sng">
+                      <a:solidFill>
+                        <a:srgbClr val="C9D3DB"/>
+                      </a:solidFill>
+                    </a:lnR>
+                    <a:lnT w="9525" cmpd="sng">
+                      <a:solidFill>
+                        <a:srgbClr val="C9D3DB"/>
+                      </a:solidFill>
+                    </a:lnT>
+                    <a:lnB w="9525" cmpd="sng">
+                      <a:solidFill>
+                        <a:srgbClr val="C9D3DB"/>
+                      </a:solidFill>
+                    </a:lnB>
+                    <a:solidFill>
+                      <a:srgbClr val="FFFFFF"/>
+                    </a:solidFill>
+                  </a:tcPr>
+                </a:tc>
+                <a:tc>
+                  <a:txBody>
+                    <a:bodyPr wrap="square"/>
+                    <a:lstStyle/>
+                    <a:p>
+                      <a:pPr algn="ctr"/>
+                      <a:r>
+                        <a:rPr sz="1350" b="0">
+                          <a:solidFill>
+                            <a:srgbClr val="15354B"/>
+                          </a:solidFill>
+                          <a:latin typeface="Arial"/>
+                        </a:rPr>
+                        <a:t>Lower</a:t>
+                      </a:r>
+                    </a:p>
+                  </a:txBody>
+                  <a:tcPr marL="50800" marR="50800" marT="19050" marB="19050" anchor="ctr">
+                    <a:lnL w="9525" cmpd="sng">
+                      <a:solidFill>
+                        <a:srgbClr val="C9D3DB"/>
+                      </a:solidFill>
+                    </a:lnL>
+                    <a:lnR w="9525" cmpd="sng">
+                      <a:solidFill>
+                        <a:srgbClr val="C9D3DB"/>
+                      </a:solidFill>
+                    </a:lnR>
+                    <a:lnT w="9525" cmpd="sng">
+                      <a:solidFill>
+                        <a:srgbClr val="C9D3DB"/>
+                      </a:solidFill>
+                    </a:lnT>
+                    <a:lnB w="9525" cmpd="sng">
+                      <a:solidFill>
+                        <a:srgbClr val="C9D3DB"/>
+                      </a:solidFill>
+                    </a:lnB>
+                    <a:solidFill>
+                      <a:srgbClr val="FFFFFF"/>
+                    </a:solidFill>
+                  </a:tcPr>
+                </a:tc>
+              </a:tr>
+              <a:tr h="283785">
+                <a:tc>
+                  <a:txBody>
+                    <a:bodyPr wrap="square"/>
+                    <a:lstStyle/>
+                    <a:p>
+                      <a:pPr algn="l"/>
+                      <a:r>
+                        <a:rPr sz="1350" b="1">
+                          <a:solidFill>
+                            <a:srgbClr val="15354B"/>
+                          </a:solidFill>
+                          <a:latin typeface="Arial"/>
+                        </a:rPr>
+                        <a:t>Alignment A</a:t>
+                      </a:r>
+                    </a:p>
+                  </a:txBody>
+                  <a:tcPr marL="50800" marR="50800" marT="19050" marB="19050" anchor="ctr">
+                    <a:lnL w="9525" cmpd="sng">
+                      <a:solidFill>
+                        <a:srgbClr val="C9D3DB"/>
+                      </a:solidFill>
+                    </a:lnL>
+                    <a:lnR w="9525" cmpd="sng">
+                      <a:solidFill>
+                        <a:srgbClr val="C9D3DB"/>
+                      </a:solidFill>
+                    </a:lnR>
+                    <a:lnT w="9525" cmpd="sng">
+                      <a:solidFill>
+                        <a:srgbClr val="C9D3DB"/>
+                      </a:solidFill>
+                    </a:lnT>
+                    <a:lnB w="9525" cmpd="sng">
+                      <a:solidFill>
+                        <a:srgbClr val="C9D3DB"/>
+                      </a:solidFill>
+                    </a:lnB>
+                    <a:solidFill>
+                      <a:srgbClr val="F5F8FA"/>
+                    </a:solidFill>
+                  </a:tcPr>
+                </a:tc>
+                <a:tc>
+                  <a:txBody>
+                    <a:bodyPr wrap="square"/>
+                    <a:lstStyle/>
+                    <a:p>
+                      <a:pPr algn="l"/>
+                      <a:r>
+                        <a:rPr sz="1350" b="0">
+                          <a:solidFill>
+                            <a:srgbClr val="15354B"/>
+                          </a:solidFill>
+                          <a:latin typeface="Arial"/>
+                        </a:rPr>
+                        <a:t>Σ w_k (1 − (rank_k − 1)/(K − 1)): rank-based fit of a pick to its weights</a:t>
+                      </a:r>
+                    </a:p>
+                  </a:txBody>
+                  <a:tcPr marL="50800" marR="50800" marT="19050" marB="19050" anchor="ctr">
+                    <a:lnL w="9525" cmpd="sng">
+                      <a:solidFill>
+                        <a:srgbClr val="C9D3DB"/>
+                      </a:solidFill>
+                    </a:lnL>
+                    <a:lnR w="9525" cmpd="sng">
+                      <a:solidFill>
+                        <a:srgbClr val="C9D3DB"/>
+                      </a:solidFill>
+                    </a:lnR>
+                    <a:lnT w="9525" cmpd="sng">
+                      <a:solidFill>
+                        <a:srgbClr val="C9D3DB"/>
+                      </a:solidFill>
+                    </a:lnT>
+                    <a:lnB w="9525" cmpd="sng">
+                      <a:solidFill>
+                        <a:srgbClr val="C9D3DB"/>
+                      </a:solidFill>
+                    </a:lnB>
+                    <a:solidFill>
+                      <a:srgbClr val="F5F8FA"/>
+                    </a:solidFill>
+                  </a:tcPr>
+                </a:tc>
+                <a:tc>
+                  <a:txBody>
+                    <a:bodyPr wrap="square"/>
+                    <a:lstStyle/>
+                    <a:p>
+                      <a:pPr algn="ctr"/>
+                      <a:r>
+                        <a:rPr sz="1350" b="0">
+                          <a:solidFill>
+                            <a:srgbClr val="15354B"/>
+                          </a:solidFill>
+                          <a:latin typeface="Arial"/>
+                        </a:rPr>
+                        <a:t>Higher</a:t>
+                      </a:r>
+                    </a:p>
+                  </a:txBody>
+                  <a:tcPr marL="50800" marR="50800" marT="19050" marB="19050" anchor="ctr">
+                    <a:lnL w="9525" cmpd="sng">
+                      <a:solidFill>
+                        <a:srgbClr val="C9D3DB"/>
+                      </a:solidFill>
+                    </a:lnL>
+                    <a:lnR w="9525" cmpd="sng">
+                      <a:solidFill>
+                        <a:srgbClr val="C9D3DB"/>
+                      </a:solidFill>
+                    </a:lnR>
+                    <a:lnT w="9525" cmpd="sng">
+                      <a:solidFill>
+                        <a:srgbClr val="C9D3DB"/>
+                      </a:solidFill>
+                    </a:lnT>
+                    <a:lnB w="9525" cmpd="sng">
+                      <a:solidFill>
+                        <a:srgbClr val="C9D3DB"/>
+                      </a:solidFill>
+                    </a:lnB>
+                    <a:solidFill>
+                      <a:srgbClr val="F5F8FA"/>
+                    </a:solidFill>
+                  </a:tcPr>
+                </a:tc>
+              </a:tr>
+              <a:tr h="283785">
+                <a:tc>
+                  <a:txBody>
+                    <a:bodyPr wrap="square"/>
+                    <a:lstStyle/>
+                    <a:p>
+                      <a:pPr algn="l"/>
+                      <a:r>
+                        <a:rPr sz="1350" b="1">
+                          <a:solidFill>
+                            <a:srgbClr val="15354B"/>
+                          </a:solidFill>
+                          <a:latin typeface="Arial"/>
+                        </a:rPr>
+                        <a:t>Latency / monotonicity</a:t>
+                      </a:r>
+                    </a:p>
+                  </a:txBody>
+                  <a:tcPr marL="50800" marR="50800" marT="19050" marB="19050" anchor="ctr">
+                    <a:lnL w="9525" cmpd="sng">
+                      <a:solidFill>
+                        <a:srgbClr val="C9D3DB"/>
+                      </a:solidFill>
+                    </a:lnL>
+                    <a:lnR w="9525" cmpd="sng">
+                      <a:solidFill>
+                        <a:srgbClr val="C9D3DB"/>
+                      </a:solidFill>
+                    </a:lnR>
+                    <a:lnT w="9525" cmpd="sng">
+                      <a:solidFill>
+                        <a:srgbClr val="C9D3DB"/>
+                      </a:solidFill>
+                    </a:lnT>
+                    <a:lnB w="9525" cmpd="sng">
+                      <a:solidFill>
+                        <a:srgbClr val="C9D3DB"/>
+                      </a:solidFill>
+                    </a:lnB>
+                    <a:solidFill>
+                      <a:srgbClr val="FFFFFF"/>
+                    </a:solidFill>
+                  </a:tcPr>
+                </a:tc>
+                <a:tc>
+                  <a:txBody>
+                    <a:bodyPr wrap="square"/>
+                    <a:lstStyle/>
+                    <a:p>
+                      <a:pPr algn="l"/>
+                      <a:r>
+                        <a:rPr sz="1350" b="0">
+                          <a:solidFill>
+                            <a:srgbClr val="15354B"/>
+                          </a:solidFill>
+                          <a:latin typeface="Arial"/>
+                        </a:rPr>
+                        <a:t>Tier 2 time per pick; raising F, U or W never raises risk, distance or energy (225 tags)</a:t>
+                      </a:r>
+                    </a:p>
+                  </a:txBody>
+                  <a:tcPr marL="50800" marR="50800" marT="19050" marB="19050" anchor="ctr">
+                    <a:lnL w="9525" cmpd="sng">
+                      <a:solidFill>
+                        <a:srgbClr val="C9D3DB"/>
+                      </a:solidFill>
+                    </a:lnL>
+                    <a:lnR w="9525" cmpd="sng">
+                      <a:solidFill>
+                        <a:srgbClr val="C9D3DB"/>
+                      </a:solidFill>
+                    </a:lnR>
+                    <a:lnT w="9525" cmpd="sng">
+                      <a:solidFill>
+                        <a:srgbClr val="C9D3DB"/>
+                      </a:solidFill>
+                    </a:lnT>
+                    <a:lnB w="9525" cmpd="sng">
+                      <a:solidFill>
+                        <a:srgbClr val="C9D3DB"/>
+                      </a:solidFill>
+                    </a:lnB>
+                    <a:solidFill>
+                      <a:srgbClr val="FFFFFF"/>
+                    </a:solidFill>
+                  </a:tcPr>
+                </a:tc>
+                <a:tc>
+                  <a:txBody>
+                    <a:bodyPr wrap="square"/>
+                    <a:lstStyle/>
+                    <a:p>
+                      <a:pPr algn="ctr"/>
+                      <a:r>
+                        <a:rPr sz="1350" b="0">
+                          <a:solidFill>
+                            <a:srgbClr val="15354B"/>
+                          </a:solidFill>
+                          <a:latin typeface="Arial"/>
+                        </a:rPr>
+                        <a:t>&lt; 1 s; 0 violations</a:t>
+                      </a:r>
+                    </a:p>
+                  </a:txBody>
+                  <a:tcPr marL="50800" marR="50800" marT="19050" marB="19050" anchor="ctr">
+                    <a:lnL w="9525" cmpd="sng">
+                      <a:solidFill>
+                        <a:srgbClr val="C9D3DB"/>
+                      </a:solidFill>
+                    </a:lnL>
+                    <a:lnR w="9525" cmpd="sng">
+                      <a:solidFill>
+                        <a:srgbClr val="C9D3DB"/>
+                      </a:solidFill>
+                    </a:lnR>
+                    <a:lnT w="9525" cmpd="sng">
+                      <a:solidFill>
+                        <a:srgbClr val="C9D3DB"/>
+                      </a:solidFill>
+                    </a:lnT>
+                    <a:lnB w="9525" cmpd="sng">
+                      <a:solidFill>
+                        <a:srgbClr val="C9D3DB"/>
+                      </a:solidFill>
+                    </a:lnB>
+                    <a:solidFill>
+                      <a:srgbClr val="FFFFFF"/>
+                    </a:solidFill>
+                  </a:tcPr>
+                </a:tc>
+              </a:tr>
+              <a:tr h="283785">
+                <a:tc>
+                  <a:txBody>
+                    <a:bodyPr wrap="square"/>
+                    <a:lstStyle/>
+                    <a:p>
+                      <a:pPr algn="l"/>
+                      <a:r>
+                        <a:rPr sz="1350" b="1">
+                          <a:solidFill>
+                            <a:srgbClr val="15354B"/>
+                          </a:solidFill>
+                          <a:latin typeface="Arial"/>
+                        </a:rPr>
+                        <a:t>Cross-track RMS / landing offset</a:t>
+                      </a:r>
+                    </a:p>
+                  </a:txBody>
+                  <a:tcPr marL="50800" marR="50800" marT="19050" marB="19050" anchor="ctr">
+                    <a:lnL w="9525" cmpd="sng">
+                      <a:solidFill>
+                        <a:srgbClr val="C9D3DB"/>
+                      </a:solidFill>
+                    </a:lnL>
+                    <a:lnR w="9525" cmpd="sng">
+                      <a:solidFill>
+                        <a:srgbClr val="C9D3DB"/>
+                      </a:solidFill>
+                    </a:lnR>
+                    <a:lnT w="9525" cmpd="sng">
+                      <a:solidFill>
+                        <a:srgbClr val="C9D3DB"/>
+                      </a:solidFill>
+                    </a:lnT>
+                    <a:lnB w="9525" cmpd="sng">
+                      <a:solidFill>
+                        <a:srgbClr val="C9D3DB"/>
+                      </a:solidFill>
+                    </a:lnB>
+                    <a:solidFill>
+                      <a:srgbClr val="F5F8FA"/>
+                    </a:solidFill>
+                  </a:tcPr>
+                </a:tc>
+                <a:tc>
+                  <a:txBody>
+                    <a:bodyPr wrap="square"/>
+                    <a:lstStyle/>
+                    <a:p>
+                      <a:pPr algn="l"/>
+                      <a:r>
+                        <a:rPr sz="1350" b="0">
+                          <a:solidFill>
+                            <a:srgbClr val="15354B"/>
+                          </a:solidFill>
+                          <a:latin typeface="Arial"/>
+                        </a:rPr>
+                        <a:t>Flown SITL track vs planned route; touchdown distance from the pad</a:t>
+                      </a:r>
+                    </a:p>
+                  </a:txBody>
+                  <a:tcPr marL="50800" marR="50800" marT="19050" marB="19050" anchor="ctr">
+                    <a:lnL w="9525" cmpd="sng">
+                      <a:solidFill>
+                        <a:srgbClr val="C9D3DB"/>
+                      </a:solidFill>
+                    </a:lnL>
+                    <a:lnR w="9525" cmpd="sng">
+                      <a:solidFill>
+                        <a:srgbClr val="C9D3DB"/>
+                      </a:solidFill>
+                    </a:lnR>
+                    <a:lnT w="9525" cmpd="sng">
+                      <a:solidFill>
+                        <a:srgbClr val="C9D3DB"/>
+                      </a:solidFill>
+                    </a:lnT>
+                    <a:lnB w="9525" cmpd="sng">
+                      <a:solidFill>
+                        <a:srgbClr val="C9D3DB"/>
+                      </a:solidFill>
+                    </a:lnB>
+                    <a:solidFill>
+                      <a:srgbClr val="F5F8FA"/>
+                    </a:solidFill>
+                  </a:tcPr>
+                </a:tc>
+                <a:tc>
+                  <a:txBody>
+                    <a:bodyPr wrap="square"/>
+                    <a:lstStyle/>
+                    <a:p>
+                      <a:pPr algn="ctr"/>
+                      <a:r>
+                        <a:rPr sz="1350" b="0">
+                          <a:solidFill>
+                            <a:srgbClr val="15354B"/>
+                          </a:solidFill>
+                          <a:latin typeface="Arial"/>
+                        </a:rPr>
+                        <a:t>Lower (m)</a:t>
+                      </a:r>
+                    </a:p>
+                  </a:txBody>
+                  <a:tcPr marL="50800" marR="50800" marT="19050" marB="19050" anchor="ctr">
+                    <a:lnL w="9525" cmpd="sng">
+                      <a:solidFill>
+                        <a:srgbClr val="C9D3DB"/>
+                      </a:solidFill>
+                    </a:lnL>
+                    <a:lnR w="9525" cmpd="sng">
+                      <a:solidFill>
+                        <a:srgbClr val="C9D3DB"/>
+                      </a:solidFill>
+                    </a:lnR>
+                    <a:lnT w="9525" cmpd="sng">
+                      <a:solidFill>
+                        <a:srgbClr val="C9D3DB"/>
+                      </a:solidFill>
+                    </a:lnT>
+                    <a:lnB w="9525" cmpd="sng">
+                      <a:solidFill>
+                        <a:srgbClr val="C9D3DB"/>
+                      </a:solidFill>
+                    </a:lnB>
+                    <a:solidFill>
+                      <a:srgbClr val="F5F8FA"/>
+                    </a:solidFill>
+                  </a:tcPr>
+                </a:tc>
+              </a:tr>
+            </a:tbl>
+          </a:graphicData>
+        </a:graphic>
+      </p:graphicFrame>
+      <p:sp>
+        <p:nvSpPr>
+          <p:cNvPr id="43" name="Methodology Panel"/>
+          <p:cNvSpPr/>
+          <p:nvPr/>
+        </p:nvSpPr>
+        <p:spPr>
+          <a:xfrm>
+            <a:off x="9213568" y="4975705"/>
+            <a:ext cx="10518981" cy="8740592"/>
+          </a:xfrm>
+          <a:prstGeom prst="rect">
+            <a:avLst/>
+          </a:prstGeom>
+          <a:solidFill>
+            <a:srgbClr val="F5F8FA"/>
+          </a:solidFill>
+          <a:ln w="12700">
+            <a:solidFill>
+              <a:srgbClr val="D5DEE5"/>
+            </a:solidFill>
+          </a:ln>
+          <a:effectLst/>
+        </p:spPr>
+        <p:style>
+          <a:lnRef idx="1">
+            <a:schemeClr val="accent1"/>
+          </a:lnRef>
+          <a:fillRef idx="3">
+            <a:schemeClr val="accent1"/>
+          </a:fillRef>
+          <a:effectRef idx="2">
+            <a:schemeClr val="accent1"/>
+          </a:effectRef>
+          <a:fontRef idx="minor">
+            <a:schemeClr val="lt1"/>
+          </a:fontRef>
+        </p:style>
+        <p:txBody>
+          <a:bodyPr rtlCol="0" anchor="ctr"/>
+          <a:lstStyle/>
+          <a:p/>
+        </p:txBody>
+      </p:sp>
+      <p:pic>
+        <p:nvPicPr>
+          <p:cNvPr id="44" name="Methodology Diagram" descr="9cbba388-methodology.png"/>
+          <p:cNvPicPr>
+            <a:picLocks noChangeAspect="1"/>
+          </p:cNvPicPr>
+          <p:nvPr/>
+        </p:nvPicPr>
+        <p:blipFill>
+          <a:blip r:embed="rId4"/>
+          <a:stretch>
+            <a:fillRect/>
+          </a:stretch>
+        </p:blipFill>
+        <p:spPr>
+          <a:xfrm>
+            <a:off x="9327082" y="5070300"/>
+            <a:ext cx="10291953" cy="5788500"/>
+          </a:xfrm>
+          <a:prstGeom prst="rect">
+            <a:avLst/>
+          </a:prstGeom>
+        </p:spPr>
+      </p:pic>
+      <p:sp>
+        <p:nvSpPr>
+          <p:cNvPr id="45" name="Methodology Explanation"/>
+          <p:cNvSpPr txBox="1"/>
+          <p:nvPr/>
+        </p:nvSpPr>
+        <p:spPr>
+          <a:xfrm>
+            <a:off x="9383839" y="10954119"/>
+            <a:ext cx="10178438" cy="2743259"/>
+          </a:xfrm>
+          <a:prstGeom prst="rect">
+            <a:avLst/>
+          </a:prstGeom>
+          <a:noFill/>
+        </p:spPr>
+        <p:txBody>
+          <a:bodyPr wrap="square" lIns="0" rIns="0" tIns="0" bIns="0" anchor="t">
+            <a:spAutoFit/>
+          </a:bodyPr>
+          <a:lstStyle/>
+          <a:p>
+            <a:pPr algn="l">
+              <a:lnSpc>
+                <a:spcPts val="2150"/>
+              </a:lnSpc>
+            </a:pPr>
+            <a:r>
+              <a:rPr sz="1750" b="1">
+                <a:solidFill>
+                  <a:srgbClr val="087F8C"/>
+                </a:solidFill>
+                <a:latin typeface="Arial"/>
+              </a:rPr>
+              <a:t>Tier 1 (once per region and weather window): </a:t>
+            </a:r>
+            <a:r>
+              <a:rPr sz="1750" b="0">
                 <a:solidFill>
                   <a:srgbClr val="15354B"/>
                 </a:solidFill>
                 <a:latin typeface="Arial"/>
-                <a:ea typeface="Arial"/>
-                <a:cs typeface="Arial"/>
               </a:rPr>
-              <a:t>***Related work summary table – only the 5 research papers related to your problem statement.</a:t>
+              <a:t>every edge gets a cost vector [distance, wind-aware energy, 11-component risk]; NAMOA* finds all non-dominated routes and stores the front with its weather snapshot and expiry.</a:t>
             </a:r>
           </a:p>
           <a:p>
-            <a:pPr>
-              <a:defRPr sz="2550" b="0">
+            <a:pPr algn="l">
+              <a:lnSpc>
+                <a:spcPts val="2150"/>
+              </a:lnSpc>
+              <a:spcBef>
+                <a:spcPts val="300"/>
+              </a:spcBef>
+            </a:pPr>
+            <a:r>
+              <a:rPr sz="1750" b="1">
+                <a:solidFill>
+                  <a:srgbClr val="087F8C"/>
+                </a:solidFill>
+                <a:latin typeface="Arial"/>
+              </a:rPr>
+              <a:t>Tier 2 (per mission, &lt;1 s): </a:t>
+            </a:r>
+            <a:r>
+              <a:rPr sz="1750" b="0">
                 <a:solidFill>
                   <a:srgbClr val="15354B"/>
                 </a:solidFill>
                 <a:latin typeface="Arial"/>
-                <a:ea typeface="Arial"/>
-                <a:cs typeface="Arial"/>
-              </a:defRPr>
-            </a:pPr>
-            <a:endParaRPr lang="en-US" sz="2550" b="0" dirty="0">
-              <a:solidFill>
-                <a:srgbClr val="15354B"/>
-              </a:solidFill>
-              <a:latin typeface="Arial"/>
-              <a:ea typeface="Arial"/>
-              <a:cs typeface="Arial"/>
-            </a:endParaRPr>
+              </a:rPr>
+              <a:t>w_risk = 2F/S, w_dist = 3U/S, w_energy = 2W/S, S = 2F + 3U + 2W (P ≥ 4 boosts the largest weight by 10%); score(p) = Σ w_k (1 − normalised objective_k); route = argmax over the battery-feasible front, else HOLD.</a:t>
+            </a:r>
           </a:p>
           <a:p>
-            <a:pPr>
-              <a:defRPr sz="2550" b="0">
+            <a:pPr algn="l">
+              <a:lnSpc>
+                <a:spcPts val="2150"/>
+              </a:lnSpc>
+              <a:spcBef>
+                <a:spcPts val="300"/>
+              </a:spcBef>
+            </a:pPr>
+            <a:r>
+              <a:rPr sz="1750" b="1">
+                <a:solidFill>
+                  <a:srgbClr val="087F8C"/>
+                </a:solidFill>
+                <a:latin typeface="Arial"/>
+              </a:rPr>
+              <a:t>Output &amp; evaluation: </a:t>
+            </a:r>
+            <a:r>
+              <a:rPr sz="1750" b="0">
                 <a:solidFill>
                   <a:srgbClr val="15354B"/>
                 </a:solidFill>
                 <a:latin typeface="Arial"/>
-                <a:ea typeface="Arial"/>
-                <a:cs typeface="Arial"/>
-              </a:defRPr>
+              </a:rPr>
+              <a:t>the route is exported as a QGC WPL 110 / .plan mission, uploaded over MAVLink and flown in ArduPilot SITL + Gazebo; Module 5 scores every run with the metrics on the left.</a:t>
+            </a:r>
+          </a:p>
+        </p:txBody>
+      </p:sp>
+      <p:sp>
+        <p:nvSpPr>
+          <p:cNvPr id="46" name="Modules and Dataset Text"/>
+          <p:cNvSpPr txBox="1"/>
+          <p:nvPr/>
+        </p:nvSpPr>
+        <p:spPr>
+          <a:xfrm>
+            <a:off x="9289244" y="14586573"/>
+            <a:ext cx="10443305" cy="6243280"/>
+          </a:xfrm>
+          <a:prstGeom prst="rect">
+            <a:avLst/>
+          </a:prstGeom>
+          <a:noFill/>
+        </p:spPr>
+        <p:txBody>
+          <a:bodyPr wrap="square" lIns="0" rIns="0" tIns="0" bIns="0" anchor="t">
+            <a:spAutoFit/>
+          </a:bodyPr>
+          <a:lstStyle/>
+          <a:p>
+            <a:pPr algn="l">
+              <a:lnSpc>
+                <a:spcPts val="2600"/>
+              </a:lnSpc>
+              <a:spcBef>
+                <a:spcPts val="400"/>
+              </a:spcBef>
             </a:pPr>
-            <a:endParaRPr lang="en-US" sz="2550" dirty="0">
-              <a:solidFill>
-                <a:srgbClr val="15354B"/>
-              </a:solidFill>
-              <a:latin typeface="Arial"/>
-              <a:ea typeface="Arial"/>
-              <a:cs typeface="Arial"/>
-            </a:endParaRPr>
+            <a:r>
+              <a:rPr sz="2000" b="1">
+                <a:solidFill>
+                  <a:srgbClr val="087F8C"/>
+                </a:solidFill>
+                <a:latin typeface="Arial"/>
+              </a:rPr>
+              <a:t>Modules</a:t>
+            </a:r>
           </a:p>
           <a:p>
-            <a:pPr>
-              <a:defRPr sz="2550" b="0">
+            <a:pPr algn="l">
+              <a:lnSpc>
+                <a:spcPts val="2600"/>
+              </a:lnSpc>
+            </a:pPr>
+            <a:r>
+              <a:rPr sz="1950" b="1">
                 <a:solidFill>
                   <a:srgbClr val="15354B"/>
                 </a:solidFill>
                 <a:latin typeface="Arial"/>
-                <a:ea typeface="Arial"/>
-                <a:cs typeface="Arial"/>
-              </a:defRPr>
+              </a:rPr>
+              <a:t>M1 Airspace Graph Builder: </a:t>
+            </a:r>
+            <a:r>
+              <a:rPr sz="1950" b="0">
+                <a:solidFill>
+                  <a:srgbClr val="15354B"/>
+                </a:solidFill>
+                <a:latin typeface="Arial"/>
+              </a:rPr>
+              <a:t>3-D lattice; wind-aware energy + 11-component risk</a:t>
+            </a:r>
+          </a:p>
+          <a:p>
+            <a:pPr algn="l">
+              <a:lnSpc>
+                <a:spcPts val="2600"/>
+              </a:lnSpc>
             </a:pPr>
-            <a:endParaRPr sz="2550" b="0" dirty="0">
-              <a:solidFill>
-                <a:srgbClr val="15354B"/>
-              </a:solidFill>
-              <a:latin typeface="Arial"/>
-              <a:ea typeface="Arial"/>
-              <a:cs typeface="Arial"/>
-            </a:endParaRPr>
+            <a:r>
+              <a:rPr sz="1950" b="1">
+                <a:solidFill>
+                  <a:srgbClr val="15354B"/>
+                </a:solidFill>
+                <a:latin typeface="Arial"/>
+              </a:rPr>
+              <a:t>M2 Tier 1 Pareto Engine: </a:t>
+            </a:r>
+            <a:r>
+              <a:rPr sz="1950" b="0">
+                <a:solidFill>
+                  <a:srgbClr val="15354B"/>
+                </a:solidFill>
+                <a:latin typeface="Arial"/>
+              </a:rPr>
+              <a:t>NAMOA* + front store with drift-based refresh</a:t>
+            </a:r>
+          </a:p>
+          <a:p>
+            <a:pPr algn="l">
+              <a:lnSpc>
+                <a:spcPts val="2600"/>
+              </a:lnSpc>
+            </a:pPr>
+            <a:r>
+              <a:rPr sz="1950" b="1">
+                <a:solidFill>
+                  <a:srgbClr val="15354B"/>
+                </a:solidFill>
+                <a:latin typeface="Arial"/>
+              </a:rPr>
+              <a:t>M3 Baselines: </a:t>
+            </a:r>
+            <a:r>
+              <a:rPr sz="1950" b="0">
+                <a:solidFill>
+                  <a:srgbClr val="15354B"/>
+                </a:solidFill>
+                <a:latin typeface="Arial"/>
+              </a:rPr>
+              <a:t>A* (distance / energy / risk), weighted-sum A*, MOPSO</a:t>
+            </a:r>
+          </a:p>
+          <a:p>
+            <a:pPr algn="l">
+              <a:lnSpc>
+                <a:spcPts val="2600"/>
+              </a:lnSpc>
+            </a:pPr>
+            <a:r>
+              <a:rPr sz="1950" b="1">
+                <a:solidFill>
+                  <a:srgbClr val="15354B"/>
+                </a:solidFill>
+                <a:latin typeface="Arial"/>
+              </a:rPr>
+              <a:t>M4 Tier 2 Payload Interpreter: </a:t>
+            </a:r>
+            <a:r>
+              <a:rPr sz="1950" b="0">
+                <a:solidFill>
+                  <a:srgbClr val="15354B"/>
+                </a:solidFill>
+                <a:latin typeface="Arial"/>
+              </a:rPr>
+              <a:t>tags → weights → argmax; battery &amp; weather HOLD</a:t>
+            </a:r>
+          </a:p>
+          <a:p>
+            <a:pPr algn="l">
+              <a:lnSpc>
+                <a:spcPts val="2600"/>
+              </a:lnSpc>
+            </a:pPr>
+            <a:r>
+              <a:rPr sz="1950" b="1">
+                <a:solidFill>
+                  <a:srgbClr val="15354B"/>
+                </a:solidFill>
+                <a:latin typeface="Arial"/>
+              </a:rPr>
+              <a:t>M5 Evaluation: </a:t>
+            </a:r>
+            <a:r>
+              <a:rPr sz="1950" b="0">
+                <a:solidFill>
+                  <a:srgbClr val="15354B"/>
+                </a:solidFill>
+                <a:latin typeface="Arial"/>
+              </a:rPr>
+              <a:t>HV, IGD, spread, alignment score, 225-tag sweep</a:t>
+            </a:r>
+          </a:p>
+          <a:p>
+            <a:pPr algn="l">
+              <a:lnSpc>
+                <a:spcPts val="2600"/>
+              </a:lnSpc>
+            </a:pPr>
+            <a:r>
+              <a:rPr sz="1950" b="1">
+                <a:solidFill>
+                  <a:srgbClr val="15354B"/>
+                </a:solidFill>
+                <a:latin typeface="Arial"/>
+              </a:rPr>
+              <a:t>M6 Mission Export &amp; Dashboard: </a:t>
+            </a:r>
+            <a:r>
+              <a:rPr sz="1950" b="0">
+                <a:solidFill>
+                  <a:srgbClr val="15354B"/>
+                </a:solidFill>
+                <a:latin typeface="Arial"/>
+              </a:rPr>
+              <a:t>QGC WPL 110 / .plan files, Tkinter UI</a:t>
+            </a:r>
+          </a:p>
+          <a:p>
+            <a:pPr algn="l">
+              <a:lnSpc>
+                <a:spcPts val="2600"/>
+              </a:lnSpc>
+            </a:pPr>
+            <a:r>
+              <a:rPr sz="1950" b="1">
+                <a:solidFill>
+                  <a:srgbClr val="15354B"/>
+                </a:solidFill>
+                <a:latin typeface="Arial"/>
+              </a:rPr>
+              <a:t>M7 Simulation: </a:t>
+            </a:r>
+            <a:r>
+              <a:rPr sz="1950" b="0">
+                <a:solidFill>
+                  <a:srgbClr val="15354B"/>
+                </a:solidFill>
+                <a:latin typeface="Arial"/>
+              </a:rPr>
+              <a:t>Gazebo Harmonic + ArduPilot SITL, flown-track metrics</a:t>
+            </a:r>
+          </a:p>
+          <a:p>
+            <a:pPr algn="l">
+              <a:lnSpc>
+                <a:spcPts val="2600"/>
+              </a:lnSpc>
+              <a:spcBef>
+                <a:spcPts val="1000"/>
+              </a:spcBef>
+            </a:pPr>
+            <a:r>
+              <a:rPr sz="2000" b="1">
+                <a:solidFill>
+                  <a:srgbClr val="087F8C"/>
+                </a:solidFill>
+                <a:latin typeface="Arial"/>
+              </a:rPr>
+              <a:t>Dataset Description</a:t>
+            </a:r>
+          </a:p>
+          <a:p>
+            <a:pPr algn="l">
+              <a:lnSpc>
+                <a:spcPts val="2600"/>
+              </a:lnSpc>
+            </a:pPr>
+            <a:r>
+              <a:rPr sz="1950" b="1">
+                <a:solidFill>
+                  <a:srgbClr val="15354B"/>
+                </a:solidFill>
+                <a:latin typeface="Arial"/>
+              </a:rPr>
+              <a:t>Synthetic graphs (seeded): </a:t>
+            </a:r>
+            <a:r>
+              <a:rPr sz="1950" b="0">
+                <a:solidFill>
+                  <a:srgbClr val="15354B"/>
+                </a:solidFill>
+                <a:latin typeface="Arial"/>
+              </a:rPr>
+              <a:t>S1 50, S2 ~200, S3 500 nodes; wind 12–28 km/h</a:t>
+            </a:r>
+          </a:p>
+          <a:p>
+            <a:pPr algn="l">
+              <a:lnSpc>
+                <a:spcPts val="2600"/>
+              </a:lnSpc>
+            </a:pPr>
+            <a:r>
+              <a:rPr sz="1950" b="1">
+                <a:solidFill>
+                  <a:srgbClr val="15354B"/>
+                </a:solidFill>
+                <a:latin typeface="Arial"/>
+              </a:rPr>
+              <a:t>Real-region lattice: </a:t>
+            </a:r>
+            <a:r>
+              <a:rPr sz="1950" b="0">
+                <a:solidFill>
+                  <a:srgbClr val="15354B"/>
+                </a:solidFill>
+                <a:latin typeface="Arial"/>
+              </a:rPr>
+              <a:t>6 km box, 200 m spacing → 893 nodes, 6,752 directed edges</a:t>
+            </a:r>
+          </a:p>
+          <a:p>
+            <a:pPr algn="l">
+              <a:lnSpc>
+                <a:spcPts val="2600"/>
+              </a:lnSpc>
+            </a:pPr>
+            <a:r>
+              <a:rPr sz="1950" b="1">
+                <a:solidFill>
+                  <a:srgbClr val="15354B"/>
+                </a:solidFill>
+                <a:latin typeface="Arial"/>
+              </a:rPr>
+              <a:t>Sources: </a:t>
+            </a:r>
+            <a:r>
+              <a:rPr sz="1950" b="0">
+                <a:solidFill>
+                  <a:srgbClr val="15354B"/>
+                </a:solidFill>
+                <a:latin typeface="Arial"/>
+              </a:rPr>
+              <a:t>Open-Meteo weather, Copernicus DEM, OpenStreetMap (Overpass)</a:t>
+            </a:r>
+          </a:p>
+          <a:p>
+            <a:pPr algn="l">
+              <a:lnSpc>
+                <a:spcPts val="2600"/>
+              </a:lnSpc>
+            </a:pPr>
+            <a:r>
+              <a:rPr sz="1950" b="1">
+                <a:solidFill>
+                  <a:srgbClr val="15354B"/>
+                </a:solidFill>
+                <a:latin typeface="Arial"/>
+              </a:rPr>
+              <a:t>Payload tags: </a:t>
+            </a:r>
+            <a:r>
+              <a:rPr sz="1950" b="0">
+                <a:solidFill>
+                  <a:srgbClr val="15354B"/>
+                </a:solidFill>
+                <a:latin typeface="Arial"/>
+              </a:rPr>
+              <a:t>5 × 3 × 3 × 5 = 225 combinations, 4 reference presets</a:t>
+            </a:r>
+          </a:p>
+          <a:p>
+            <a:pPr algn="l">
+              <a:lnSpc>
+                <a:spcPts val="2600"/>
+              </a:lnSpc>
+            </a:pPr>
+            <a:r>
+              <a:rPr sz="1950" b="1">
+                <a:solidFill>
+                  <a:srgbClr val="15354B"/>
+                </a:solidFill>
+                <a:latin typeface="Arial"/>
+              </a:rPr>
+              <a:t>Simulation bundle: </a:t>
+            </a:r>
+            <a:r>
+              <a:rPr sz="1950" b="0">
+                <a:solidFill>
+                  <a:srgbClr val="15354B"/>
+                </a:solidFill>
+                <a:latin typeface="Arial"/>
+              </a:rPr>
+              <a:t>1.5 km frozen region (terrain, buildings, roads, pads)</a:t>
+            </a:r>
+          </a:p>
+        </p:txBody>
+      </p:sp>
+      <p:sp>
+        <p:nvSpPr>
+          <p:cNvPr id="47" name="Results Panel"/>
+          <p:cNvSpPr/>
+          <p:nvPr/>
+        </p:nvSpPr>
+        <p:spPr>
+          <a:xfrm>
+            <a:off x="20016335" y="4975705"/>
+            <a:ext cx="9648705" cy="12815897"/>
+          </a:xfrm>
+          <a:prstGeom prst="rect">
+            <a:avLst/>
+          </a:prstGeom>
+          <a:solidFill>
+            <a:srgbClr val="F5F8FA"/>
+          </a:solidFill>
+          <a:ln w="12700">
+            <a:solidFill>
+              <a:srgbClr val="D5DEE5"/>
+            </a:solidFill>
+          </a:ln>
+          <a:effectLst/>
+        </p:spPr>
+        <p:style>
+          <a:lnRef idx="1">
+            <a:schemeClr val="accent1"/>
+          </a:lnRef>
+          <a:fillRef idx="3">
+            <a:schemeClr val="accent1"/>
+          </a:fillRef>
+          <a:effectRef idx="2">
+            <a:schemeClr val="accent1"/>
+          </a:effectRef>
+          <a:fontRef idx="minor">
+            <a:schemeClr val="lt1"/>
+          </a:fontRef>
+        </p:style>
+        <p:txBody>
+          <a:bodyPr rtlCol="0" anchor="ctr"/>
+          <a:lstStyle/>
+          <a:p/>
+        </p:txBody>
+      </p:sp>
+      <p:sp>
+        <p:nvSpPr>
+          <p:cNvPr id="48" name="Tier 1 Table Title"/>
+          <p:cNvSpPr txBox="1"/>
+          <p:nvPr/>
+        </p:nvSpPr>
+        <p:spPr>
+          <a:xfrm>
+            <a:off x="20167687" y="5070300"/>
+            <a:ext cx="9421677" cy="340542"/>
+          </a:xfrm>
+          <a:prstGeom prst="rect">
+            <a:avLst/>
+          </a:prstGeom>
+          <a:noFill/>
+        </p:spPr>
+        <p:txBody>
+          <a:bodyPr wrap="square" lIns="0" rIns="0" tIns="0" bIns="0" anchor="t">
+            <a:spAutoFit/>
+          </a:bodyPr>
+          <a:lstStyle/>
+          <a:p>
+            <a:pPr algn="l"/>
+            <a:r>
+              <a:rPr sz="1700" b="1">
+                <a:solidFill>
+                  <a:srgbClr val="087F8C"/>
+                </a:solidFill>
+                <a:latin typeface="Arial"/>
+              </a:rPr>
+              <a:t>Tier 1 vs baselines (first pass; HV higher, IGD lower is better)</a:t>
+            </a:r>
+          </a:p>
+        </p:txBody>
+      </p:sp>
+      <p:graphicFrame>
+        <p:nvGraphicFramePr>
+          <p:cNvPr id="49" name="Tier 1 Results Table"/>
+          <p:cNvGraphicFramePr>
+            <a:graphicFrameLocks noGrp="1"/>
+          </p:cNvGraphicFramePr>
+          <p:nvPr/>
+        </p:nvGraphicFramePr>
+        <p:xfrm>
+          <a:off x="20129849" y="5429761"/>
+          <a:ext cx="9421676" cy="1920275"/>
+        </p:xfrm>
+        <a:graphic>
+          <a:graphicData uri="http://schemas.openxmlformats.org/drawingml/2006/table">
+            <a:tbl>
+              <a:tblPr firstRow="1" bandRow="0"/>
+              <a:tblGrid>
+                <a:gridCol w="1362170"/>
+                <a:gridCol w="2421636"/>
+                <a:gridCol w="1248656"/>
+                <a:gridCol w="1248656"/>
+                <a:gridCol w="1589198"/>
+                <a:gridCol w="1551360"/>
+              </a:tblGrid>
+              <a:tr h="274325">
+                <a:tc>
+                  <a:txBody>
+                    <a:bodyPr wrap="square"/>
+                    <a:lstStyle/>
+                    <a:p>
+                      <a:pPr algn="l"/>
+                      <a:r>
+                        <a:rPr sz="1350" b="1">
+                          <a:solidFill>
+                            <a:srgbClr val="FFFFFF"/>
+                          </a:solidFill>
+                          <a:latin typeface="Arial"/>
+                        </a:rPr>
+                        <a:t>Scenario</a:t>
+                      </a:r>
+                    </a:p>
+                  </a:txBody>
+                  <a:tcPr marL="50800" marR="50800" marT="19050" marB="19050" anchor="ctr">
+                    <a:lnL w="9525" cmpd="sng">
+                      <a:solidFill>
+                        <a:srgbClr val="15354B"/>
+                      </a:solidFill>
+                    </a:lnL>
+                    <a:lnR w="9525" cmpd="sng">
+                      <a:solidFill>
+                        <a:srgbClr val="15354B"/>
+                      </a:solidFill>
+                    </a:lnR>
+                    <a:lnT w="9525" cmpd="sng">
+                      <a:solidFill>
+                        <a:srgbClr val="15354B"/>
+                      </a:solidFill>
+                    </a:lnT>
+                    <a:lnB w="9525" cmpd="sng">
+                      <a:solidFill>
+                        <a:srgbClr val="15354B"/>
+                      </a:solidFill>
+                    </a:lnB>
+                    <a:solidFill>
+                      <a:srgbClr val="15354B"/>
+                    </a:solidFill>
+                  </a:tcPr>
+                </a:tc>
+                <a:tc>
+                  <a:txBody>
+                    <a:bodyPr wrap="square"/>
+                    <a:lstStyle/>
+                    <a:p>
+                      <a:pPr algn="l"/>
+                      <a:r>
+                        <a:rPr sz="1350" b="1">
+                          <a:solidFill>
+                            <a:srgbClr val="FFFFFF"/>
+                          </a:solidFill>
+                          <a:latin typeface="Arial"/>
+                        </a:rPr>
+                        <a:t>Method</a:t>
+                      </a:r>
+                    </a:p>
+                  </a:txBody>
+                  <a:tcPr marL="50800" marR="50800" marT="19050" marB="19050" anchor="ctr">
+                    <a:lnL w="9525" cmpd="sng">
+                      <a:solidFill>
+                        <a:srgbClr val="15354B"/>
+                      </a:solidFill>
+                    </a:lnL>
+                    <a:lnR w="9525" cmpd="sng">
+                      <a:solidFill>
+                        <a:srgbClr val="15354B"/>
+                      </a:solidFill>
+                    </a:lnR>
+                    <a:lnT w="9525" cmpd="sng">
+                      <a:solidFill>
+                        <a:srgbClr val="15354B"/>
+                      </a:solidFill>
+                    </a:lnT>
+                    <a:lnB w="9525" cmpd="sng">
+                      <a:solidFill>
+                        <a:srgbClr val="15354B"/>
+                      </a:solidFill>
+                    </a:lnB>
+                    <a:solidFill>
+                      <a:srgbClr val="15354B"/>
+                    </a:solidFill>
+                  </a:tcPr>
+                </a:tc>
+                <a:tc>
+                  <a:txBody>
+                    <a:bodyPr wrap="square"/>
+                    <a:lstStyle/>
+                    <a:p>
+                      <a:pPr algn="ctr"/>
+                      <a:r>
+                        <a:rPr sz="1350" b="1">
+                          <a:solidFill>
+                            <a:srgbClr val="FFFFFF"/>
+                          </a:solidFill>
+                          <a:latin typeface="Arial"/>
+                        </a:rPr>
+                        <a:t>Routes</a:t>
+                      </a:r>
+                    </a:p>
+                  </a:txBody>
+                  <a:tcPr marL="50800" marR="50800" marT="19050" marB="19050" anchor="ctr">
+                    <a:lnL w="9525" cmpd="sng">
+                      <a:solidFill>
+                        <a:srgbClr val="15354B"/>
+                      </a:solidFill>
+                    </a:lnL>
+                    <a:lnR w="9525" cmpd="sng">
+                      <a:solidFill>
+                        <a:srgbClr val="15354B"/>
+                      </a:solidFill>
+                    </a:lnR>
+                    <a:lnT w="9525" cmpd="sng">
+                      <a:solidFill>
+                        <a:srgbClr val="15354B"/>
+                      </a:solidFill>
+                    </a:lnT>
+                    <a:lnB w="9525" cmpd="sng">
+                      <a:solidFill>
+                        <a:srgbClr val="15354B"/>
+                      </a:solidFill>
+                    </a:lnB>
+                    <a:solidFill>
+                      <a:srgbClr val="15354B"/>
+                    </a:solidFill>
+                  </a:tcPr>
+                </a:tc>
+                <a:tc>
+                  <a:txBody>
+                    <a:bodyPr wrap="square"/>
+                    <a:lstStyle/>
+                    <a:p>
+                      <a:pPr algn="ctr"/>
+                      <a:r>
+                        <a:rPr sz="1350" b="1">
+                          <a:solidFill>
+                            <a:srgbClr val="FFFFFF"/>
+                          </a:solidFill>
+                          <a:latin typeface="Arial"/>
+                        </a:rPr>
+                        <a:t>Time (s)</a:t>
+                      </a:r>
+                    </a:p>
+                  </a:txBody>
+                  <a:tcPr marL="50800" marR="50800" marT="19050" marB="19050" anchor="ctr">
+                    <a:lnL w="9525" cmpd="sng">
+                      <a:solidFill>
+                        <a:srgbClr val="15354B"/>
+                      </a:solidFill>
+                    </a:lnL>
+                    <a:lnR w="9525" cmpd="sng">
+                      <a:solidFill>
+                        <a:srgbClr val="15354B"/>
+                      </a:solidFill>
+                    </a:lnR>
+                    <a:lnT w="9525" cmpd="sng">
+                      <a:solidFill>
+                        <a:srgbClr val="15354B"/>
+                      </a:solidFill>
+                    </a:lnT>
+                    <a:lnB w="9525" cmpd="sng">
+                      <a:solidFill>
+                        <a:srgbClr val="15354B"/>
+                      </a:solidFill>
+                    </a:lnB>
+                    <a:solidFill>
+                      <a:srgbClr val="15354B"/>
+                    </a:solidFill>
+                  </a:tcPr>
+                </a:tc>
+                <a:tc>
+                  <a:txBody>
+                    <a:bodyPr wrap="square"/>
+                    <a:lstStyle/>
+                    <a:p>
+                      <a:pPr algn="ctr"/>
+                      <a:r>
+                        <a:rPr sz="1350" b="1">
+                          <a:solidFill>
+                            <a:srgbClr val="FFFFFF"/>
+                          </a:solidFill>
+                          <a:latin typeface="Arial"/>
+                        </a:rPr>
+                        <a:t>HV</a:t>
+                      </a:r>
+                    </a:p>
+                  </a:txBody>
+                  <a:tcPr marL="50800" marR="50800" marT="19050" marB="19050" anchor="ctr">
+                    <a:lnL w="9525" cmpd="sng">
+                      <a:solidFill>
+                        <a:srgbClr val="15354B"/>
+                      </a:solidFill>
+                    </a:lnL>
+                    <a:lnR w="9525" cmpd="sng">
+                      <a:solidFill>
+                        <a:srgbClr val="15354B"/>
+                      </a:solidFill>
+                    </a:lnR>
+                    <a:lnT w="9525" cmpd="sng">
+                      <a:solidFill>
+                        <a:srgbClr val="15354B"/>
+                      </a:solidFill>
+                    </a:lnT>
+                    <a:lnB w="9525" cmpd="sng">
+                      <a:solidFill>
+                        <a:srgbClr val="15354B"/>
+                      </a:solidFill>
+                    </a:lnB>
+                    <a:solidFill>
+                      <a:srgbClr val="15354B"/>
+                    </a:solidFill>
+                  </a:tcPr>
+                </a:tc>
+                <a:tc>
+                  <a:txBody>
+                    <a:bodyPr wrap="square"/>
+                    <a:lstStyle/>
+                    <a:p>
+                      <a:pPr algn="ctr"/>
+                      <a:r>
+                        <a:rPr sz="1350" b="1">
+                          <a:solidFill>
+                            <a:srgbClr val="FFFFFF"/>
+                          </a:solidFill>
+                          <a:latin typeface="Arial"/>
+                        </a:rPr>
+                        <a:t>IGD</a:t>
+                      </a:r>
+                    </a:p>
+                  </a:txBody>
+                  <a:tcPr marL="50800" marR="50800" marT="19050" marB="19050" anchor="ctr">
+                    <a:lnL w="9525" cmpd="sng">
+                      <a:solidFill>
+                        <a:srgbClr val="15354B"/>
+                      </a:solidFill>
+                    </a:lnL>
+                    <a:lnR w="9525" cmpd="sng">
+                      <a:solidFill>
+                        <a:srgbClr val="15354B"/>
+                      </a:solidFill>
+                    </a:lnR>
+                    <a:lnT w="9525" cmpd="sng">
+                      <a:solidFill>
+                        <a:srgbClr val="15354B"/>
+                      </a:solidFill>
+                    </a:lnT>
+                    <a:lnB w="9525" cmpd="sng">
+                      <a:solidFill>
+                        <a:srgbClr val="15354B"/>
+                      </a:solidFill>
+                    </a:lnB>
+                    <a:solidFill>
+                      <a:srgbClr val="15354B"/>
+                    </a:solidFill>
+                  </a:tcPr>
+                </a:tc>
+              </a:tr>
+              <a:tr h="274325">
+                <a:tc>
+                  <a:txBody>
+                    <a:bodyPr wrap="square"/>
+                    <a:lstStyle/>
+                    <a:p>
+                      <a:pPr algn="l"/>
+                      <a:r>
+                        <a:rPr sz="1350" b="0">
+                          <a:solidFill>
+                            <a:srgbClr val="15354B"/>
+                          </a:solidFill>
+                          <a:latin typeface="Arial"/>
+                        </a:rPr>
+                        <a:t>S2 (200)</a:t>
+                      </a:r>
+                    </a:p>
+                  </a:txBody>
+                  <a:tcPr marL="50800" marR="50800" marT="19050" marB="19050" anchor="ctr">
+                    <a:lnL w="9525" cmpd="sng">
+                      <a:solidFill>
+                        <a:srgbClr val="C9D3DB"/>
+                      </a:solidFill>
+                    </a:lnL>
+                    <a:lnR w="9525" cmpd="sng">
+                      <a:solidFill>
+                        <a:srgbClr val="C9D3DB"/>
+                      </a:solidFill>
+                    </a:lnR>
+                    <a:lnT w="9525" cmpd="sng">
+                      <a:solidFill>
+                        <a:srgbClr val="C9D3DB"/>
+                      </a:solidFill>
+                    </a:lnT>
+                    <a:lnB w="9525" cmpd="sng">
+                      <a:solidFill>
+                        <a:srgbClr val="C9D3DB"/>
+                      </a:solidFill>
+                    </a:lnB>
+                    <a:solidFill>
+                      <a:srgbClr val="FFFFFF"/>
+                    </a:solidFill>
+                  </a:tcPr>
+                </a:tc>
+                <a:tc>
+                  <a:txBody>
+                    <a:bodyPr wrap="square"/>
+                    <a:lstStyle/>
+                    <a:p>
+                      <a:pPr algn="l"/>
+                      <a:r>
+                        <a:rPr sz="1350" b="1">
+                          <a:solidFill>
+                            <a:srgbClr val="15354B"/>
+                          </a:solidFill>
+                          <a:latin typeface="Arial"/>
+                        </a:rPr>
+                        <a:t>NAMOA* (Tier 1)</a:t>
+                      </a:r>
+                    </a:p>
+                  </a:txBody>
+                  <a:tcPr marL="50800" marR="50800" marT="19050" marB="19050" anchor="ctr">
+                    <a:lnL w="9525" cmpd="sng">
+                      <a:solidFill>
+                        <a:srgbClr val="C9D3DB"/>
+                      </a:solidFill>
+                    </a:lnL>
+                    <a:lnR w="9525" cmpd="sng">
+                      <a:solidFill>
+                        <a:srgbClr val="C9D3DB"/>
+                      </a:solidFill>
+                    </a:lnR>
+                    <a:lnT w="9525" cmpd="sng">
+                      <a:solidFill>
+                        <a:srgbClr val="C9D3DB"/>
+                      </a:solidFill>
+                    </a:lnT>
+                    <a:lnB w="9525" cmpd="sng">
+                      <a:solidFill>
+                        <a:srgbClr val="C9D3DB"/>
+                      </a:solidFill>
+                    </a:lnB>
+                    <a:solidFill>
+                      <a:srgbClr val="FFFFFF"/>
+                    </a:solidFill>
+                  </a:tcPr>
+                </a:tc>
+                <a:tc>
+                  <a:txBody>
+                    <a:bodyPr wrap="square"/>
+                    <a:lstStyle/>
+                    <a:p>
+                      <a:pPr algn="ctr"/>
+                      <a:r>
+                        <a:rPr sz="1350" b="1">
+                          <a:solidFill>
+                            <a:srgbClr val="15354B"/>
+                          </a:solidFill>
+                          <a:latin typeface="Arial"/>
+                        </a:rPr>
+                        <a:t>16</a:t>
+                      </a:r>
+                    </a:p>
+                  </a:txBody>
+                  <a:tcPr marL="50800" marR="50800" marT="19050" marB="19050" anchor="ctr">
+                    <a:lnL w="9525" cmpd="sng">
+                      <a:solidFill>
+                        <a:srgbClr val="C9D3DB"/>
+                      </a:solidFill>
+                    </a:lnL>
+                    <a:lnR w="9525" cmpd="sng">
+                      <a:solidFill>
+                        <a:srgbClr val="C9D3DB"/>
+                      </a:solidFill>
+                    </a:lnR>
+                    <a:lnT w="9525" cmpd="sng">
+                      <a:solidFill>
+                        <a:srgbClr val="C9D3DB"/>
+                      </a:solidFill>
+                    </a:lnT>
+                    <a:lnB w="9525" cmpd="sng">
+                      <a:solidFill>
+                        <a:srgbClr val="C9D3DB"/>
+                      </a:solidFill>
+                    </a:lnB>
+                    <a:solidFill>
+                      <a:srgbClr val="FFFFFF"/>
+                    </a:solidFill>
+                  </a:tcPr>
+                </a:tc>
+                <a:tc>
+                  <a:txBody>
+                    <a:bodyPr wrap="square"/>
+                    <a:lstStyle/>
+                    <a:p>
+                      <a:pPr algn="ctr"/>
+                      <a:r>
+                        <a:rPr sz="1350" b="0">
+                          <a:solidFill>
+                            <a:srgbClr val="15354B"/>
+                          </a:solidFill>
+                          <a:latin typeface="Arial"/>
+                        </a:rPr>
+                        <a:t>0.162</a:t>
+                      </a:r>
+                    </a:p>
+                  </a:txBody>
+                  <a:tcPr marL="50800" marR="50800" marT="19050" marB="19050" anchor="ctr">
+                    <a:lnL w="9525" cmpd="sng">
+                      <a:solidFill>
+                        <a:srgbClr val="C9D3DB"/>
+                      </a:solidFill>
+                    </a:lnL>
+                    <a:lnR w="9525" cmpd="sng">
+                      <a:solidFill>
+                        <a:srgbClr val="C9D3DB"/>
+                      </a:solidFill>
+                    </a:lnR>
+                    <a:lnT w="9525" cmpd="sng">
+                      <a:solidFill>
+                        <a:srgbClr val="C9D3DB"/>
+                      </a:solidFill>
+                    </a:lnT>
+                    <a:lnB w="9525" cmpd="sng">
+                      <a:solidFill>
+                        <a:srgbClr val="C9D3DB"/>
+                      </a:solidFill>
+                    </a:lnB>
+                    <a:solidFill>
+                      <a:srgbClr val="FFFFFF"/>
+                    </a:solidFill>
+                  </a:tcPr>
+                </a:tc>
+                <a:tc>
+                  <a:txBody>
+                    <a:bodyPr wrap="square"/>
+                    <a:lstStyle/>
+                    <a:p>
+                      <a:pPr algn="ctr"/>
+                      <a:r>
+                        <a:rPr sz="1350" b="1">
+                          <a:solidFill>
+                            <a:srgbClr val="15354B"/>
+                          </a:solidFill>
+                          <a:latin typeface="Arial"/>
+                        </a:rPr>
+                        <a:t>1.2065</a:t>
+                      </a:r>
+                    </a:p>
+                  </a:txBody>
+                  <a:tcPr marL="50800" marR="50800" marT="19050" marB="19050" anchor="ctr">
+                    <a:lnL w="9525" cmpd="sng">
+                      <a:solidFill>
+                        <a:srgbClr val="C9D3DB"/>
+                      </a:solidFill>
+                    </a:lnL>
+                    <a:lnR w="9525" cmpd="sng">
+                      <a:solidFill>
+                        <a:srgbClr val="C9D3DB"/>
+                      </a:solidFill>
+                    </a:lnR>
+                    <a:lnT w="9525" cmpd="sng">
+                      <a:solidFill>
+                        <a:srgbClr val="C9D3DB"/>
+                      </a:solidFill>
+                    </a:lnT>
+                    <a:lnB w="9525" cmpd="sng">
+                      <a:solidFill>
+                        <a:srgbClr val="C9D3DB"/>
+                      </a:solidFill>
+                    </a:lnB>
+                    <a:solidFill>
+                      <a:srgbClr val="FFFFFF"/>
+                    </a:solidFill>
+                  </a:tcPr>
+                </a:tc>
+                <a:tc>
+                  <a:txBody>
+                    <a:bodyPr wrap="square"/>
+                    <a:lstStyle/>
+                    <a:p>
+                      <a:pPr algn="ctr"/>
+                      <a:r>
+                        <a:rPr sz="1350" b="1">
+                          <a:solidFill>
+                            <a:srgbClr val="15354B"/>
+                          </a:solidFill>
+                          <a:latin typeface="Arial"/>
+                        </a:rPr>
+                        <a:t>0.000</a:t>
+                      </a:r>
+                    </a:p>
+                  </a:txBody>
+                  <a:tcPr marL="50800" marR="50800" marT="19050" marB="19050" anchor="ctr">
+                    <a:lnL w="9525" cmpd="sng">
+                      <a:solidFill>
+                        <a:srgbClr val="C9D3DB"/>
+                      </a:solidFill>
+                    </a:lnL>
+                    <a:lnR w="9525" cmpd="sng">
+                      <a:solidFill>
+                        <a:srgbClr val="C9D3DB"/>
+                      </a:solidFill>
+                    </a:lnR>
+                    <a:lnT w="9525" cmpd="sng">
+                      <a:solidFill>
+                        <a:srgbClr val="C9D3DB"/>
+                      </a:solidFill>
+                    </a:lnT>
+                    <a:lnB w="9525" cmpd="sng">
+                      <a:solidFill>
+                        <a:srgbClr val="C9D3DB"/>
+                      </a:solidFill>
+                    </a:lnB>
+                    <a:solidFill>
+                      <a:srgbClr val="FFFFFF"/>
+                    </a:solidFill>
+                  </a:tcPr>
+                </a:tc>
+              </a:tr>
+              <a:tr h="274325">
+                <a:tc>
+                  <a:txBody>
+                    <a:bodyPr wrap="square"/>
+                    <a:lstStyle/>
+                    <a:p>
+                      <a:pPr algn="l"/>
+                      <a:r>
+                        <a:rPr sz="1350" b="0">
+                          <a:solidFill>
+                            <a:srgbClr val="15354B"/>
+                          </a:solidFill>
+                          <a:latin typeface="Arial"/>
+                        </a:rPr>
+                        <a:t>S2 (200)</a:t>
+                      </a:r>
+                    </a:p>
+                  </a:txBody>
+                  <a:tcPr marL="50800" marR="50800" marT="19050" marB="19050" anchor="ctr">
+                    <a:lnL w="9525" cmpd="sng">
+                      <a:solidFill>
+                        <a:srgbClr val="C9D3DB"/>
+                      </a:solidFill>
+                    </a:lnL>
+                    <a:lnR w="9525" cmpd="sng">
+                      <a:solidFill>
+                        <a:srgbClr val="C9D3DB"/>
+                      </a:solidFill>
+                    </a:lnR>
+                    <a:lnT w="9525" cmpd="sng">
+                      <a:solidFill>
+                        <a:srgbClr val="C9D3DB"/>
+                      </a:solidFill>
+                    </a:lnT>
+                    <a:lnB w="9525" cmpd="sng">
+                      <a:solidFill>
+                        <a:srgbClr val="C9D3DB"/>
+                      </a:solidFill>
+                    </a:lnB>
+                    <a:solidFill>
+                      <a:srgbClr val="FFFFFF"/>
+                    </a:solidFill>
+                  </a:tcPr>
+                </a:tc>
+                <a:tc>
+                  <a:txBody>
+                    <a:bodyPr wrap="square"/>
+                    <a:lstStyle/>
+                    <a:p>
+                      <a:pPr algn="l"/>
+                      <a:r>
+                        <a:rPr sz="1350" b="0">
+                          <a:solidFill>
+                            <a:srgbClr val="15354B"/>
+                          </a:solidFill>
+                          <a:latin typeface="Arial"/>
+                        </a:rPr>
+                        <a:t>MOPSO</a:t>
+                      </a:r>
+                    </a:p>
+                  </a:txBody>
+                  <a:tcPr marL="50800" marR="50800" marT="19050" marB="19050" anchor="ctr">
+                    <a:lnL w="9525" cmpd="sng">
+                      <a:solidFill>
+                        <a:srgbClr val="C9D3DB"/>
+                      </a:solidFill>
+                    </a:lnL>
+                    <a:lnR w="9525" cmpd="sng">
+                      <a:solidFill>
+                        <a:srgbClr val="C9D3DB"/>
+                      </a:solidFill>
+                    </a:lnR>
+                    <a:lnT w="9525" cmpd="sng">
+                      <a:solidFill>
+                        <a:srgbClr val="C9D3DB"/>
+                      </a:solidFill>
+                    </a:lnT>
+                    <a:lnB w="9525" cmpd="sng">
+                      <a:solidFill>
+                        <a:srgbClr val="C9D3DB"/>
+                      </a:solidFill>
+                    </a:lnB>
+                    <a:solidFill>
+                      <a:srgbClr val="FFFFFF"/>
+                    </a:solidFill>
+                  </a:tcPr>
+                </a:tc>
+                <a:tc>
+                  <a:txBody>
+                    <a:bodyPr wrap="square"/>
+                    <a:lstStyle/>
+                    <a:p>
+                      <a:pPr algn="ctr"/>
+                      <a:r>
+                        <a:rPr sz="1350" b="0">
+                          <a:solidFill>
+                            <a:srgbClr val="15354B"/>
+                          </a:solidFill>
+                          <a:latin typeface="Arial"/>
+                        </a:rPr>
+                        <a:t>12</a:t>
+                      </a:r>
+                    </a:p>
+                  </a:txBody>
+                  <a:tcPr marL="50800" marR="50800" marT="19050" marB="19050" anchor="ctr">
+                    <a:lnL w="9525" cmpd="sng">
+                      <a:solidFill>
+                        <a:srgbClr val="C9D3DB"/>
+                      </a:solidFill>
+                    </a:lnL>
+                    <a:lnR w="9525" cmpd="sng">
+                      <a:solidFill>
+                        <a:srgbClr val="C9D3DB"/>
+                      </a:solidFill>
+                    </a:lnR>
+                    <a:lnT w="9525" cmpd="sng">
+                      <a:solidFill>
+                        <a:srgbClr val="C9D3DB"/>
+                      </a:solidFill>
+                    </a:lnT>
+                    <a:lnB w="9525" cmpd="sng">
+                      <a:solidFill>
+                        <a:srgbClr val="C9D3DB"/>
+                      </a:solidFill>
+                    </a:lnB>
+                    <a:solidFill>
+                      <a:srgbClr val="FFFFFF"/>
+                    </a:solidFill>
+                  </a:tcPr>
+                </a:tc>
+                <a:tc>
+                  <a:txBody>
+                    <a:bodyPr wrap="square"/>
+                    <a:lstStyle/>
+                    <a:p>
+                      <a:pPr algn="ctr"/>
+                      <a:r>
+                        <a:rPr sz="1350" b="0">
+                          <a:solidFill>
+                            <a:srgbClr val="15354B"/>
+                          </a:solidFill>
+                          <a:latin typeface="Arial"/>
+                        </a:rPr>
+                        <a:t>1.505</a:t>
+                      </a:r>
+                    </a:p>
+                  </a:txBody>
+                  <a:tcPr marL="50800" marR="50800" marT="19050" marB="19050" anchor="ctr">
+                    <a:lnL w="9525" cmpd="sng">
+                      <a:solidFill>
+                        <a:srgbClr val="C9D3DB"/>
+                      </a:solidFill>
+                    </a:lnL>
+                    <a:lnR w="9525" cmpd="sng">
+                      <a:solidFill>
+                        <a:srgbClr val="C9D3DB"/>
+                      </a:solidFill>
+                    </a:lnR>
+                    <a:lnT w="9525" cmpd="sng">
+                      <a:solidFill>
+                        <a:srgbClr val="C9D3DB"/>
+                      </a:solidFill>
+                    </a:lnT>
+                    <a:lnB w="9525" cmpd="sng">
+                      <a:solidFill>
+                        <a:srgbClr val="C9D3DB"/>
+                      </a:solidFill>
+                    </a:lnB>
+                    <a:solidFill>
+                      <a:srgbClr val="FFFFFF"/>
+                    </a:solidFill>
+                  </a:tcPr>
+                </a:tc>
+                <a:tc>
+                  <a:txBody>
+                    <a:bodyPr wrap="square"/>
+                    <a:lstStyle/>
+                    <a:p>
+                      <a:pPr algn="ctr"/>
+                      <a:r>
+                        <a:rPr sz="1350" b="0">
+                          <a:solidFill>
+                            <a:srgbClr val="15354B"/>
+                          </a:solidFill>
+                          <a:latin typeface="Arial"/>
+                        </a:rPr>
+                        <a:t>1.2061</a:t>
+                      </a:r>
+                    </a:p>
+                  </a:txBody>
+                  <a:tcPr marL="50800" marR="50800" marT="19050" marB="19050" anchor="ctr">
+                    <a:lnL w="9525" cmpd="sng">
+                      <a:solidFill>
+                        <a:srgbClr val="C9D3DB"/>
+                      </a:solidFill>
+                    </a:lnL>
+                    <a:lnR w="9525" cmpd="sng">
+                      <a:solidFill>
+                        <a:srgbClr val="C9D3DB"/>
+                      </a:solidFill>
+                    </a:lnR>
+                    <a:lnT w="9525" cmpd="sng">
+                      <a:solidFill>
+                        <a:srgbClr val="C9D3DB"/>
+                      </a:solidFill>
+                    </a:lnT>
+                    <a:lnB w="9525" cmpd="sng">
+                      <a:solidFill>
+                        <a:srgbClr val="C9D3DB"/>
+                      </a:solidFill>
+                    </a:lnB>
+                    <a:solidFill>
+                      <a:srgbClr val="FFFFFF"/>
+                    </a:solidFill>
+                  </a:tcPr>
+                </a:tc>
+                <a:tc>
+                  <a:txBody>
+                    <a:bodyPr wrap="square"/>
+                    <a:lstStyle/>
+                    <a:p>
+                      <a:pPr algn="ctr"/>
+                      <a:r>
+                        <a:rPr sz="1350" b="0">
+                          <a:solidFill>
+                            <a:srgbClr val="15354B"/>
+                          </a:solidFill>
+                          <a:latin typeface="Arial"/>
+                        </a:rPr>
+                        <a:t>0.017</a:t>
+                      </a:r>
+                    </a:p>
+                  </a:txBody>
+                  <a:tcPr marL="50800" marR="50800" marT="19050" marB="19050" anchor="ctr">
+                    <a:lnL w="9525" cmpd="sng">
+                      <a:solidFill>
+                        <a:srgbClr val="C9D3DB"/>
+                      </a:solidFill>
+                    </a:lnL>
+                    <a:lnR w="9525" cmpd="sng">
+                      <a:solidFill>
+                        <a:srgbClr val="C9D3DB"/>
+                      </a:solidFill>
+                    </a:lnR>
+                    <a:lnT w="9525" cmpd="sng">
+                      <a:solidFill>
+                        <a:srgbClr val="C9D3DB"/>
+                      </a:solidFill>
+                    </a:lnT>
+                    <a:lnB w="9525" cmpd="sng">
+                      <a:solidFill>
+                        <a:srgbClr val="C9D3DB"/>
+                      </a:solidFill>
+                    </a:lnB>
+                    <a:solidFill>
+                      <a:srgbClr val="FFFFFF"/>
+                    </a:solidFill>
+                  </a:tcPr>
+                </a:tc>
+              </a:tr>
+              <a:tr h="274325">
+                <a:tc>
+                  <a:txBody>
+                    <a:bodyPr wrap="square"/>
+                    <a:lstStyle/>
+                    <a:p>
+                      <a:pPr algn="l"/>
+                      <a:r>
+                        <a:rPr sz="1350" b="0">
+                          <a:solidFill>
+                            <a:srgbClr val="15354B"/>
+                          </a:solidFill>
+                          <a:latin typeface="Arial"/>
+                        </a:rPr>
+                        <a:t>S2 (200)</a:t>
+                      </a:r>
+                    </a:p>
+                  </a:txBody>
+                  <a:tcPr marL="50800" marR="50800" marT="19050" marB="19050" anchor="ctr">
+                    <a:lnL w="9525" cmpd="sng">
+                      <a:solidFill>
+                        <a:srgbClr val="C9D3DB"/>
+                      </a:solidFill>
+                    </a:lnL>
+                    <a:lnR w="9525" cmpd="sng">
+                      <a:solidFill>
+                        <a:srgbClr val="C9D3DB"/>
+                      </a:solidFill>
+                    </a:lnR>
+                    <a:lnT w="9525" cmpd="sng">
+                      <a:solidFill>
+                        <a:srgbClr val="C9D3DB"/>
+                      </a:solidFill>
+                    </a:lnT>
+                    <a:lnB w="9525" cmpd="sng">
+                      <a:solidFill>
+                        <a:srgbClr val="C9D3DB"/>
+                      </a:solidFill>
+                    </a:lnB>
+                    <a:solidFill>
+                      <a:srgbClr val="FFFFFF"/>
+                    </a:solidFill>
+                  </a:tcPr>
+                </a:tc>
+                <a:tc>
+                  <a:txBody>
+                    <a:bodyPr wrap="square"/>
+                    <a:lstStyle/>
+                    <a:p>
+                      <a:pPr algn="l"/>
+                      <a:r>
+                        <a:rPr sz="1350" b="0">
+                          <a:solidFill>
+                            <a:srgbClr val="15354B"/>
+                          </a:solidFill>
+                          <a:latin typeface="Arial"/>
+                        </a:rPr>
+                        <a:t>A* energy</a:t>
+                      </a:r>
+                    </a:p>
+                  </a:txBody>
+                  <a:tcPr marL="50800" marR="50800" marT="19050" marB="19050" anchor="ctr">
+                    <a:lnL w="9525" cmpd="sng">
+                      <a:solidFill>
+                        <a:srgbClr val="C9D3DB"/>
+                      </a:solidFill>
+                    </a:lnL>
+                    <a:lnR w="9525" cmpd="sng">
+                      <a:solidFill>
+                        <a:srgbClr val="C9D3DB"/>
+                      </a:solidFill>
+                    </a:lnR>
+                    <a:lnT w="9525" cmpd="sng">
+                      <a:solidFill>
+                        <a:srgbClr val="C9D3DB"/>
+                      </a:solidFill>
+                    </a:lnT>
+                    <a:lnB w="9525" cmpd="sng">
+                      <a:solidFill>
+                        <a:srgbClr val="C9D3DB"/>
+                      </a:solidFill>
+                    </a:lnB>
+                    <a:solidFill>
+                      <a:srgbClr val="FFFFFF"/>
+                    </a:solidFill>
+                  </a:tcPr>
+                </a:tc>
+                <a:tc>
+                  <a:txBody>
+                    <a:bodyPr wrap="square"/>
+                    <a:lstStyle/>
+                    <a:p>
+                      <a:pPr algn="ctr"/>
+                      <a:r>
+                        <a:rPr sz="1350" b="0">
+                          <a:solidFill>
+                            <a:srgbClr val="15354B"/>
+                          </a:solidFill>
+                          <a:latin typeface="Arial"/>
+                        </a:rPr>
+                        <a:t>1</a:t>
+                      </a:r>
+                    </a:p>
+                  </a:txBody>
+                  <a:tcPr marL="50800" marR="50800" marT="19050" marB="19050" anchor="ctr">
+                    <a:lnL w="9525" cmpd="sng">
+                      <a:solidFill>
+                        <a:srgbClr val="C9D3DB"/>
+                      </a:solidFill>
+                    </a:lnL>
+                    <a:lnR w="9525" cmpd="sng">
+                      <a:solidFill>
+                        <a:srgbClr val="C9D3DB"/>
+                      </a:solidFill>
+                    </a:lnR>
+                    <a:lnT w="9525" cmpd="sng">
+                      <a:solidFill>
+                        <a:srgbClr val="C9D3DB"/>
+                      </a:solidFill>
+                    </a:lnT>
+                    <a:lnB w="9525" cmpd="sng">
+                      <a:solidFill>
+                        <a:srgbClr val="C9D3DB"/>
+                      </a:solidFill>
+                    </a:lnB>
+                    <a:solidFill>
+                      <a:srgbClr val="FFFFFF"/>
+                    </a:solidFill>
+                  </a:tcPr>
+                </a:tc>
+                <a:tc>
+                  <a:txBody>
+                    <a:bodyPr wrap="square"/>
+                    <a:lstStyle/>
+                    <a:p>
+                      <a:pPr algn="ctr"/>
+                      <a:r>
+                        <a:rPr sz="1350" b="0">
+                          <a:solidFill>
+                            <a:srgbClr val="15354B"/>
+                          </a:solidFill>
+                          <a:latin typeface="Arial"/>
+                        </a:rPr>
+                        <a:t>&lt;0.001</a:t>
+                      </a:r>
+                    </a:p>
+                  </a:txBody>
+                  <a:tcPr marL="50800" marR="50800" marT="19050" marB="19050" anchor="ctr">
+                    <a:lnL w="9525" cmpd="sng">
+                      <a:solidFill>
+                        <a:srgbClr val="C9D3DB"/>
+                      </a:solidFill>
+                    </a:lnL>
+                    <a:lnR w="9525" cmpd="sng">
+                      <a:solidFill>
+                        <a:srgbClr val="C9D3DB"/>
+                      </a:solidFill>
+                    </a:lnR>
+                    <a:lnT w="9525" cmpd="sng">
+                      <a:solidFill>
+                        <a:srgbClr val="C9D3DB"/>
+                      </a:solidFill>
+                    </a:lnT>
+                    <a:lnB w="9525" cmpd="sng">
+                      <a:solidFill>
+                        <a:srgbClr val="C9D3DB"/>
+                      </a:solidFill>
+                    </a:lnB>
+                    <a:solidFill>
+                      <a:srgbClr val="FFFFFF"/>
+                    </a:solidFill>
+                  </a:tcPr>
+                </a:tc>
+                <a:tc>
+                  <a:txBody>
+                    <a:bodyPr wrap="square"/>
+                    <a:lstStyle/>
+                    <a:p>
+                      <a:pPr algn="ctr"/>
+                      <a:r>
+                        <a:rPr sz="1350" b="0">
+                          <a:solidFill>
+                            <a:srgbClr val="15354B"/>
+                          </a:solidFill>
+                          <a:latin typeface="Arial"/>
+                        </a:rPr>
+                        <a:t>1.083</a:t>
+                      </a:r>
+                    </a:p>
+                  </a:txBody>
+                  <a:tcPr marL="50800" marR="50800" marT="19050" marB="19050" anchor="ctr">
+                    <a:lnL w="9525" cmpd="sng">
+                      <a:solidFill>
+                        <a:srgbClr val="C9D3DB"/>
+                      </a:solidFill>
+                    </a:lnL>
+                    <a:lnR w="9525" cmpd="sng">
+                      <a:solidFill>
+                        <a:srgbClr val="C9D3DB"/>
+                      </a:solidFill>
+                    </a:lnR>
+                    <a:lnT w="9525" cmpd="sng">
+                      <a:solidFill>
+                        <a:srgbClr val="C9D3DB"/>
+                      </a:solidFill>
+                    </a:lnT>
+                    <a:lnB w="9525" cmpd="sng">
+                      <a:solidFill>
+                        <a:srgbClr val="C9D3DB"/>
+                      </a:solidFill>
+                    </a:lnB>
+                    <a:solidFill>
+                      <a:srgbClr val="FFFFFF"/>
+                    </a:solidFill>
+                  </a:tcPr>
+                </a:tc>
+                <a:tc>
+                  <a:txBody>
+                    <a:bodyPr wrap="square"/>
+                    <a:lstStyle/>
+                    <a:p>
+                      <a:pPr algn="ctr"/>
+                      <a:r>
+                        <a:rPr sz="1350" b="0">
+                          <a:solidFill>
+                            <a:srgbClr val="15354B"/>
+                          </a:solidFill>
+                          <a:latin typeface="Arial"/>
+                        </a:rPr>
+                        <a:t>0.648</a:t>
+                      </a:r>
+                    </a:p>
+                  </a:txBody>
+                  <a:tcPr marL="50800" marR="50800" marT="19050" marB="19050" anchor="ctr">
+                    <a:lnL w="9525" cmpd="sng">
+                      <a:solidFill>
+                        <a:srgbClr val="C9D3DB"/>
+                      </a:solidFill>
+                    </a:lnL>
+                    <a:lnR w="9525" cmpd="sng">
+                      <a:solidFill>
+                        <a:srgbClr val="C9D3DB"/>
+                      </a:solidFill>
+                    </a:lnR>
+                    <a:lnT w="9525" cmpd="sng">
+                      <a:solidFill>
+                        <a:srgbClr val="C9D3DB"/>
+                      </a:solidFill>
+                    </a:lnT>
+                    <a:lnB w="9525" cmpd="sng">
+                      <a:solidFill>
+                        <a:srgbClr val="C9D3DB"/>
+                      </a:solidFill>
+                    </a:lnB>
+                    <a:solidFill>
+                      <a:srgbClr val="FFFFFF"/>
+                    </a:solidFill>
+                  </a:tcPr>
+                </a:tc>
+              </a:tr>
+              <a:tr h="274325">
+                <a:tc>
+                  <a:txBody>
+                    <a:bodyPr wrap="square"/>
+                    <a:lstStyle/>
+                    <a:p>
+                      <a:pPr algn="l"/>
+                      <a:r>
+                        <a:rPr sz="1350" b="0">
+                          <a:solidFill>
+                            <a:srgbClr val="15354B"/>
+                          </a:solidFill>
+                          <a:latin typeface="Arial"/>
+                        </a:rPr>
+                        <a:t>S3 (500)</a:t>
+                      </a:r>
+                    </a:p>
+                  </a:txBody>
+                  <a:tcPr marL="50800" marR="50800" marT="19050" marB="19050" anchor="ctr">
+                    <a:lnL w="9525" cmpd="sng">
+                      <a:solidFill>
+                        <a:srgbClr val="C9D3DB"/>
+                      </a:solidFill>
+                    </a:lnL>
+                    <a:lnR w="9525" cmpd="sng">
+                      <a:solidFill>
+                        <a:srgbClr val="C9D3DB"/>
+                      </a:solidFill>
+                    </a:lnR>
+                    <a:lnT w="9525" cmpd="sng">
+                      <a:solidFill>
+                        <a:srgbClr val="C9D3DB"/>
+                      </a:solidFill>
+                    </a:lnT>
+                    <a:lnB w="9525" cmpd="sng">
+                      <a:solidFill>
+                        <a:srgbClr val="C9D3DB"/>
+                      </a:solidFill>
+                    </a:lnB>
+                    <a:solidFill>
+                      <a:srgbClr val="FFFFFF"/>
+                    </a:solidFill>
+                  </a:tcPr>
+                </a:tc>
+                <a:tc>
+                  <a:txBody>
+                    <a:bodyPr wrap="square"/>
+                    <a:lstStyle/>
+                    <a:p>
+                      <a:pPr algn="l"/>
+                      <a:r>
+                        <a:rPr sz="1350" b="1">
+                          <a:solidFill>
+                            <a:srgbClr val="15354B"/>
+                          </a:solidFill>
+                          <a:latin typeface="Arial"/>
+                        </a:rPr>
+                        <a:t>NAMOA* (Tier 1)</a:t>
+                      </a:r>
+                    </a:p>
+                  </a:txBody>
+                  <a:tcPr marL="50800" marR="50800" marT="19050" marB="19050" anchor="ctr">
+                    <a:lnL w="9525" cmpd="sng">
+                      <a:solidFill>
+                        <a:srgbClr val="C9D3DB"/>
+                      </a:solidFill>
+                    </a:lnL>
+                    <a:lnR w="9525" cmpd="sng">
+                      <a:solidFill>
+                        <a:srgbClr val="C9D3DB"/>
+                      </a:solidFill>
+                    </a:lnR>
+                    <a:lnT w="9525" cmpd="sng">
+                      <a:solidFill>
+                        <a:srgbClr val="C9D3DB"/>
+                      </a:solidFill>
+                    </a:lnT>
+                    <a:lnB w="9525" cmpd="sng">
+                      <a:solidFill>
+                        <a:srgbClr val="C9D3DB"/>
+                      </a:solidFill>
+                    </a:lnB>
+                    <a:solidFill>
+                      <a:srgbClr val="FFFFFF"/>
+                    </a:solidFill>
+                  </a:tcPr>
+                </a:tc>
+                <a:tc>
+                  <a:txBody>
+                    <a:bodyPr wrap="square"/>
+                    <a:lstStyle/>
+                    <a:p>
+                      <a:pPr algn="ctr"/>
+                      <a:r>
+                        <a:rPr sz="1350" b="1">
+                          <a:solidFill>
+                            <a:srgbClr val="15354B"/>
+                          </a:solidFill>
+                          <a:latin typeface="Arial"/>
+                        </a:rPr>
+                        <a:t>115</a:t>
+                      </a:r>
+                    </a:p>
+                  </a:txBody>
+                  <a:tcPr marL="50800" marR="50800" marT="19050" marB="19050" anchor="ctr">
+                    <a:lnL w="9525" cmpd="sng">
+                      <a:solidFill>
+                        <a:srgbClr val="C9D3DB"/>
+                      </a:solidFill>
+                    </a:lnL>
+                    <a:lnR w="9525" cmpd="sng">
+                      <a:solidFill>
+                        <a:srgbClr val="C9D3DB"/>
+                      </a:solidFill>
+                    </a:lnR>
+                    <a:lnT w="9525" cmpd="sng">
+                      <a:solidFill>
+                        <a:srgbClr val="C9D3DB"/>
+                      </a:solidFill>
+                    </a:lnT>
+                    <a:lnB w="9525" cmpd="sng">
+                      <a:solidFill>
+                        <a:srgbClr val="C9D3DB"/>
+                      </a:solidFill>
+                    </a:lnB>
+                    <a:solidFill>
+                      <a:srgbClr val="FFFFFF"/>
+                    </a:solidFill>
+                  </a:tcPr>
+                </a:tc>
+                <a:tc>
+                  <a:txBody>
+                    <a:bodyPr wrap="square"/>
+                    <a:lstStyle/>
+                    <a:p>
+                      <a:pPr algn="ctr"/>
+                      <a:r>
+                        <a:rPr sz="1350" b="0">
+                          <a:solidFill>
+                            <a:srgbClr val="15354B"/>
+                          </a:solidFill>
+                          <a:latin typeface="Arial"/>
+                        </a:rPr>
+                        <a:t>33.761</a:t>
+                      </a:r>
+                    </a:p>
+                  </a:txBody>
+                  <a:tcPr marL="50800" marR="50800" marT="19050" marB="19050" anchor="ctr">
+                    <a:lnL w="9525" cmpd="sng">
+                      <a:solidFill>
+                        <a:srgbClr val="C9D3DB"/>
+                      </a:solidFill>
+                    </a:lnL>
+                    <a:lnR w="9525" cmpd="sng">
+                      <a:solidFill>
+                        <a:srgbClr val="C9D3DB"/>
+                      </a:solidFill>
+                    </a:lnR>
+                    <a:lnT w="9525" cmpd="sng">
+                      <a:solidFill>
+                        <a:srgbClr val="C9D3DB"/>
+                      </a:solidFill>
+                    </a:lnT>
+                    <a:lnB w="9525" cmpd="sng">
+                      <a:solidFill>
+                        <a:srgbClr val="C9D3DB"/>
+                      </a:solidFill>
+                    </a:lnB>
+                    <a:solidFill>
+                      <a:srgbClr val="FFFFFF"/>
+                    </a:solidFill>
+                  </a:tcPr>
+                </a:tc>
+                <a:tc>
+                  <a:txBody>
+                    <a:bodyPr wrap="square"/>
+                    <a:lstStyle/>
+                    <a:p>
+                      <a:pPr algn="ctr"/>
+                      <a:r>
+                        <a:rPr sz="1350" b="1">
+                          <a:solidFill>
+                            <a:srgbClr val="15354B"/>
+                          </a:solidFill>
+                          <a:latin typeface="Arial"/>
+                        </a:rPr>
+                        <a:t>1.1235</a:t>
+                      </a:r>
+                    </a:p>
+                  </a:txBody>
+                  <a:tcPr marL="50800" marR="50800" marT="19050" marB="19050" anchor="ctr">
+                    <a:lnL w="9525" cmpd="sng">
+                      <a:solidFill>
+                        <a:srgbClr val="C9D3DB"/>
+                      </a:solidFill>
+                    </a:lnL>
+                    <a:lnR w="9525" cmpd="sng">
+                      <a:solidFill>
+                        <a:srgbClr val="C9D3DB"/>
+                      </a:solidFill>
+                    </a:lnR>
+                    <a:lnT w="9525" cmpd="sng">
+                      <a:solidFill>
+                        <a:srgbClr val="C9D3DB"/>
+                      </a:solidFill>
+                    </a:lnT>
+                    <a:lnB w="9525" cmpd="sng">
+                      <a:solidFill>
+                        <a:srgbClr val="C9D3DB"/>
+                      </a:solidFill>
+                    </a:lnB>
+                    <a:solidFill>
+                      <a:srgbClr val="FFFFFF"/>
+                    </a:solidFill>
+                  </a:tcPr>
+                </a:tc>
+                <a:tc>
+                  <a:txBody>
+                    <a:bodyPr wrap="square"/>
+                    <a:lstStyle/>
+                    <a:p>
+                      <a:pPr algn="ctr"/>
+                      <a:r>
+                        <a:rPr sz="1350" b="1">
+                          <a:solidFill>
+                            <a:srgbClr val="15354B"/>
+                          </a:solidFill>
+                          <a:latin typeface="Arial"/>
+                        </a:rPr>
+                        <a:t>0.000</a:t>
+                      </a:r>
+                    </a:p>
+                  </a:txBody>
+                  <a:tcPr marL="50800" marR="50800" marT="19050" marB="19050" anchor="ctr">
+                    <a:lnL w="9525" cmpd="sng">
+                      <a:solidFill>
+                        <a:srgbClr val="C9D3DB"/>
+                      </a:solidFill>
+                    </a:lnL>
+                    <a:lnR w="9525" cmpd="sng">
+                      <a:solidFill>
+                        <a:srgbClr val="C9D3DB"/>
+                      </a:solidFill>
+                    </a:lnR>
+                    <a:lnT w="9525" cmpd="sng">
+                      <a:solidFill>
+                        <a:srgbClr val="C9D3DB"/>
+                      </a:solidFill>
+                    </a:lnT>
+                    <a:lnB w="9525" cmpd="sng">
+                      <a:solidFill>
+                        <a:srgbClr val="C9D3DB"/>
+                      </a:solidFill>
+                    </a:lnB>
+                    <a:solidFill>
+                      <a:srgbClr val="FFFFFF"/>
+                    </a:solidFill>
+                  </a:tcPr>
+                </a:tc>
+              </a:tr>
+              <a:tr h="274325">
+                <a:tc>
+                  <a:txBody>
+                    <a:bodyPr wrap="square"/>
+                    <a:lstStyle/>
+                    <a:p>
+                      <a:pPr algn="l"/>
+                      <a:r>
+                        <a:rPr sz="1350" b="0">
+                          <a:solidFill>
+                            <a:srgbClr val="15354B"/>
+                          </a:solidFill>
+                          <a:latin typeface="Arial"/>
+                        </a:rPr>
+                        <a:t>S3 (500)</a:t>
+                      </a:r>
+                    </a:p>
+                  </a:txBody>
+                  <a:tcPr marL="50800" marR="50800" marT="19050" marB="19050" anchor="ctr">
+                    <a:lnL w="9525" cmpd="sng">
+                      <a:solidFill>
+                        <a:srgbClr val="C9D3DB"/>
+                      </a:solidFill>
+                    </a:lnL>
+                    <a:lnR w="9525" cmpd="sng">
+                      <a:solidFill>
+                        <a:srgbClr val="C9D3DB"/>
+                      </a:solidFill>
+                    </a:lnR>
+                    <a:lnT w="9525" cmpd="sng">
+                      <a:solidFill>
+                        <a:srgbClr val="C9D3DB"/>
+                      </a:solidFill>
+                    </a:lnT>
+                    <a:lnB w="9525" cmpd="sng">
+                      <a:solidFill>
+                        <a:srgbClr val="C9D3DB"/>
+                      </a:solidFill>
+                    </a:lnB>
+                    <a:solidFill>
+                      <a:srgbClr val="FFFFFF"/>
+                    </a:solidFill>
+                  </a:tcPr>
+                </a:tc>
+                <a:tc>
+                  <a:txBody>
+                    <a:bodyPr wrap="square"/>
+                    <a:lstStyle/>
+                    <a:p>
+                      <a:pPr algn="l"/>
+                      <a:r>
+                        <a:rPr sz="1350" b="0">
+                          <a:solidFill>
+                            <a:srgbClr val="15354B"/>
+                          </a:solidFill>
+                          <a:latin typeface="Arial"/>
+                        </a:rPr>
+                        <a:t>MOPSO</a:t>
+                      </a:r>
+                    </a:p>
+                  </a:txBody>
+                  <a:tcPr marL="50800" marR="50800" marT="19050" marB="19050" anchor="ctr">
+                    <a:lnL w="9525" cmpd="sng">
+                      <a:solidFill>
+                        <a:srgbClr val="C9D3DB"/>
+                      </a:solidFill>
+                    </a:lnL>
+                    <a:lnR w="9525" cmpd="sng">
+                      <a:solidFill>
+                        <a:srgbClr val="C9D3DB"/>
+                      </a:solidFill>
+                    </a:lnR>
+                    <a:lnT w="9525" cmpd="sng">
+                      <a:solidFill>
+                        <a:srgbClr val="C9D3DB"/>
+                      </a:solidFill>
+                    </a:lnT>
+                    <a:lnB w="9525" cmpd="sng">
+                      <a:solidFill>
+                        <a:srgbClr val="C9D3DB"/>
+                      </a:solidFill>
+                    </a:lnB>
+                    <a:solidFill>
+                      <a:srgbClr val="FFFFFF"/>
+                    </a:solidFill>
+                  </a:tcPr>
+                </a:tc>
+                <a:tc>
+                  <a:txBody>
+                    <a:bodyPr wrap="square"/>
+                    <a:lstStyle/>
+                    <a:p>
+                      <a:pPr algn="ctr"/>
+                      <a:r>
+                        <a:rPr sz="1350" b="0">
+                          <a:solidFill>
+                            <a:srgbClr val="15354B"/>
+                          </a:solidFill>
+                          <a:latin typeface="Arial"/>
+                        </a:rPr>
+                        <a:t>38</a:t>
+                      </a:r>
+                    </a:p>
+                  </a:txBody>
+                  <a:tcPr marL="50800" marR="50800" marT="19050" marB="19050" anchor="ctr">
+                    <a:lnL w="9525" cmpd="sng">
+                      <a:solidFill>
+                        <a:srgbClr val="C9D3DB"/>
+                      </a:solidFill>
+                    </a:lnL>
+                    <a:lnR w="9525" cmpd="sng">
+                      <a:solidFill>
+                        <a:srgbClr val="C9D3DB"/>
+                      </a:solidFill>
+                    </a:lnR>
+                    <a:lnT w="9525" cmpd="sng">
+                      <a:solidFill>
+                        <a:srgbClr val="C9D3DB"/>
+                      </a:solidFill>
+                    </a:lnT>
+                    <a:lnB w="9525" cmpd="sng">
+                      <a:solidFill>
+                        <a:srgbClr val="C9D3DB"/>
+                      </a:solidFill>
+                    </a:lnB>
+                    <a:solidFill>
+                      <a:srgbClr val="FFFFFF"/>
+                    </a:solidFill>
+                  </a:tcPr>
+                </a:tc>
+                <a:tc>
+                  <a:txBody>
+                    <a:bodyPr wrap="square"/>
+                    <a:lstStyle/>
+                    <a:p>
+                      <a:pPr algn="ctr"/>
+                      <a:r>
+                        <a:rPr sz="1350" b="0">
+                          <a:solidFill>
+                            <a:srgbClr val="15354B"/>
+                          </a:solidFill>
+                          <a:latin typeface="Arial"/>
+                        </a:rPr>
+                        <a:t>4.326</a:t>
+                      </a:r>
+                    </a:p>
+                  </a:txBody>
+                  <a:tcPr marL="50800" marR="50800" marT="19050" marB="19050" anchor="ctr">
+                    <a:lnL w="9525" cmpd="sng">
+                      <a:solidFill>
+                        <a:srgbClr val="C9D3DB"/>
+                      </a:solidFill>
+                    </a:lnL>
+                    <a:lnR w="9525" cmpd="sng">
+                      <a:solidFill>
+                        <a:srgbClr val="C9D3DB"/>
+                      </a:solidFill>
+                    </a:lnR>
+                    <a:lnT w="9525" cmpd="sng">
+                      <a:solidFill>
+                        <a:srgbClr val="C9D3DB"/>
+                      </a:solidFill>
+                    </a:lnT>
+                    <a:lnB w="9525" cmpd="sng">
+                      <a:solidFill>
+                        <a:srgbClr val="C9D3DB"/>
+                      </a:solidFill>
+                    </a:lnB>
+                    <a:solidFill>
+                      <a:srgbClr val="FFFFFF"/>
+                    </a:solidFill>
+                  </a:tcPr>
+                </a:tc>
+                <a:tc>
+                  <a:txBody>
+                    <a:bodyPr wrap="square"/>
+                    <a:lstStyle/>
+                    <a:p>
+                      <a:pPr algn="ctr"/>
+                      <a:r>
+                        <a:rPr sz="1350" b="0">
+                          <a:solidFill>
+                            <a:srgbClr val="15354B"/>
+                          </a:solidFill>
+                          <a:latin typeface="Arial"/>
+                        </a:rPr>
+                        <a:t>1.1146</a:t>
+                      </a:r>
+                    </a:p>
+                  </a:txBody>
+                  <a:tcPr marL="50800" marR="50800" marT="19050" marB="19050" anchor="ctr">
+                    <a:lnL w="9525" cmpd="sng">
+                      <a:solidFill>
+                        <a:srgbClr val="C9D3DB"/>
+                      </a:solidFill>
+                    </a:lnL>
+                    <a:lnR w="9525" cmpd="sng">
+                      <a:solidFill>
+                        <a:srgbClr val="C9D3DB"/>
+                      </a:solidFill>
+                    </a:lnR>
+                    <a:lnT w="9525" cmpd="sng">
+                      <a:solidFill>
+                        <a:srgbClr val="C9D3DB"/>
+                      </a:solidFill>
+                    </a:lnT>
+                    <a:lnB w="9525" cmpd="sng">
+                      <a:solidFill>
+                        <a:srgbClr val="C9D3DB"/>
+                      </a:solidFill>
+                    </a:lnB>
+                    <a:solidFill>
+                      <a:srgbClr val="FFFFFF"/>
+                    </a:solidFill>
+                  </a:tcPr>
+                </a:tc>
+                <a:tc>
+                  <a:txBody>
+                    <a:bodyPr wrap="square"/>
+                    <a:lstStyle/>
+                    <a:p>
+                      <a:pPr algn="ctr"/>
+                      <a:r>
+                        <a:rPr sz="1350" b="0">
+                          <a:solidFill>
+                            <a:srgbClr val="15354B"/>
+                          </a:solidFill>
+                          <a:latin typeface="Arial"/>
+                        </a:rPr>
+                        <a:t>0.043</a:t>
+                      </a:r>
+                    </a:p>
+                  </a:txBody>
+                  <a:tcPr marL="50800" marR="50800" marT="19050" marB="19050" anchor="ctr">
+                    <a:lnL w="9525" cmpd="sng">
+                      <a:solidFill>
+                        <a:srgbClr val="C9D3DB"/>
+                      </a:solidFill>
+                    </a:lnL>
+                    <a:lnR w="9525" cmpd="sng">
+                      <a:solidFill>
+                        <a:srgbClr val="C9D3DB"/>
+                      </a:solidFill>
+                    </a:lnR>
+                    <a:lnT w="9525" cmpd="sng">
+                      <a:solidFill>
+                        <a:srgbClr val="C9D3DB"/>
+                      </a:solidFill>
+                    </a:lnT>
+                    <a:lnB w="9525" cmpd="sng">
+                      <a:solidFill>
+                        <a:srgbClr val="C9D3DB"/>
+                      </a:solidFill>
+                    </a:lnB>
+                    <a:solidFill>
+                      <a:srgbClr val="FFFFFF"/>
+                    </a:solidFill>
+                  </a:tcPr>
+                </a:tc>
+              </a:tr>
+              <a:tr h="274325">
+                <a:tc>
+                  <a:txBody>
+                    <a:bodyPr wrap="square"/>
+                    <a:lstStyle/>
+                    <a:p>
+                      <a:pPr algn="l"/>
+                      <a:r>
+                        <a:rPr sz="1350" b="0">
+                          <a:solidFill>
+                            <a:srgbClr val="15354B"/>
+                          </a:solidFill>
+                          <a:latin typeface="Arial"/>
+                        </a:rPr>
+                        <a:t>S3 (500)</a:t>
+                      </a:r>
+                    </a:p>
+                  </a:txBody>
+                  <a:tcPr marL="50800" marR="50800" marT="19050" marB="19050" anchor="ctr">
+                    <a:lnL w="9525" cmpd="sng">
+                      <a:solidFill>
+                        <a:srgbClr val="C9D3DB"/>
+                      </a:solidFill>
+                    </a:lnL>
+                    <a:lnR w="9525" cmpd="sng">
+                      <a:solidFill>
+                        <a:srgbClr val="C9D3DB"/>
+                      </a:solidFill>
+                    </a:lnR>
+                    <a:lnT w="9525" cmpd="sng">
+                      <a:solidFill>
+                        <a:srgbClr val="C9D3DB"/>
+                      </a:solidFill>
+                    </a:lnT>
+                    <a:lnB w="9525" cmpd="sng">
+                      <a:solidFill>
+                        <a:srgbClr val="C9D3DB"/>
+                      </a:solidFill>
+                    </a:lnB>
+                    <a:solidFill>
+                      <a:srgbClr val="FFFFFF"/>
+                    </a:solidFill>
+                  </a:tcPr>
+                </a:tc>
+                <a:tc>
+                  <a:txBody>
+                    <a:bodyPr wrap="square"/>
+                    <a:lstStyle/>
+                    <a:p>
+                      <a:pPr algn="l"/>
+                      <a:r>
+                        <a:rPr sz="1350" b="0">
+                          <a:solidFill>
+                            <a:srgbClr val="15354B"/>
+                          </a:solidFill>
+                          <a:latin typeface="Arial"/>
+                        </a:rPr>
+                        <a:t>A* energy</a:t>
+                      </a:r>
+                    </a:p>
+                  </a:txBody>
+                  <a:tcPr marL="50800" marR="50800" marT="19050" marB="19050" anchor="ctr">
+                    <a:lnL w="9525" cmpd="sng">
+                      <a:solidFill>
+                        <a:srgbClr val="C9D3DB"/>
+                      </a:solidFill>
+                    </a:lnL>
+                    <a:lnR w="9525" cmpd="sng">
+                      <a:solidFill>
+                        <a:srgbClr val="C9D3DB"/>
+                      </a:solidFill>
+                    </a:lnR>
+                    <a:lnT w="9525" cmpd="sng">
+                      <a:solidFill>
+                        <a:srgbClr val="C9D3DB"/>
+                      </a:solidFill>
+                    </a:lnT>
+                    <a:lnB w="9525" cmpd="sng">
+                      <a:solidFill>
+                        <a:srgbClr val="C9D3DB"/>
+                      </a:solidFill>
+                    </a:lnB>
+                    <a:solidFill>
+                      <a:srgbClr val="FFFFFF"/>
+                    </a:solidFill>
+                  </a:tcPr>
+                </a:tc>
+                <a:tc>
+                  <a:txBody>
+                    <a:bodyPr wrap="square"/>
+                    <a:lstStyle/>
+                    <a:p>
+                      <a:pPr algn="ctr"/>
+                      <a:r>
+                        <a:rPr sz="1350" b="0">
+                          <a:solidFill>
+                            <a:srgbClr val="15354B"/>
+                          </a:solidFill>
+                          <a:latin typeface="Arial"/>
+                        </a:rPr>
+                        <a:t>1</a:t>
+                      </a:r>
+                    </a:p>
+                  </a:txBody>
+                  <a:tcPr marL="50800" marR="50800" marT="19050" marB="19050" anchor="ctr">
+                    <a:lnL w="9525" cmpd="sng">
+                      <a:solidFill>
+                        <a:srgbClr val="C9D3DB"/>
+                      </a:solidFill>
+                    </a:lnL>
+                    <a:lnR w="9525" cmpd="sng">
+                      <a:solidFill>
+                        <a:srgbClr val="C9D3DB"/>
+                      </a:solidFill>
+                    </a:lnR>
+                    <a:lnT w="9525" cmpd="sng">
+                      <a:solidFill>
+                        <a:srgbClr val="C9D3DB"/>
+                      </a:solidFill>
+                    </a:lnT>
+                    <a:lnB w="9525" cmpd="sng">
+                      <a:solidFill>
+                        <a:srgbClr val="C9D3DB"/>
+                      </a:solidFill>
+                    </a:lnB>
+                    <a:solidFill>
+                      <a:srgbClr val="FFFFFF"/>
+                    </a:solidFill>
+                  </a:tcPr>
+                </a:tc>
+                <a:tc>
+                  <a:txBody>
+                    <a:bodyPr wrap="square"/>
+                    <a:lstStyle/>
+                    <a:p>
+                      <a:pPr algn="ctr"/>
+                      <a:r>
+                        <a:rPr sz="1350" b="0">
+                          <a:solidFill>
+                            <a:srgbClr val="15354B"/>
+                          </a:solidFill>
+                          <a:latin typeface="Arial"/>
+                        </a:rPr>
+                        <a:t>0.002</a:t>
+                      </a:r>
+                    </a:p>
+                  </a:txBody>
+                  <a:tcPr marL="50800" marR="50800" marT="19050" marB="19050" anchor="ctr">
+                    <a:lnL w="9525" cmpd="sng">
+                      <a:solidFill>
+                        <a:srgbClr val="C9D3DB"/>
+                      </a:solidFill>
+                    </a:lnL>
+                    <a:lnR w="9525" cmpd="sng">
+                      <a:solidFill>
+                        <a:srgbClr val="C9D3DB"/>
+                      </a:solidFill>
+                    </a:lnR>
+                    <a:lnT w="9525" cmpd="sng">
+                      <a:solidFill>
+                        <a:srgbClr val="C9D3DB"/>
+                      </a:solidFill>
+                    </a:lnT>
+                    <a:lnB w="9525" cmpd="sng">
+                      <a:solidFill>
+                        <a:srgbClr val="C9D3DB"/>
+                      </a:solidFill>
+                    </a:lnB>
+                    <a:solidFill>
+                      <a:srgbClr val="FFFFFF"/>
+                    </a:solidFill>
+                  </a:tcPr>
+                </a:tc>
+                <a:tc>
+                  <a:txBody>
+                    <a:bodyPr wrap="square"/>
+                    <a:lstStyle/>
+                    <a:p>
+                      <a:pPr algn="ctr"/>
+                      <a:r>
+                        <a:rPr sz="1350" b="0">
+                          <a:solidFill>
+                            <a:srgbClr val="15354B"/>
+                          </a:solidFill>
+                          <a:latin typeface="Arial"/>
+                        </a:rPr>
+                        <a:t>0.674</a:t>
+                      </a:r>
+                    </a:p>
+                  </a:txBody>
+                  <a:tcPr marL="50800" marR="50800" marT="19050" marB="19050" anchor="ctr">
+                    <a:lnL w="9525" cmpd="sng">
+                      <a:solidFill>
+                        <a:srgbClr val="C9D3DB"/>
+                      </a:solidFill>
+                    </a:lnL>
+                    <a:lnR w="9525" cmpd="sng">
+                      <a:solidFill>
+                        <a:srgbClr val="C9D3DB"/>
+                      </a:solidFill>
+                    </a:lnR>
+                    <a:lnT w="9525" cmpd="sng">
+                      <a:solidFill>
+                        <a:srgbClr val="C9D3DB"/>
+                      </a:solidFill>
+                    </a:lnT>
+                    <a:lnB w="9525" cmpd="sng">
+                      <a:solidFill>
+                        <a:srgbClr val="C9D3DB"/>
+                      </a:solidFill>
+                    </a:lnB>
+                    <a:solidFill>
+                      <a:srgbClr val="FFFFFF"/>
+                    </a:solidFill>
+                  </a:tcPr>
+                </a:tc>
+                <a:tc>
+                  <a:txBody>
+                    <a:bodyPr wrap="square"/>
+                    <a:lstStyle/>
+                    <a:p>
+                      <a:pPr algn="ctr"/>
+                      <a:r>
+                        <a:rPr sz="1350" b="0">
+                          <a:solidFill>
+                            <a:srgbClr val="15354B"/>
+                          </a:solidFill>
+                          <a:latin typeface="Arial"/>
+                        </a:rPr>
+                        <a:t>0.442</a:t>
+                      </a:r>
+                    </a:p>
+                  </a:txBody>
+                  <a:tcPr marL="50800" marR="50800" marT="19050" marB="19050" anchor="ctr">
+                    <a:lnL w="9525" cmpd="sng">
+                      <a:solidFill>
+                        <a:srgbClr val="C9D3DB"/>
+                      </a:solidFill>
+                    </a:lnL>
+                    <a:lnR w="9525" cmpd="sng">
+                      <a:solidFill>
+                        <a:srgbClr val="C9D3DB"/>
+                      </a:solidFill>
+                    </a:lnR>
+                    <a:lnT w="9525" cmpd="sng">
+                      <a:solidFill>
+                        <a:srgbClr val="C9D3DB"/>
+                      </a:solidFill>
+                    </a:lnT>
+                    <a:lnB w="9525" cmpd="sng">
+                      <a:solidFill>
+                        <a:srgbClr val="C9D3DB"/>
+                      </a:solidFill>
+                    </a:lnB>
+                    <a:solidFill>
+                      <a:srgbClr val="FFFFFF"/>
+                    </a:solidFill>
+                  </a:tcPr>
+                </a:tc>
+              </a:tr>
+            </a:tbl>
+          </a:graphicData>
+        </a:graphic>
+      </p:graphicFrame>
+      <p:sp>
+        <p:nvSpPr>
+          <p:cNvPr id="50" name="Tier 1 Explanation"/>
+          <p:cNvSpPr txBox="1"/>
+          <p:nvPr/>
+        </p:nvSpPr>
+        <p:spPr>
+          <a:xfrm>
+            <a:off x="20167687" y="7435179"/>
+            <a:ext cx="9421677" cy="605409"/>
+          </a:xfrm>
+          <a:prstGeom prst="rect">
+            <a:avLst/>
+          </a:prstGeom>
+          <a:noFill/>
+        </p:spPr>
+        <p:txBody>
+          <a:bodyPr wrap="square" lIns="0" rIns="0" tIns="0" bIns="0" anchor="t">
+            <a:spAutoFit/>
+          </a:bodyPr>
+          <a:lstStyle/>
+          <a:p>
+            <a:pPr algn="l">
+              <a:lnSpc>
+                <a:spcPts val="1900"/>
+              </a:lnSpc>
+            </a:pPr>
+            <a:r>
+              <a:rPr sz="1550" b="0">
+                <a:solidFill>
+                  <a:srgbClr val="15354B"/>
+                </a:solidFill>
+                <a:latin typeface="Arial"/>
+              </a:rPr>
+              <a:t>NAMOA* recovers the whole reference front (IGD 0) with the best HV; MOPSO finds only 12 and 38 routes and A* one. Exactness costs 33.8 s on S3, paid once per region and weather window.</a:t>
+            </a:r>
+          </a:p>
+        </p:txBody>
+      </p:sp>
+      <p:sp>
+        <p:nvSpPr>
+          <p:cNvPr id="51" name="Tier 2 Table Title"/>
+          <p:cNvSpPr txBox="1"/>
+          <p:nvPr/>
+        </p:nvSpPr>
+        <p:spPr>
+          <a:xfrm>
+            <a:off x="20167687" y="8191940"/>
+            <a:ext cx="9421677" cy="340542"/>
+          </a:xfrm>
+          <a:prstGeom prst="rect">
+            <a:avLst/>
+          </a:prstGeom>
+          <a:noFill/>
+        </p:spPr>
+        <p:txBody>
+          <a:bodyPr wrap="square" lIns="0" rIns="0" tIns="0" bIns="0" anchor="t">
+            <a:spAutoFit/>
+          </a:bodyPr>
+          <a:lstStyle/>
+          <a:p>
+            <a:pPr algn="l"/>
+            <a:r>
+              <a:rPr sz="1700" b="1">
+                <a:solidFill>
+                  <a:srgbClr val="087F8C"/>
+                </a:solidFill>
+                <a:latin typeface="Arial"/>
+              </a:rPr>
+              <a:t>Tier 2 picks on the S3 front (115 routes)</a:t>
+            </a:r>
+          </a:p>
+        </p:txBody>
+      </p:sp>
+      <p:graphicFrame>
+        <p:nvGraphicFramePr>
+          <p:cNvPr id="52" name="Tier 2 Picks Table"/>
+          <p:cNvGraphicFramePr>
+            <a:graphicFrameLocks noGrp="1"/>
+          </p:cNvGraphicFramePr>
+          <p:nvPr/>
+        </p:nvGraphicFramePr>
+        <p:xfrm>
+          <a:off x="20129849" y="8551402"/>
+          <a:ext cx="9421674" cy="1371625"/>
+        </p:xfrm>
+        <a:graphic>
+          <a:graphicData uri="http://schemas.openxmlformats.org/drawingml/2006/table">
+            <a:tbl>
+              <a:tblPr firstRow="1" bandRow="0"/>
+              <a:tblGrid>
+                <a:gridCol w="2837854"/>
+                <a:gridCol w="889194"/>
+                <a:gridCol w="983789"/>
+                <a:gridCol w="832437"/>
+                <a:gridCol w="1021627"/>
+                <a:gridCol w="1494603"/>
+                <a:gridCol w="1362170"/>
+              </a:tblGrid>
+              <a:tr h="274325">
+                <a:tc>
+                  <a:txBody>
+                    <a:bodyPr wrap="square"/>
+                    <a:lstStyle/>
+                    <a:p>
+                      <a:pPr algn="l"/>
+                      <a:r>
+                        <a:rPr sz="1350" b="1">
+                          <a:solidFill>
+                            <a:srgbClr val="FFFFFF"/>
+                          </a:solidFill>
+                          <a:latin typeface="Arial"/>
+                        </a:rPr>
+                        <a:t>Preset (F, W, U, P)</a:t>
+                      </a:r>
+                    </a:p>
+                  </a:txBody>
+                  <a:tcPr marL="50800" marR="50800" marT="19050" marB="19050" anchor="ctr">
+                    <a:lnL w="9525" cmpd="sng">
+                      <a:solidFill>
+                        <a:srgbClr val="15354B"/>
+                      </a:solidFill>
+                    </a:lnL>
+                    <a:lnR w="9525" cmpd="sng">
+                      <a:solidFill>
+                        <a:srgbClr val="15354B"/>
+                      </a:solidFill>
+                    </a:lnR>
+                    <a:lnT w="9525" cmpd="sng">
+                      <a:solidFill>
+                        <a:srgbClr val="15354B"/>
+                      </a:solidFill>
+                    </a:lnT>
+                    <a:lnB w="9525" cmpd="sng">
+                      <a:solidFill>
+                        <a:srgbClr val="15354B"/>
+                      </a:solidFill>
+                    </a:lnB>
+                    <a:solidFill>
+                      <a:srgbClr val="15354B"/>
+                    </a:solidFill>
+                  </a:tcPr>
+                </a:tc>
+                <a:tc>
+                  <a:txBody>
+                    <a:bodyPr wrap="square"/>
+                    <a:lstStyle/>
+                    <a:p>
+                      <a:pPr algn="ctr"/>
+                      <a:r>
+                        <a:rPr sz="1350" b="1">
+                          <a:solidFill>
+                            <a:srgbClr val="FFFFFF"/>
+                          </a:solidFill>
+                          <a:latin typeface="Arial"/>
+                        </a:rPr>
+                        <a:t>Dist</a:t>
+                      </a:r>
+                    </a:p>
+                  </a:txBody>
+                  <a:tcPr marL="50800" marR="50800" marT="19050" marB="19050" anchor="ctr">
+                    <a:lnL w="9525" cmpd="sng">
+                      <a:solidFill>
+                        <a:srgbClr val="15354B"/>
+                      </a:solidFill>
+                    </a:lnL>
+                    <a:lnR w="9525" cmpd="sng">
+                      <a:solidFill>
+                        <a:srgbClr val="15354B"/>
+                      </a:solidFill>
+                    </a:lnR>
+                    <a:lnT w="9525" cmpd="sng">
+                      <a:solidFill>
+                        <a:srgbClr val="15354B"/>
+                      </a:solidFill>
+                    </a:lnT>
+                    <a:lnB w="9525" cmpd="sng">
+                      <a:solidFill>
+                        <a:srgbClr val="15354B"/>
+                      </a:solidFill>
+                    </a:lnB>
+                    <a:solidFill>
+                      <a:srgbClr val="15354B"/>
+                    </a:solidFill>
+                  </a:tcPr>
+                </a:tc>
+                <a:tc>
+                  <a:txBody>
+                    <a:bodyPr wrap="square"/>
+                    <a:lstStyle/>
+                    <a:p>
+                      <a:pPr algn="ctr"/>
+                      <a:r>
+                        <a:rPr sz="1350" b="1">
+                          <a:solidFill>
+                            <a:srgbClr val="FFFFFF"/>
+                          </a:solidFill>
+                          <a:latin typeface="Arial"/>
+                        </a:rPr>
+                        <a:t>Energy</a:t>
+                      </a:r>
+                    </a:p>
+                  </a:txBody>
+                  <a:tcPr marL="50800" marR="50800" marT="19050" marB="19050" anchor="ctr">
+                    <a:lnL w="9525" cmpd="sng">
+                      <a:solidFill>
+                        <a:srgbClr val="15354B"/>
+                      </a:solidFill>
+                    </a:lnL>
+                    <a:lnR w="9525" cmpd="sng">
+                      <a:solidFill>
+                        <a:srgbClr val="15354B"/>
+                      </a:solidFill>
+                    </a:lnR>
+                    <a:lnT w="9525" cmpd="sng">
+                      <a:solidFill>
+                        <a:srgbClr val="15354B"/>
+                      </a:solidFill>
+                    </a:lnT>
+                    <a:lnB w="9525" cmpd="sng">
+                      <a:solidFill>
+                        <a:srgbClr val="15354B"/>
+                      </a:solidFill>
+                    </a:lnB>
+                    <a:solidFill>
+                      <a:srgbClr val="15354B"/>
+                    </a:solidFill>
+                  </a:tcPr>
+                </a:tc>
+                <a:tc>
+                  <a:txBody>
+                    <a:bodyPr wrap="square"/>
+                    <a:lstStyle/>
+                    <a:p>
+                      <a:pPr algn="ctr"/>
+                      <a:r>
+                        <a:rPr sz="1350" b="1">
+                          <a:solidFill>
+                            <a:srgbClr val="FFFFFF"/>
+                          </a:solidFill>
+                          <a:latin typeface="Arial"/>
+                        </a:rPr>
+                        <a:t>Risk</a:t>
+                      </a:r>
+                    </a:p>
+                  </a:txBody>
+                  <a:tcPr marL="50800" marR="50800" marT="19050" marB="19050" anchor="ctr">
+                    <a:lnL w="9525" cmpd="sng">
+                      <a:solidFill>
+                        <a:srgbClr val="15354B"/>
+                      </a:solidFill>
+                    </a:lnL>
+                    <a:lnR w="9525" cmpd="sng">
+                      <a:solidFill>
+                        <a:srgbClr val="15354B"/>
+                      </a:solidFill>
+                    </a:lnR>
+                    <a:lnT w="9525" cmpd="sng">
+                      <a:solidFill>
+                        <a:srgbClr val="15354B"/>
+                      </a:solidFill>
+                    </a:lnT>
+                    <a:lnB w="9525" cmpd="sng">
+                      <a:solidFill>
+                        <a:srgbClr val="15354B"/>
+                      </a:solidFill>
+                    </a:lnB>
+                    <a:solidFill>
+                      <a:srgbClr val="15354B"/>
+                    </a:solidFill>
+                  </a:tcPr>
+                </a:tc>
+                <a:tc>
+                  <a:txBody>
+                    <a:bodyPr wrap="square"/>
+                    <a:lstStyle/>
+                    <a:p>
+                      <a:pPr algn="ctr"/>
+                      <a:r>
+                        <a:rPr sz="1350" b="1">
+                          <a:solidFill>
+                            <a:srgbClr val="FFFFFF"/>
+                          </a:solidFill>
+                          <a:latin typeface="Arial"/>
+                        </a:rPr>
+                        <a:t>Risk rank</a:t>
+                      </a:r>
+                    </a:p>
+                  </a:txBody>
+                  <a:tcPr marL="50800" marR="50800" marT="19050" marB="19050" anchor="ctr">
+                    <a:lnL w="9525" cmpd="sng">
+                      <a:solidFill>
+                        <a:srgbClr val="15354B"/>
+                      </a:solidFill>
+                    </a:lnL>
+                    <a:lnR w="9525" cmpd="sng">
+                      <a:solidFill>
+                        <a:srgbClr val="15354B"/>
+                      </a:solidFill>
+                    </a:lnR>
+                    <a:lnT w="9525" cmpd="sng">
+                      <a:solidFill>
+                        <a:srgbClr val="15354B"/>
+                      </a:solidFill>
+                    </a:lnT>
+                    <a:lnB w="9525" cmpd="sng">
+                      <a:solidFill>
+                        <a:srgbClr val="15354B"/>
+                      </a:solidFill>
+                    </a:lnB>
+                    <a:solidFill>
+                      <a:srgbClr val="15354B"/>
+                    </a:solidFill>
+                  </a:tcPr>
+                </a:tc>
+                <a:tc>
+                  <a:txBody>
+                    <a:bodyPr wrap="square"/>
+                    <a:lstStyle/>
+                    <a:p>
+                      <a:pPr algn="ctr"/>
+                      <a:r>
+                        <a:rPr sz="1350" b="1">
+                          <a:solidFill>
+                            <a:srgbClr val="FFFFFF"/>
+                          </a:solidFill>
+                          <a:latin typeface="Arial"/>
+                        </a:rPr>
+                        <a:t>Point type</a:t>
+                      </a:r>
+                    </a:p>
+                  </a:txBody>
+                  <a:tcPr marL="50800" marR="50800" marT="19050" marB="19050" anchor="ctr">
+                    <a:lnL w="9525" cmpd="sng">
+                      <a:solidFill>
+                        <a:srgbClr val="15354B"/>
+                      </a:solidFill>
+                    </a:lnL>
+                    <a:lnR w="9525" cmpd="sng">
+                      <a:solidFill>
+                        <a:srgbClr val="15354B"/>
+                      </a:solidFill>
+                    </a:lnR>
+                    <a:lnT w="9525" cmpd="sng">
+                      <a:solidFill>
+                        <a:srgbClr val="15354B"/>
+                      </a:solidFill>
+                    </a:lnT>
+                    <a:lnB w="9525" cmpd="sng">
+                      <a:solidFill>
+                        <a:srgbClr val="15354B"/>
+                      </a:solidFill>
+                    </a:lnB>
+                    <a:solidFill>
+                      <a:srgbClr val="15354B"/>
+                    </a:solidFill>
+                  </a:tcPr>
+                </a:tc>
+                <a:tc>
+                  <a:txBody>
+                    <a:bodyPr wrap="square"/>
+                    <a:lstStyle/>
+                    <a:p>
+                      <a:pPr algn="ctr"/>
+                      <a:r>
+                        <a:rPr sz="1350" b="1">
+                          <a:solidFill>
+                            <a:srgbClr val="FFFFFF"/>
+                          </a:solidFill>
+                          <a:latin typeface="Arial"/>
+                        </a:rPr>
+                        <a:t>Latency</a:t>
+                      </a:r>
+                    </a:p>
+                  </a:txBody>
+                  <a:tcPr marL="50800" marR="50800" marT="19050" marB="19050" anchor="ctr">
+                    <a:lnL w="9525" cmpd="sng">
+                      <a:solidFill>
+                        <a:srgbClr val="15354B"/>
+                      </a:solidFill>
+                    </a:lnL>
+                    <a:lnR w="9525" cmpd="sng">
+                      <a:solidFill>
+                        <a:srgbClr val="15354B"/>
+                      </a:solidFill>
+                    </a:lnR>
+                    <a:lnT w="9525" cmpd="sng">
+                      <a:solidFill>
+                        <a:srgbClr val="15354B"/>
+                      </a:solidFill>
+                    </a:lnT>
+                    <a:lnB w="9525" cmpd="sng">
+                      <a:solidFill>
+                        <a:srgbClr val="15354B"/>
+                      </a:solidFill>
+                    </a:lnB>
+                    <a:solidFill>
+                      <a:srgbClr val="15354B"/>
+                    </a:solidFill>
+                  </a:tcPr>
+                </a:tc>
+              </a:tr>
+              <a:tr h="274325">
+                <a:tc>
+                  <a:txBody>
+                    <a:bodyPr wrap="square"/>
+                    <a:lstStyle/>
+                    <a:p>
+                      <a:pPr algn="l"/>
+                      <a:r>
+                        <a:rPr sz="1350" b="0">
+                          <a:solidFill>
+                            <a:srgbClr val="15354B"/>
+                          </a:solidFill>
+                          <a:latin typeface="Arial"/>
+                        </a:rPr>
+                        <a:t>Fragile medical (5,1,1,3)</a:t>
+                      </a:r>
+                    </a:p>
+                  </a:txBody>
+                  <a:tcPr marL="50800" marR="50800" marT="19050" marB="19050" anchor="ctr">
+                    <a:lnL w="9525" cmpd="sng">
+                      <a:solidFill>
+                        <a:srgbClr val="C9D3DB"/>
+                      </a:solidFill>
+                    </a:lnL>
+                    <a:lnR w="9525" cmpd="sng">
+                      <a:solidFill>
+                        <a:srgbClr val="C9D3DB"/>
+                      </a:solidFill>
+                    </a:lnR>
+                    <a:lnT w="9525" cmpd="sng">
+                      <a:solidFill>
+                        <a:srgbClr val="C9D3DB"/>
+                      </a:solidFill>
+                    </a:lnT>
+                    <a:lnB w="9525" cmpd="sng">
+                      <a:solidFill>
+                        <a:srgbClr val="C9D3DB"/>
+                      </a:solidFill>
+                    </a:lnB>
+                    <a:solidFill>
+                      <a:srgbClr val="FFFFFF"/>
+                    </a:solidFill>
+                  </a:tcPr>
+                </a:tc>
+                <a:tc>
+                  <a:txBody>
+                    <a:bodyPr wrap="square"/>
+                    <a:lstStyle/>
+                    <a:p>
+                      <a:pPr algn="ctr"/>
+                      <a:r>
+                        <a:rPr sz="1350" b="0">
+                          <a:solidFill>
+                            <a:srgbClr val="15354B"/>
+                          </a:solidFill>
+                          <a:latin typeface="Arial"/>
+                        </a:rPr>
+                        <a:t>41.02</a:t>
+                      </a:r>
+                    </a:p>
+                  </a:txBody>
+                  <a:tcPr marL="50800" marR="50800" marT="19050" marB="19050" anchor="ctr">
+                    <a:lnL w="9525" cmpd="sng">
+                      <a:solidFill>
+                        <a:srgbClr val="C9D3DB"/>
+                      </a:solidFill>
+                    </a:lnL>
+                    <a:lnR w="9525" cmpd="sng">
+                      <a:solidFill>
+                        <a:srgbClr val="C9D3DB"/>
+                      </a:solidFill>
+                    </a:lnR>
+                    <a:lnT w="9525" cmpd="sng">
+                      <a:solidFill>
+                        <a:srgbClr val="C9D3DB"/>
+                      </a:solidFill>
+                    </a:lnT>
+                    <a:lnB w="9525" cmpd="sng">
+                      <a:solidFill>
+                        <a:srgbClr val="C9D3DB"/>
+                      </a:solidFill>
+                    </a:lnB>
+                    <a:solidFill>
+                      <a:srgbClr val="FFFFFF"/>
+                    </a:solidFill>
+                  </a:tcPr>
+                </a:tc>
+                <a:tc>
+                  <a:txBody>
+                    <a:bodyPr wrap="square"/>
+                    <a:lstStyle/>
+                    <a:p>
+                      <a:pPr algn="ctr"/>
+                      <a:r>
+                        <a:rPr sz="1350" b="0">
+                          <a:solidFill>
+                            <a:srgbClr val="15354B"/>
+                          </a:solidFill>
+                          <a:latin typeface="Arial"/>
+                        </a:rPr>
+                        <a:t>45.86</a:t>
+                      </a:r>
+                    </a:p>
+                  </a:txBody>
+                  <a:tcPr marL="50800" marR="50800" marT="19050" marB="19050" anchor="ctr">
+                    <a:lnL w="9525" cmpd="sng">
+                      <a:solidFill>
+                        <a:srgbClr val="C9D3DB"/>
+                      </a:solidFill>
+                    </a:lnL>
+                    <a:lnR w="9525" cmpd="sng">
+                      <a:solidFill>
+                        <a:srgbClr val="C9D3DB"/>
+                      </a:solidFill>
+                    </a:lnR>
+                    <a:lnT w="9525" cmpd="sng">
+                      <a:solidFill>
+                        <a:srgbClr val="C9D3DB"/>
+                      </a:solidFill>
+                    </a:lnT>
+                    <a:lnB w="9525" cmpd="sng">
+                      <a:solidFill>
+                        <a:srgbClr val="C9D3DB"/>
+                      </a:solidFill>
+                    </a:lnB>
+                    <a:solidFill>
+                      <a:srgbClr val="FFFFFF"/>
+                    </a:solidFill>
+                  </a:tcPr>
+                </a:tc>
+                <a:tc>
+                  <a:txBody>
+                    <a:bodyPr wrap="square"/>
+                    <a:lstStyle/>
+                    <a:p>
+                      <a:pPr algn="ctr"/>
+                      <a:r>
+                        <a:rPr sz="1350" b="1">
+                          <a:solidFill>
+                            <a:srgbClr val="15354B"/>
+                          </a:solidFill>
+                          <a:latin typeface="Arial"/>
+                        </a:rPr>
+                        <a:t>1.92</a:t>
+                      </a:r>
+                    </a:p>
+                  </a:txBody>
+                  <a:tcPr marL="50800" marR="50800" marT="19050" marB="19050" anchor="ctr">
+                    <a:lnL w="9525" cmpd="sng">
+                      <a:solidFill>
+                        <a:srgbClr val="C9D3DB"/>
+                      </a:solidFill>
+                    </a:lnL>
+                    <a:lnR w="9525" cmpd="sng">
+                      <a:solidFill>
+                        <a:srgbClr val="C9D3DB"/>
+                      </a:solidFill>
+                    </a:lnR>
+                    <a:lnT w="9525" cmpd="sng">
+                      <a:solidFill>
+                        <a:srgbClr val="C9D3DB"/>
+                      </a:solidFill>
+                    </a:lnT>
+                    <a:lnB w="9525" cmpd="sng">
+                      <a:solidFill>
+                        <a:srgbClr val="C9D3DB"/>
+                      </a:solidFill>
+                    </a:lnB>
+                    <a:solidFill>
+                      <a:srgbClr val="FFFFFF"/>
+                    </a:solidFill>
+                  </a:tcPr>
+                </a:tc>
+                <a:tc>
+                  <a:txBody>
+                    <a:bodyPr wrap="square"/>
+                    <a:lstStyle/>
+                    <a:p>
+                      <a:pPr algn="ctr"/>
+                      <a:r>
+                        <a:rPr sz="1350" b="0">
+                          <a:solidFill>
+                            <a:srgbClr val="15354B"/>
+                          </a:solidFill>
+                          <a:latin typeface="Arial"/>
+                        </a:rPr>
+                        <a:t>25</a:t>
+                      </a:r>
+                    </a:p>
+                  </a:txBody>
+                  <a:tcPr marL="50800" marR="50800" marT="19050" marB="19050" anchor="ctr">
+                    <a:lnL w="9525" cmpd="sng">
+                      <a:solidFill>
+                        <a:srgbClr val="C9D3DB"/>
+                      </a:solidFill>
+                    </a:lnL>
+                    <a:lnR w="9525" cmpd="sng">
+                      <a:solidFill>
+                        <a:srgbClr val="C9D3DB"/>
+                      </a:solidFill>
+                    </a:lnR>
+                    <a:lnT w="9525" cmpd="sng">
+                      <a:solidFill>
+                        <a:srgbClr val="C9D3DB"/>
+                      </a:solidFill>
+                    </a:lnT>
+                    <a:lnB w="9525" cmpd="sng">
+                      <a:solidFill>
+                        <a:srgbClr val="C9D3DB"/>
+                      </a:solidFill>
+                    </a:lnB>
+                    <a:solidFill>
+                      <a:srgbClr val="FFFFFF"/>
+                    </a:solidFill>
+                  </a:tcPr>
+                </a:tc>
+                <a:tc>
+                  <a:txBody>
+                    <a:bodyPr wrap="square"/>
+                    <a:lstStyle/>
+                    <a:p>
+                      <a:pPr algn="ctr"/>
+                      <a:r>
+                        <a:rPr sz="1350" b="0">
+                          <a:solidFill>
+                            <a:srgbClr val="15354B"/>
+                          </a:solidFill>
+                          <a:latin typeface="Arial"/>
+                        </a:rPr>
+                        <a:t>non-extreme</a:t>
+                      </a:r>
+                    </a:p>
+                  </a:txBody>
+                  <a:tcPr marL="50800" marR="50800" marT="19050" marB="19050" anchor="ctr">
+                    <a:lnL w="9525" cmpd="sng">
+                      <a:solidFill>
+                        <a:srgbClr val="C9D3DB"/>
+                      </a:solidFill>
+                    </a:lnL>
+                    <a:lnR w="9525" cmpd="sng">
+                      <a:solidFill>
+                        <a:srgbClr val="C9D3DB"/>
+                      </a:solidFill>
+                    </a:lnR>
+                    <a:lnT w="9525" cmpd="sng">
+                      <a:solidFill>
+                        <a:srgbClr val="C9D3DB"/>
+                      </a:solidFill>
+                    </a:lnT>
+                    <a:lnB w="9525" cmpd="sng">
+                      <a:solidFill>
+                        <a:srgbClr val="C9D3DB"/>
+                      </a:solidFill>
+                    </a:lnB>
+                    <a:solidFill>
+                      <a:srgbClr val="FFFFFF"/>
+                    </a:solidFill>
+                  </a:tcPr>
+                </a:tc>
+                <a:tc>
+                  <a:txBody>
+                    <a:bodyPr wrap="square"/>
+                    <a:lstStyle/>
+                    <a:p>
+                      <a:pPr algn="ctr"/>
+                      <a:r>
+                        <a:rPr sz="1350" b="0">
+                          <a:solidFill>
+                            <a:srgbClr val="15354B"/>
+                          </a:solidFill>
+                          <a:latin typeface="Arial"/>
+                        </a:rPr>
+                        <a:t>0.144 ms</a:t>
+                      </a:r>
+                    </a:p>
+                  </a:txBody>
+                  <a:tcPr marL="50800" marR="50800" marT="19050" marB="19050" anchor="ctr">
+                    <a:lnL w="9525" cmpd="sng">
+                      <a:solidFill>
+                        <a:srgbClr val="C9D3DB"/>
+                      </a:solidFill>
+                    </a:lnL>
+                    <a:lnR w="9525" cmpd="sng">
+                      <a:solidFill>
+                        <a:srgbClr val="C9D3DB"/>
+                      </a:solidFill>
+                    </a:lnR>
+                    <a:lnT w="9525" cmpd="sng">
+                      <a:solidFill>
+                        <a:srgbClr val="C9D3DB"/>
+                      </a:solidFill>
+                    </a:lnT>
+                    <a:lnB w="9525" cmpd="sng">
+                      <a:solidFill>
+                        <a:srgbClr val="C9D3DB"/>
+                      </a:solidFill>
+                    </a:lnB>
+                    <a:solidFill>
+                      <a:srgbClr val="FFFFFF"/>
+                    </a:solidFill>
+                  </a:tcPr>
+                </a:tc>
+              </a:tr>
+              <a:tr h="274325">
+                <a:tc>
+                  <a:txBody>
+                    <a:bodyPr wrap="square"/>
+                    <a:lstStyle/>
+                    <a:p>
+                      <a:pPr algn="l"/>
+                      <a:r>
+                        <a:rPr sz="1350" b="0">
+                          <a:solidFill>
+                            <a:srgbClr val="15354B"/>
+                          </a:solidFill>
+                          <a:latin typeface="Arial"/>
+                        </a:rPr>
+                        <a:t>Emergency medicine (1,1,3,5)</a:t>
+                      </a:r>
+                    </a:p>
+                  </a:txBody>
+                  <a:tcPr marL="50800" marR="50800" marT="19050" marB="19050" anchor="ctr">
+                    <a:lnL w="9525" cmpd="sng">
+                      <a:solidFill>
+                        <a:srgbClr val="C9D3DB"/>
+                      </a:solidFill>
+                    </a:lnL>
+                    <a:lnR w="9525" cmpd="sng">
+                      <a:solidFill>
+                        <a:srgbClr val="C9D3DB"/>
+                      </a:solidFill>
+                    </a:lnR>
+                    <a:lnT w="9525" cmpd="sng">
+                      <a:solidFill>
+                        <a:srgbClr val="C9D3DB"/>
+                      </a:solidFill>
+                    </a:lnT>
+                    <a:lnB w="9525" cmpd="sng">
+                      <a:solidFill>
+                        <a:srgbClr val="C9D3DB"/>
+                      </a:solidFill>
+                    </a:lnB>
+                    <a:solidFill>
+                      <a:srgbClr val="FFFFFF"/>
+                    </a:solidFill>
+                  </a:tcPr>
+                </a:tc>
+                <a:tc>
+                  <a:txBody>
+                    <a:bodyPr wrap="square"/>
+                    <a:lstStyle/>
+                    <a:p>
+                      <a:pPr algn="ctr"/>
+                      <a:r>
+                        <a:rPr sz="1350" b="1">
+                          <a:solidFill>
+                            <a:srgbClr val="15354B"/>
+                          </a:solidFill>
+                          <a:latin typeface="Arial"/>
+                        </a:rPr>
+                        <a:t>37.11</a:t>
+                      </a:r>
+                    </a:p>
+                  </a:txBody>
+                  <a:tcPr marL="50800" marR="50800" marT="19050" marB="19050" anchor="ctr">
+                    <a:lnL w="9525" cmpd="sng">
+                      <a:solidFill>
+                        <a:srgbClr val="C9D3DB"/>
+                      </a:solidFill>
+                    </a:lnL>
+                    <a:lnR w="9525" cmpd="sng">
+                      <a:solidFill>
+                        <a:srgbClr val="C9D3DB"/>
+                      </a:solidFill>
+                    </a:lnR>
+                    <a:lnT w="9525" cmpd="sng">
+                      <a:solidFill>
+                        <a:srgbClr val="C9D3DB"/>
+                      </a:solidFill>
+                    </a:lnT>
+                    <a:lnB w="9525" cmpd="sng">
+                      <a:solidFill>
+                        <a:srgbClr val="C9D3DB"/>
+                      </a:solidFill>
+                    </a:lnB>
+                    <a:solidFill>
+                      <a:srgbClr val="FFFFFF"/>
+                    </a:solidFill>
+                  </a:tcPr>
+                </a:tc>
+                <a:tc>
+                  <a:txBody>
+                    <a:bodyPr wrap="square"/>
+                    <a:lstStyle/>
+                    <a:p>
+                      <a:pPr algn="ctr"/>
+                      <a:r>
+                        <a:rPr sz="1350" b="0">
+                          <a:solidFill>
+                            <a:srgbClr val="15354B"/>
+                          </a:solidFill>
+                          <a:latin typeface="Arial"/>
+                        </a:rPr>
+                        <a:t>44.71</a:t>
+                      </a:r>
+                    </a:p>
+                  </a:txBody>
+                  <a:tcPr marL="50800" marR="50800" marT="19050" marB="19050" anchor="ctr">
+                    <a:lnL w="9525" cmpd="sng">
+                      <a:solidFill>
+                        <a:srgbClr val="C9D3DB"/>
+                      </a:solidFill>
+                    </a:lnL>
+                    <a:lnR w="9525" cmpd="sng">
+                      <a:solidFill>
+                        <a:srgbClr val="C9D3DB"/>
+                      </a:solidFill>
+                    </a:lnR>
+                    <a:lnT w="9525" cmpd="sng">
+                      <a:solidFill>
+                        <a:srgbClr val="C9D3DB"/>
+                      </a:solidFill>
+                    </a:lnT>
+                    <a:lnB w="9525" cmpd="sng">
+                      <a:solidFill>
+                        <a:srgbClr val="C9D3DB"/>
+                      </a:solidFill>
+                    </a:lnB>
+                    <a:solidFill>
+                      <a:srgbClr val="FFFFFF"/>
+                    </a:solidFill>
+                  </a:tcPr>
+                </a:tc>
+                <a:tc>
+                  <a:txBody>
+                    <a:bodyPr wrap="square"/>
+                    <a:lstStyle/>
+                    <a:p>
+                      <a:pPr algn="ctr"/>
+                      <a:r>
+                        <a:rPr sz="1350" b="0">
+                          <a:solidFill>
+                            <a:srgbClr val="15354B"/>
+                          </a:solidFill>
+                          <a:latin typeface="Arial"/>
+                        </a:rPr>
+                        <a:t>6.56</a:t>
+                      </a:r>
+                    </a:p>
+                  </a:txBody>
+                  <a:tcPr marL="50800" marR="50800" marT="19050" marB="19050" anchor="ctr">
+                    <a:lnL w="9525" cmpd="sng">
+                      <a:solidFill>
+                        <a:srgbClr val="C9D3DB"/>
+                      </a:solidFill>
+                    </a:lnL>
+                    <a:lnR w="9525" cmpd="sng">
+                      <a:solidFill>
+                        <a:srgbClr val="C9D3DB"/>
+                      </a:solidFill>
+                    </a:lnR>
+                    <a:lnT w="9525" cmpd="sng">
+                      <a:solidFill>
+                        <a:srgbClr val="C9D3DB"/>
+                      </a:solidFill>
+                    </a:lnT>
+                    <a:lnB w="9525" cmpd="sng">
+                      <a:solidFill>
+                        <a:srgbClr val="C9D3DB"/>
+                      </a:solidFill>
+                    </a:lnB>
+                    <a:solidFill>
+                      <a:srgbClr val="FFFFFF"/>
+                    </a:solidFill>
+                  </a:tcPr>
+                </a:tc>
+                <a:tc>
+                  <a:txBody>
+                    <a:bodyPr wrap="square"/>
+                    <a:lstStyle/>
+                    <a:p>
+                      <a:pPr algn="ctr"/>
+                      <a:r>
+                        <a:rPr sz="1350" b="0">
+                          <a:solidFill>
+                            <a:srgbClr val="15354B"/>
+                          </a:solidFill>
+                          <a:latin typeface="Arial"/>
+                        </a:rPr>
+                        <a:t>94</a:t>
+                      </a:r>
+                    </a:p>
+                  </a:txBody>
+                  <a:tcPr marL="50800" marR="50800" marT="19050" marB="19050" anchor="ctr">
+                    <a:lnL w="9525" cmpd="sng">
+                      <a:solidFill>
+                        <a:srgbClr val="C9D3DB"/>
+                      </a:solidFill>
+                    </a:lnL>
+                    <a:lnR w="9525" cmpd="sng">
+                      <a:solidFill>
+                        <a:srgbClr val="C9D3DB"/>
+                      </a:solidFill>
+                    </a:lnR>
+                    <a:lnT w="9525" cmpd="sng">
+                      <a:solidFill>
+                        <a:srgbClr val="C9D3DB"/>
+                      </a:solidFill>
+                    </a:lnT>
+                    <a:lnB w="9525" cmpd="sng">
+                      <a:solidFill>
+                        <a:srgbClr val="C9D3DB"/>
+                      </a:solidFill>
+                    </a:lnB>
+                    <a:solidFill>
+                      <a:srgbClr val="FFFFFF"/>
+                    </a:solidFill>
+                  </a:tcPr>
+                </a:tc>
+                <a:tc>
+                  <a:txBody>
+                    <a:bodyPr wrap="square"/>
+                    <a:lstStyle/>
+                    <a:p>
+                      <a:pPr algn="ctr"/>
+                      <a:r>
+                        <a:rPr sz="1350" b="0">
+                          <a:solidFill>
+                            <a:srgbClr val="15354B"/>
+                          </a:solidFill>
+                          <a:latin typeface="Arial"/>
+                        </a:rPr>
+                        <a:t>non-extreme</a:t>
+                      </a:r>
+                    </a:p>
+                  </a:txBody>
+                  <a:tcPr marL="50800" marR="50800" marT="19050" marB="19050" anchor="ctr">
+                    <a:lnL w="9525" cmpd="sng">
+                      <a:solidFill>
+                        <a:srgbClr val="C9D3DB"/>
+                      </a:solidFill>
+                    </a:lnL>
+                    <a:lnR w="9525" cmpd="sng">
+                      <a:solidFill>
+                        <a:srgbClr val="C9D3DB"/>
+                      </a:solidFill>
+                    </a:lnR>
+                    <a:lnT w="9525" cmpd="sng">
+                      <a:solidFill>
+                        <a:srgbClr val="C9D3DB"/>
+                      </a:solidFill>
+                    </a:lnT>
+                    <a:lnB w="9525" cmpd="sng">
+                      <a:solidFill>
+                        <a:srgbClr val="C9D3DB"/>
+                      </a:solidFill>
+                    </a:lnB>
+                    <a:solidFill>
+                      <a:srgbClr val="FFFFFF"/>
+                    </a:solidFill>
+                  </a:tcPr>
+                </a:tc>
+                <a:tc>
+                  <a:txBody>
+                    <a:bodyPr wrap="square"/>
+                    <a:lstStyle/>
+                    <a:p>
+                      <a:pPr algn="ctr"/>
+                      <a:r>
+                        <a:rPr sz="1350" b="0">
+                          <a:solidFill>
+                            <a:srgbClr val="15354B"/>
+                          </a:solidFill>
+                          <a:latin typeface="Arial"/>
+                        </a:rPr>
+                        <a:t>0.140 ms</a:t>
+                      </a:r>
+                    </a:p>
+                  </a:txBody>
+                  <a:tcPr marL="50800" marR="50800" marT="19050" marB="19050" anchor="ctr">
+                    <a:lnL w="9525" cmpd="sng">
+                      <a:solidFill>
+                        <a:srgbClr val="C9D3DB"/>
+                      </a:solidFill>
+                    </a:lnL>
+                    <a:lnR w="9525" cmpd="sng">
+                      <a:solidFill>
+                        <a:srgbClr val="C9D3DB"/>
+                      </a:solidFill>
+                    </a:lnR>
+                    <a:lnT w="9525" cmpd="sng">
+                      <a:solidFill>
+                        <a:srgbClr val="C9D3DB"/>
+                      </a:solidFill>
+                    </a:lnT>
+                    <a:lnB w="9525" cmpd="sng">
+                      <a:solidFill>
+                        <a:srgbClr val="C9D3DB"/>
+                      </a:solidFill>
+                    </a:lnB>
+                    <a:solidFill>
+                      <a:srgbClr val="FFFFFF"/>
+                    </a:solidFill>
+                  </a:tcPr>
+                </a:tc>
+              </a:tr>
+              <a:tr h="274325">
+                <a:tc>
+                  <a:txBody>
+                    <a:bodyPr wrap="square"/>
+                    <a:lstStyle/>
+                    <a:p>
+                      <a:pPr algn="l"/>
+                      <a:r>
+                        <a:rPr sz="1350" b="0">
+                          <a:solidFill>
+                            <a:srgbClr val="15354B"/>
+                          </a:solidFill>
+                          <a:latin typeface="Arial"/>
+                        </a:rPr>
+                        <a:t>Disaster relief (1,3,1,2)</a:t>
+                      </a:r>
+                    </a:p>
+                  </a:txBody>
+                  <a:tcPr marL="50800" marR="50800" marT="19050" marB="19050" anchor="ctr">
+                    <a:lnL w="9525" cmpd="sng">
+                      <a:solidFill>
+                        <a:srgbClr val="C9D3DB"/>
+                      </a:solidFill>
+                    </a:lnL>
+                    <a:lnR w="9525" cmpd="sng">
+                      <a:solidFill>
+                        <a:srgbClr val="C9D3DB"/>
+                      </a:solidFill>
+                    </a:lnR>
+                    <a:lnT w="9525" cmpd="sng">
+                      <a:solidFill>
+                        <a:srgbClr val="C9D3DB"/>
+                      </a:solidFill>
+                    </a:lnT>
+                    <a:lnB w="9525" cmpd="sng">
+                      <a:solidFill>
+                        <a:srgbClr val="C9D3DB"/>
+                      </a:solidFill>
+                    </a:lnB>
+                    <a:solidFill>
+                      <a:srgbClr val="FFFFFF"/>
+                    </a:solidFill>
+                  </a:tcPr>
+                </a:tc>
+                <a:tc>
+                  <a:txBody>
+                    <a:bodyPr wrap="square"/>
+                    <a:lstStyle/>
+                    <a:p>
+                      <a:pPr algn="ctr"/>
+                      <a:r>
+                        <a:rPr sz="1350" b="0">
+                          <a:solidFill>
+                            <a:srgbClr val="15354B"/>
+                          </a:solidFill>
+                          <a:latin typeface="Arial"/>
+                        </a:rPr>
+                        <a:t>37.52</a:t>
+                      </a:r>
+                    </a:p>
+                  </a:txBody>
+                  <a:tcPr marL="50800" marR="50800" marT="19050" marB="19050" anchor="ctr">
+                    <a:lnL w="9525" cmpd="sng">
+                      <a:solidFill>
+                        <a:srgbClr val="C9D3DB"/>
+                      </a:solidFill>
+                    </a:lnL>
+                    <a:lnR w="9525" cmpd="sng">
+                      <a:solidFill>
+                        <a:srgbClr val="C9D3DB"/>
+                      </a:solidFill>
+                    </a:lnR>
+                    <a:lnT w="9525" cmpd="sng">
+                      <a:solidFill>
+                        <a:srgbClr val="C9D3DB"/>
+                      </a:solidFill>
+                    </a:lnT>
+                    <a:lnB w="9525" cmpd="sng">
+                      <a:solidFill>
+                        <a:srgbClr val="C9D3DB"/>
+                      </a:solidFill>
+                    </a:lnB>
+                    <a:solidFill>
+                      <a:srgbClr val="FFFFFF"/>
+                    </a:solidFill>
+                  </a:tcPr>
+                </a:tc>
+                <a:tc>
+                  <a:txBody>
+                    <a:bodyPr wrap="square"/>
+                    <a:lstStyle/>
+                    <a:p>
+                      <a:pPr algn="ctr"/>
+                      <a:r>
+                        <a:rPr sz="1350" b="1">
+                          <a:solidFill>
+                            <a:srgbClr val="15354B"/>
+                          </a:solidFill>
+                          <a:latin typeface="Arial"/>
+                        </a:rPr>
+                        <a:t>44.27</a:t>
+                      </a:r>
+                    </a:p>
+                  </a:txBody>
+                  <a:tcPr marL="50800" marR="50800" marT="19050" marB="19050" anchor="ctr">
+                    <a:lnL w="9525" cmpd="sng">
+                      <a:solidFill>
+                        <a:srgbClr val="C9D3DB"/>
+                      </a:solidFill>
+                    </a:lnL>
+                    <a:lnR w="9525" cmpd="sng">
+                      <a:solidFill>
+                        <a:srgbClr val="C9D3DB"/>
+                      </a:solidFill>
+                    </a:lnR>
+                    <a:lnT w="9525" cmpd="sng">
+                      <a:solidFill>
+                        <a:srgbClr val="C9D3DB"/>
+                      </a:solidFill>
+                    </a:lnT>
+                    <a:lnB w="9525" cmpd="sng">
+                      <a:solidFill>
+                        <a:srgbClr val="C9D3DB"/>
+                      </a:solidFill>
+                    </a:lnB>
+                    <a:solidFill>
+                      <a:srgbClr val="FFFFFF"/>
+                    </a:solidFill>
+                  </a:tcPr>
+                </a:tc>
+                <a:tc>
+                  <a:txBody>
+                    <a:bodyPr wrap="square"/>
+                    <a:lstStyle/>
+                    <a:p>
+                      <a:pPr algn="ctr"/>
+                      <a:r>
+                        <a:rPr sz="1350" b="0">
+                          <a:solidFill>
+                            <a:srgbClr val="15354B"/>
+                          </a:solidFill>
+                          <a:latin typeface="Arial"/>
+                        </a:rPr>
+                        <a:t>5.63</a:t>
+                      </a:r>
+                    </a:p>
+                  </a:txBody>
+                  <a:tcPr marL="50800" marR="50800" marT="19050" marB="19050" anchor="ctr">
+                    <a:lnL w="9525" cmpd="sng">
+                      <a:solidFill>
+                        <a:srgbClr val="C9D3DB"/>
+                      </a:solidFill>
+                    </a:lnL>
+                    <a:lnR w="9525" cmpd="sng">
+                      <a:solidFill>
+                        <a:srgbClr val="C9D3DB"/>
+                      </a:solidFill>
+                    </a:lnR>
+                    <a:lnT w="9525" cmpd="sng">
+                      <a:solidFill>
+                        <a:srgbClr val="C9D3DB"/>
+                      </a:solidFill>
+                    </a:lnT>
+                    <a:lnB w="9525" cmpd="sng">
+                      <a:solidFill>
+                        <a:srgbClr val="C9D3DB"/>
+                      </a:solidFill>
+                    </a:lnB>
+                    <a:solidFill>
+                      <a:srgbClr val="FFFFFF"/>
+                    </a:solidFill>
+                  </a:tcPr>
+                </a:tc>
+                <a:tc>
+                  <a:txBody>
+                    <a:bodyPr wrap="square"/>
+                    <a:lstStyle/>
+                    <a:p>
+                      <a:pPr algn="ctr"/>
+                      <a:r>
+                        <a:rPr sz="1350" b="0">
+                          <a:solidFill>
+                            <a:srgbClr val="15354B"/>
+                          </a:solidFill>
+                          <a:latin typeface="Arial"/>
+                        </a:rPr>
+                        <a:t>88</a:t>
+                      </a:r>
+                    </a:p>
+                  </a:txBody>
+                  <a:tcPr marL="50800" marR="50800" marT="19050" marB="19050" anchor="ctr">
+                    <a:lnL w="9525" cmpd="sng">
+                      <a:solidFill>
+                        <a:srgbClr val="C9D3DB"/>
+                      </a:solidFill>
+                    </a:lnL>
+                    <a:lnR w="9525" cmpd="sng">
+                      <a:solidFill>
+                        <a:srgbClr val="C9D3DB"/>
+                      </a:solidFill>
+                    </a:lnR>
+                    <a:lnT w="9525" cmpd="sng">
+                      <a:solidFill>
+                        <a:srgbClr val="C9D3DB"/>
+                      </a:solidFill>
+                    </a:lnT>
+                    <a:lnB w="9525" cmpd="sng">
+                      <a:solidFill>
+                        <a:srgbClr val="C9D3DB"/>
+                      </a:solidFill>
+                    </a:lnB>
+                    <a:solidFill>
+                      <a:srgbClr val="FFFFFF"/>
+                    </a:solidFill>
+                  </a:tcPr>
+                </a:tc>
+                <a:tc>
+                  <a:txBody>
+                    <a:bodyPr wrap="square"/>
+                    <a:lstStyle/>
+                    <a:p>
+                      <a:pPr algn="ctr"/>
+                      <a:r>
+                        <a:rPr sz="1350" b="0">
+                          <a:solidFill>
+                            <a:srgbClr val="15354B"/>
+                          </a:solidFill>
+                          <a:latin typeface="Arial"/>
+                        </a:rPr>
+                        <a:t>min-energy</a:t>
+                      </a:r>
+                    </a:p>
+                  </a:txBody>
+                  <a:tcPr marL="50800" marR="50800" marT="19050" marB="19050" anchor="ctr">
+                    <a:lnL w="9525" cmpd="sng">
+                      <a:solidFill>
+                        <a:srgbClr val="C9D3DB"/>
+                      </a:solidFill>
+                    </a:lnL>
+                    <a:lnR w="9525" cmpd="sng">
+                      <a:solidFill>
+                        <a:srgbClr val="C9D3DB"/>
+                      </a:solidFill>
+                    </a:lnR>
+                    <a:lnT w="9525" cmpd="sng">
+                      <a:solidFill>
+                        <a:srgbClr val="C9D3DB"/>
+                      </a:solidFill>
+                    </a:lnT>
+                    <a:lnB w="9525" cmpd="sng">
+                      <a:solidFill>
+                        <a:srgbClr val="C9D3DB"/>
+                      </a:solidFill>
+                    </a:lnB>
+                    <a:solidFill>
+                      <a:srgbClr val="FFFFFF"/>
+                    </a:solidFill>
+                  </a:tcPr>
+                </a:tc>
+                <a:tc>
+                  <a:txBody>
+                    <a:bodyPr wrap="square"/>
+                    <a:lstStyle/>
+                    <a:p>
+                      <a:pPr algn="ctr"/>
+                      <a:r>
+                        <a:rPr sz="1350" b="0">
+                          <a:solidFill>
+                            <a:srgbClr val="15354B"/>
+                          </a:solidFill>
+                          <a:latin typeface="Arial"/>
+                        </a:rPr>
+                        <a:t>0.136 ms</a:t>
+                      </a:r>
+                    </a:p>
+                  </a:txBody>
+                  <a:tcPr marL="50800" marR="50800" marT="19050" marB="19050" anchor="ctr">
+                    <a:lnL w="9525" cmpd="sng">
+                      <a:solidFill>
+                        <a:srgbClr val="C9D3DB"/>
+                      </a:solidFill>
+                    </a:lnL>
+                    <a:lnR w="9525" cmpd="sng">
+                      <a:solidFill>
+                        <a:srgbClr val="C9D3DB"/>
+                      </a:solidFill>
+                    </a:lnR>
+                    <a:lnT w="9525" cmpd="sng">
+                      <a:solidFill>
+                        <a:srgbClr val="C9D3DB"/>
+                      </a:solidFill>
+                    </a:lnT>
+                    <a:lnB w="9525" cmpd="sng">
+                      <a:solidFill>
+                        <a:srgbClr val="C9D3DB"/>
+                      </a:solidFill>
+                    </a:lnB>
+                    <a:solidFill>
+                      <a:srgbClr val="FFFFFF"/>
+                    </a:solidFill>
+                  </a:tcPr>
+                </a:tc>
+              </a:tr>
+              <a:tr h="274325">
+                <a:tc>
+                  <a:txBody>
+                    <a:bodyPr wrap="square"/>
+                    <a:lstStyle/>
+                    <a:p>
+                      <a:pPr algn="l"/>
+                      <a:r>
+                        <a:rPr sz="1350" b="0">
+                          <a:solidFill>
+                            <a:srgbClr val="15354B"/>
+                          </a:solidFill>
+                          <a:latin typeface="Arial"/>
+                        </a:rPr>
+                        <a:t>Mixed cargo (3,2,2,3)</a:t>
+                      </a:r>
+                    </a:p>
+                  </a:txBody>
+                  <a:tcPr marL="50800" marR="50800" marT="19050" marB="19050" anchor="ctr">
+                    <a:lnL w="9525" cmpd="sng">
+                      <a:solidFill>
+                        <a:srgbClr val="C9D3DB"/>
+                      </a:solidFill>
+                    </a:lnL>
+                    <a:lnR w="9525" cmpd="sng">
+                      <a:solidFill>
+                        <a:srgbClr val="C9D3DB"/>
+                      </a:solidFill>
+                    </a:lnR>
+                    <a:lnT w="9525" cmpd="sng">
+                      <a:solidFill>
+                        <a:srgbClr val="C9D3DB"/>
+                      </a:solidFill>
+                    </a:lnT>
+                    <a:lnB w="9525" cmpd="sng">
+                      <a:solidFill>
+                        <a:srgbClr val="C9D3DB"/>
+                      </a:solidFill>
+                    </a:lnB>
+                    <a:solidFill>
+                      <a:srgbClr val="FFFFFF"/>
+                    </a:solidFill>
+                  </a:tcPr>
+                </a:tc>
+                <a:tc>
+                  <a:txBody>
+                    <a:bodyPr wrap="square"/>
+                    <a:lstStyle/>
+                    <a:p>
+                      <a:pPr algn="ctr"/>
+                      <a:r>
+                        <a:rPr sz="1350" b="0">
+                          <a:solidFill>
+                            <a:srgbClr val="15354B"/>
+                          </a:solidFill>
+                          <a:latin typeface="Arial"/>
+                        </a:rPr>
+                        <a:t>39.90</a:t>
+                      </a:r>
+                    </a:p>
+                  </a:txBody>
+                  <a:tcPr marL="50800" marR="50800" marT="19050" marB="19050" anchor="ctr">
+                    <a:lnL w="9525" cmpd="sng">
+                      <a:solidFill>
+                        <a:srgbClr val="C9D3DB"/>
+                      </a:solidFill>
+                    </a:lnL>
+                    <a:lnR w="9525" cmpd="sng">
+                      <a:solidFill>
+                        <a:srgbClr val="C9D3DB"/>
+                      </a:solidFill>
+                    </a:lnR>
+                    <a:lnT w="9525" cmpd="sng">
+                      <a:solidFill>
+                        <a:srgbClr val="C9D3DB"/>
+                      </a:solidFill>
+                    </a:lnT>
+                    <a:lnB w="9525" cmpd="sng">
+                      <a:solidFill>
+                        <a:srgbClr val="C9D3DB"/>
+                      </a:solidFill>
+                    </a:lnB>
+                    <a:solidFill>
+                      <a:srgbClr val="FFFFFF"/>
+                    </a:solidFill>
+                  </a:tcPr>
+                </a:tc>
+                <a:tc>
+                  <a:txBody>
+                    <a:bodyPr wrap="square"/>
+                    <a:lstStyle/>
+                    <a:p>
+                      <a:pPr algn="ctr"/>
+                      <a:r>
+                        <a:rPr sz="1350" b="0">
+                          <a:solidFill>
+                            <a:srgbClr val="15354B"/>
+                          </a:solidFill>
+                          <a:latin typeface="Arial"/>
+                        </a:rPr>
+                        <a:t>45.06</a:t>
+                      </a:r>
+                    </a:p>
+                  </a:txBody>
+                  <a:tcPr marL="50800" marR="50800" marT="19050" marB="19050" anchor="ctr">
+                    <a:lnL w="9525" cmpd="sng">
+                      <a:solidFill>
+                        <a:srgbClr val="C9D3DB"/>
+                      </a:solidFill>
+                    </a:lnL>
+                    <a:lnR w="9525" cmpd="sng">
+                      <a:solidFill>
+                        <a:srgbClr val="C9D3DB"/>
+                      </a:solidFill>
+                    </a:lnR>
+                    <a:lnT w="9525" cmpd="sng">
+                      <a:solidFill>
+                        <a:srgbClr val="C9D3DB"/>
+                      </a:solidFill>
+                    </a:lnT>
+                    <a:lnB w="9525" cmpd="sng">
+                      <a:solidFill>
+                        <a:srgbClr val="C9D3DB"/>
+                      </a:solidFill>
+                    </a:lnB>
+                    <a:solidFill>
+                      <a:srgbClr val="FFFFFF"/>
+                    </a:solidFill>
+                  </a:tcPr>
+                </a:tc>
+                <a:tc>
+                  <a:txBody>
+                    <a:bodyPr wrap="square"/>
+                    <a:lstStyle/>
+                    <a:p>
+                      <a:pPr algn="ctr"/>
+                      <a:r>
+                        <a:rPr sz="1350" b="0">
+                          <a:solidFill>
+                            <a:srgbClr val="15354B"/>
+                          </a:solidFill>
+                          <a:latin typeface="Arial"/>
+                        </a:rPr>
+                        <a:t>2.74</a:t>
+                      </a:r>
+                    </a:p>
+                  </a:txBody>
+                  <a:tcPr marL="50800" marR="50800" marT="19050" marB="19050" anchor="ctr">
+                    <a:lnL w="9525" cmpd="sng">
+                      <a:solidFill>
+                        <a:srgbClr val="C9D3DB"/>
+                      </a:solidFill>
+                    </a:lnL>
+                    <a:lnR w="9525" cmpd="sng">
+                      <a:solidFill>
+                        <a:srgbClr val="C9D3DB"/>
+                      </a:solidFill>
+                    </a:lnR>
+                    <a:lnT w="9525" cmpd="sng">
+                      <a:solidFill>
+                        <a:srgbClr val="C9D3DB"/>
+                      </a:solidFill>
+                    </a:lnT>
+                    <a:lnB w="9525" cmpd="sng">
+                      <a:solidFill>
+                        <a:srgbClr val="C9D3DB"/>
+                      </a:solidFill>
+                    </a:lnB>
+                    <a:solidFill>
+                      <a:srgbClr val="FFFFFF"/>
+                    </a:solidFill>
+                  </a:tcPr>
+                </a:tc>
+                <a:tc>
+                  <a:txBody>
+                    <a:bodyPr wrap="square"/>
+                    <a:lstStyle/>
+                    <a:p>
+                      <a:pPr algn="ctr"/>
+                      <a:r>
+                        <a:rPr sz="1350" b="0">
+                          <a:solidFill>
+                            <a:srgbClr val="15354B"/>
+                          </a:solidFill>
+                          <a:latin typeface="Arial"/>
+                        </a:rPr>
+                        <a:t>32</a:t>
+                      </a:r>
+                    </a:p>
+                  </a:txBody>
+                  <a:tcPr marL="50800" marR="50800" marT="19050" marB="19050" anchor="ctr">
+                    <a:lnL w="9525" cmpd="sng">
+                      <a:solidFill>
+                        <a:srgbClr val="C9D3DB"/>
+                      </a:solidFill>
+                    </a:lnL>
+                    <a:lnR w="9525" cmpd="sng">
+                      <a:solidFill>
+                        <a:srgbClr val="C9D3DB"/>
+                      </a:solidFill>
+                    </a:lnR>
+                    <a:lnT w="9525" cmpd="sng">
+                      <a:solidFill>
+                        <a:srgbClr val="C9D3DB"/>
+                      </a:solidFill>
+                    </a:lnT>
+                    <a:lnB w="9525" cmpd="sng">
+                      <a:solidFill>
+                        <a:srgbClr val="C9D3DB"/>
+                      </a:solidFill>
+                    </a:lnB>
+                    <a:solidFill>
+                      <a:srgbClr val="FFFFFF"/>
+                    </a:solidFill>
+                  </a:tcPr>
+                </a:tc>
+                <a:tc>
+                  <a:txBody>
+                    <a:bodyPr wrap="square"/>
+                    <a:lstStyle/>
+                    <a:p>
+                      <a:pPr algn="ctr"/>
+                      <a:r>
+                        <a:rPr sz="1350" b="0">
+                          <a:solidFill>
+                            <a:srgbClr val="15354B"/>
+                          </a:solidFill>
+                          <a:latin typeface="Arial"/>
+                        </a:rPr>
+                        <a:t>non-extreme</a:t>
+                      </a:r>
+                    </a:p>
+                  </a:txBody>
+                  <a:tcPr marL="50800" marR="50800" marT="19050" marB="19050" anchor="ctr">
+                    <a:lnL w="9525" cmpd="sng">
+                      <a:solidFill>
+                        <a:srgbClr val="C9D3DB"/>
+                      </a:solidFill>
+                    </a:lnL>
+                    <a:lnR w="9525" cmpd="sng">
+                      <a:solidFill>
+                        <a:srgbClr val="C9D3DB"/>
+                      </a:solidFill>
+                    </a:lnR>
+                    <a:lnT w="9525" cmpd="sng">
+                      <a:solidFill>
+                        <a:srgbClr val="C9D3DB"/>
+                      </a:solidFill>
+                    </a:lnT>
+                    <a:lnB w="9525" cmpd="sng">
+                      <a:solidFill>
+                        <a:srgbClr val="C9D3DB"/>
+                      </a:solidFill>
+                    </a:lnB>
+                    <a:solidFill>
+                      <a:srgbClr val="FFFFFF"/>
+                    </a:solidFill>
+                  </a:tcPr>
+                </a:tc>
+                <a:tc>
+                  <a:txBody>
+                    <a:bodyPr wrap="square"/>
+                    <a:lstStyle/>
+                    <a:p>
+                      <a:pPr algn="ctr"/>
+                      <a:r>
+                        <a:rPr sz="1350" b="0">
+                          <a:solidFill>
+                            <a:srgbClr val="15354B"/>
+                          </a:solidFill>
+                          <a:latin typeface="Arial"/>
+                        </a:rPr>
+                        <a:t>0.136 ms</a:t>
+                      </a:r>
+                    </a:p>
+                  </a:txBody>
+                  <a:tcPr marL="50800" marR="50800" marT="19050" marB="19050" anchor="ctr">
+                    <a:lnL w="9525" cmpd="sng">
+                      <a:solidFill>
+                        <a:srgbClr val="C9D3DB"/>
+                      </a:solidFill>
+                    </a:lnL>
+                    <a:lnR w="9525" cmpd="sng">
+                      <a:solidFill>
+                        <a:srgbClr val="C9D3DB"/>
+                      </a:solidFill>
+                    </a:lnR>
+                    <a:lnT w="9525" cmpd="sng">
+                      <a:solidFill>
+                        <a:srgbClr val="C9D3DB"/>
+                      </a:solidFill>
+                    </a:lnT>
+                    <a:lnB w="9525" cmpd="sng">
+                      <a:solidFill>
+                        <a:srgbClr val="C9D3DB"/>
+                      </a:solidFill>
+                    </a:lnB>
+                    <a:solidFill>
+                      <a:srgbClr val="FFFFFF"/>
+                    </a:solidFill>
+                  </a:tcPr>
+                </a:tc>
+              </a:tr>
+            </a:tbl>
+          </a:graphicData>
+        </a:graphic>
+      </p:graphicFrame>
+      <p:sp>
+        <p:nvSpPr>
+          <p:cNvPr id="53" name="Tier 2 Explanation"/>
+          <p:cNvSpPr txBox="1"/>
+          <p:nvPr/>
+        </p:nvSpPr>
+        <p:spPr>
+          <a:xfrm>
+            <a:off x="20167687" y="10008167"/>
+            <a:ext cx="9421677" cy="605409"/>
+          </a:xfrm>
+          <a:prstGeom prst="rect">
+            <a:avLst/>
+          </a:prstGeom>
+          <a:noFill/>
+        </p:spPr>
+        <p:txBody>
+          <a:bodyPr wrap="square" lIns="0" rIns="0" tIns="0" bIns="0" anchor="t">
+            <a:spAutoFit/>
+          </a:bodyPr>
+          <a:lstStyle/>
+          <a:p>
+            <a:pPr algn="l">
+              <a:lnSpc>
+                <a:spcPts val="1900"/>
+              </a:lnSpc>
+            </a:pPr>
+            <a:r>
+              <a:rPr sz="1550" b="0">
+                <a:solidFill>
+                  <a:srgbClr val="15354B"/>
+                </a:solidFill>
+                <a:latin typeface="Arial"/>
+              </a:rPr>
+              <a:t>Four presets get four different routes, three non-extreme. Fragile medical flies 10.5% further than emergency medicine for 71% less risk; disaster relief takes the min-energy route.</a:t>
+            </a:r>
+          </a:p>
+        </p:txBody>
+      </p:sp>
+      <p:sp>
+        <p:nvSpPr>
+          <p:cNvPr id="54" name="Wind Sweep Title"/>
+          <p:cNvSpPr txBox="1"/>
+          <p:nvPr/>
+        </p:nvSpPr>
+        <p:spPr>
+          <a:xfrm>
+            <a:off x="20167687" y="10764928"/>
+            <a:ext cx="9421677" cy="340542"/>
+          </a:xfrm>
+          <a:prstGeom prst="rect">
+            <a:avLst/>
+          </a:prstGeom>
+          <a:noFill/>
+        </p:spPr>
+        <p:txBody>
+          <a:bodyPr wrap="square" lIns="0" rIns="0" tIns="0" bIns="0" anchor="t">
+            <a:spAutoFit/>
+          </a:bodyPr>
+          <a:lstStyle/>
+          <a:p>
+            <a:pPr algn="l"/>
+            <a:r>
+              <a:rPr sz="1700" b="1">
+                <a:solidFill>
+                  <a:srgbClr val="087F8C"/>
+                </a:solidFill>
+                <a:latin typeface="Arial"/>
+              </a:rPr>
+              <a:t>Wind direction sweep on S2 (25 km/h, gust 35; dashed = calm air)</a:t>
+            </a:r>
+          </a:p>
+        </p:txBody>
+      </p:sp>
+      <p:pic>
+        <p:nvPicPr>
+          <p:cNvPr id="55" name="Wind Direction Sweep" descr="8db7302d-wind_direction_sweep.png"/>
+          <p:cNvPicPr>
+            <a:picLocks noChangeAspect="1"/>
+          </p:cNvPicPr>
+          <p:nvPr/>
+        </p:nvPicPr>
+        <p:blipFill>
+          <a:blip r:embed="rId5"/>
+          <a:stretch>
+            <a:fillRect/>
+          </a:stretch>
+        </p:blipFill>
+        <p:spPr>
+          <a:xfrm>
+            <a:off x="20129849" y="11124390"/>
+            <a:ext cx="9421677" cy="2609079"/>
+          </a:xfrm>
+          <a:prstGeom prst="rect">
+            <a:avLst/>
+          </a:prstGeom>
+        </p:spPr>
+      </p:pic>
+      <p:sp>
+        <p:nvSpPr>
+          <p:cNvPr id="56" name="Wind Sweep Explanation"/>
+          <p:cNvSpPr txBox="1"/>
+          <p:nvPr/>
+        </p:nvSpPr>
+        <p:spPr>
+          <a:xfrm>
+            <a:off x="20167687" y="13790227"/>
+            <a:ext cx="9421677" cy="908113"/>
+          </a:xfrm>
+          <a:prstGeom prst="rect">
+            <a:avLst/>
+          </a:prstGeom>
+          <a:noFill/>
+        </p:spPr>
+        <p:txBody>
+          <a:bodyPr wrap="square" lIns="0" rIns="0" tIns="0" bIns="0" anchor="t">
+            <a:spAutoFit/>
+          </a:bodyPr>
+          <a:lstStyle/>
+          <a:p>
+            <a:pPr algn="l">
+              <a:lnSpc>
+                <a:spcPts val="1900"/>
+              </a:lnSpc>
+            </a:pPr>
+            <a:r>
+              <a:rPr sz="1550" b="0">
+                <a:solidFill>
+                  <a:srgbClr val="15354B"/>
+                </a:solidFill>
+                <a:latin typeface="Arial"/>
+              </a:rPr>
+              <a:t>Panels: front size, minimum energy and minimum cumulative risk as the wind turns 360°. Direction alone moves the cheapest route's energy by 27.5%; opposite winds give equal risk (same crosswind) but different energy (headwind vs tailwind), and the front shrinks from 36 routes in calm air to 6–15.</a:t>
+            </a:r>
+          </a:p>
+        </p:txBody>
+      </p:sp>
+      <p:sp>
+        <p:nvSpPr>
+          <p:cNvPr id="57" name="SITL Title"/>
+          <p:cNvSpPr txBox="1"/>
+          <p:nvPr/>
+        </p:nvSpPr>
+        <p:spPr>
+          <a:xfrm>
+            <a:off x="20167687" y="14774017"/>
+            <a:ext cx="9421677" cy="340542"/>
+          </a:xfrm>
+          <a:prstGeom prst="rect">
+            <a:avLst/>
+          </a:prstGeom>
+          <a:noFill/>
+        </p:spPr>
+        <p:txBody>
+          <a:bodyPr wrap="square" lIns="0" rIns="0" tIns="0" bIns="0" anchor="t">
+            <a:spAutoFit/>
+          </a:bodyPr>
+          <a:lstStyle/>
+          <a:p>
+            <a:pPr algn="l"/>
+            <a:r>
+              <a:rPr sz="1700" b="1">
+                <a:solidFill>
+                  <a:srgbClr val="087F8C"/>
+                </a:solidFill>
+                <a:latin typeface="Arial"/>
+              </a:rPr>
+              <a:t>Tier 2 mission flown in Gazebo + ArduPilot SITL</a:t>
+            </a:r>
+          </a:p>
+        </p:txBody>
+      </p:sp>
+      <p:pic>
+        <p:nvPicPr>
+          <p:cNvPr id="58" name="SITL Gazebo Screenshot" descr="e0d7329c-sitl_gazebo_screenshot.jpg"/>
+          <p:cNvPicPr>
+            <a:picLocks noChangeAspect="1"/>
+          </p:cNvPicPr>
+          <p:nvPr/>
+        </p:nvPicPr>
+        <p:blipFill>
+          <a:blip r:embed="rId6"/>
+          <a:srcRect b="5778"/>
+          <a:stretch>
+            <a:fillRect/>
+          </a:stretch>
+        </p:blipFill>
+        <p:spPr>
+          <a:xfrm>
+            <a:off x="20129849" y="15152397"/>
+            <a:ext cx="4729757" cy="2506771"/>
+          </a:xfrm>
+          <a:prstGeom prst="rect">
+            <a:avLst/>
+          </a:prstGeom>
+          <a:ln w="12700">
+            <a:solidFill>
+              <a:srgbClr val="D5DEE5"/>
+            </a:solidFill>
+          </a:ln>
+        </p:spPr>
+      </p:pic>
+      <p:sp>
+        <p:nvSpPr>
+          <p:cNvPr id="59" name="SITL Explanation"/>
+          <p:cNvSpPr txBox="1"/>
+          <p:nvPr/>
+        </p:nvSpPr>
+        <p:spPr>
+          <a:xfrm>
+            <a:off x="25029878" y="15133478"/>
+            <a:ext cx="4521648" cy="2582447"/>
+          </a:xfrm>
+          <a:prstGeom prst="rect">
+            <a:avLst/>
+          </a:prstGeom>
+          <a:noFill/>
+        </p:spPr>
+        <p:txBody>
+          <a:bodyPr wrap="square" lIns="0" rIns="0" tIns="0" bIns="0" anchor="t">
+            <a:spAutoFit/>
+          </a:bodyPr>
+          <a:lstStyle/>
+          <a:p>
+            <a:pPr algn="l">
+              <a:lnSpc>
+                <a:spcPts val="1900"/>
+              </a:lnSpc>
+            </a:pPr>
+            <a:r>
+              <a:rPr sz="1550" b="0">
+                <a:solidFill>
+                  <a:srgbClr val="15354B"/>
+                </a:solidFill>
+                <a:latin typeface="Arial"/>
+              </a:rPr>
+              <a:t>Gazebo city world from OSM buildings (left), MAVProxy console reaching each waypoint and the QGroundControl mission view (right).</a:t>
+            </a:r>
+          </a:p>
+          <a:p>
+            <a:pPr algn="l">
+              <a:lnSpc>
+                <a:spcPts val="1900"/>
+              </a:lnSpc>
+              <a:spcBef>
+                <a:spcPts val="300"/>
+              </a:spcBef>
+            </a:pPr>
+            <a:r>
+              <a:rPr sz="1550" b="0">
+                <a:solidFill>
+                  <a:srgbClr val="15354B"/>
+                </a:solidFill>
+                <a:latin typeface="Arial"/>
+              </a:rPr>
+              <a:t>Upload, read-back, AUTO, landing and disarm all succeeded: </a:t>
+            </a:r>
+            <a:r>
+              <a:rPr sz="1550" b="1">
+                <a:solidFill>
+                  <a:srgbClr val="15354B"/>
+                </a:solidFill>
+                <a:latin typeface="Arial"/>
+              </a:rPr>
+              <a:t>cross-track RMS 0.11–0.13 m, landing offset 0.01–0.02 m.</a:t>
+            </a:r>
+          </a:p>
+        </p:txBody>
+      </p:sp>
+      <p:sp>
+        <p:nvSpPr>
+          <p:cNvPr id="60" name="Conclusion Text"/>
+          <p:cNvSpPr txBox="1"/>
+          <p:nvPr/>
+        </p:nvSpPr>
+        <p:spPr>
+          <a:xfrm>
+            <a:off x="20092011" y="18586201"/>
+            <a:ext cx="9535191" cy="2565275"/>
+          </a:xfrm>
+          <a:prstGeom prst="rect">
+            <a:avLst/>
+          </a:prstGeom>
+          <a:noFill/>
+        </p:spPr>
+        <p:txBody>
+          <a:bodyPr wrap="square" lIns="0" rIns="0" tIns="0" bIns="0" anchor="t">
+            <a:spAutoFit/>
+          </a:bodyPr>
+          <a:lstStyle/>
+          <a:p>
+            <a:pPr algn="l">
+              <a:lnSpc>
+                <a:spcPts val="2250"/>
+              </a:lnSpc>
+            </a:pPr>
+            <a:r>
+              <a:rPr sz="1800" b="1">
+                <a:solidFill>
+                  <a:srgbClr val="087F8C"/>
+                </a:solidFill>
+                <a:latin typeface="Arial"/>
+              </a:rPr>
+              <a:t>Conclusion: </a:t>
+            </a:r>
+            <a:r>
+              <a:rPr sz="1800" b="0">
+                <a:solidFill>
+                  <a:srgbClr val="15354B"/>
+                </a:solidFill>
+                <a:latin typeface="Arial"/>
+              </a:rPr>
+              <a:t>Tier 1 gives an exact front (IGD 0) once per region and weather window; Tier 2 turns payload tags into distinct, payload-appropriate routes in ~0.14 ms, and those routes fly in SITL within 0.13 m of the plan. Wind direction must be modelled per edge.</a:t>
+            </a:r>
+          </a:p>
+          <a:p>
+            <a:pPr algn="l">
+              <a:lnSpc>
+                <a:spcPts val="2250"/>
+              </a:lnSpc>
+              <a:spcBef>
+                <a:spcPts val="500"/>
+              </a:spcBef>
+            </a:pPr>
+            <a:r>
+              <a:rPr sz="1800" b="1">
+                <a:solidFill>
+                  <a:srgbClr val="087F8C"/>
+                </a:solidFill>
+                <a:latin typeface="Arial"/>
+              </a:rPr>
+              <a:t>Contribution: </a:t>
+            </a:r>
+            <a:r>
+              <a:rPr sz="1800" b="0">
+                <a:solidFill>
+                  <a:srgbClr val="15354B"/>
+                </a:solidFill>
+                <a:latin typeface="Arial"/>
+              </a:rPr>
+              <a:t>an explicit formula from payload tags to Pareto selection weights over a reusable exact front: no expert re-tuning and no re-search per mission.</a:t>
+            </a:r>
+          </a:p>
+          <a:p>
+            <a:pPr algn="l">
+              <a:lnSpc>
+                <a:spcPts val="2250"/>
+              </a:lnSpc>
+              <a:spcBef>
+                <a:spcPts val="500"/>
+              </a:spcBef>
+            </a:pPr>
+            <a:r>
+              <a:rPr sz="1800" b="1">
+                <a:solidFill>
+                  <a:srgbClr val="087F8C"/>
+                </a:solidFill>
+                <a:latin typeface="Arial"/>
+              </a:rPr>
+              <a:t>Future work: </a:t>
+            </a:r>
+            <a:r>
+              <a:rPr sz="1800" b="0">
+                <a:solidFill>
+                  <a:srgbClr val="15354B"/>
+                </a:solidFill>
+                <a:latin typeface="Arial"/>
+              </a:rPr>
+              <a:t>full MOPSO benchmark (100 × 200 × 30 runs, significance tests), wind in Gazebo and battery calibration; Phase II on a Pixhawk F450 with Raspberry Pi 5 running Tier 2 on board.</a:t>
+            </a:r>
           </a:p>
         </p:txBody>
       </p:sp>
